--- a/LabBook_30.pptx
+++ b/LabBook_30.pptx
@@ -5,10 +5,10 @@
     <p:sldMasterId id="2147483648" r:id="rId1"/>
   </p:sldMasterIdLst>
   <p:notesMasterIdLst>
-    <p:notesMasterId r:id="rId13"/>
+    <p:notesMasterId r:id="rId14"/>
   </p:notesMasterIdLst>
   <p:handoutMasterIdLst>
-    <p:handoutMasterId r:id="rId14"/>
+    <p:handoutMasterId r:id="rId15"/>
   </p:handoutMasterIdLst>
   <p:sldIdLst>
     <p:sldId id="256" r:id="rId2"/>
@@ -17,11 +17,12 @@
     <p:sldId id="296" r:id="rId5"/>
     <p:sldId id="375" r:id="rId6"/>
     <p:sldId id="376" r:id="rId7"/>
-    <p:sldId id="377" r:id="rId8"/>
-    <p:sldId id="388" r:id="rId9"/>
-    <p:sldId id="380" r:id="rId10"/>
-    <p:sldId id="381" r:id="rId11"/>
-    <p:sldId id="288" r:id="rId12"/>
+    <p:sldId id="389" r:id="rId8"/>
+    <p:sldId id="377" r:id="rId9"/>
+    <p:sldId id="388" r:id="rId10"/>
+    <p:sldId id="380" r:id="rId11"/>
+    <p:sldId id="381" r:id="rId12"/>
+    <p:sldId id="288" r:id="rId13"/>
   </p:sldIdLst>
   <p:sldSz cx="12192000" cy="6858000"/>
   <p:notesSz cx="12192000" cy="6858000"/>
@@ -236,7 +237,7 @@
           <a:p>
             <a:fld id="{8438F8DC-35B0-48E6-A86E-42F1F08DD00F}" type="datetimeFigureOut">
               <a:rPr lang="es-ES" smtClean="0"/>
-              <a:t>03/05/2026</a:t>
+              <a:t>28/05/2026</a:t>
             </a:fld>
             <a:endParaRPr lang="es-ES"/>
           </a:p>
@@ -314,7 +315,7 @@
           <a:p>
             <a:fld id="{4116A549-763A-4A89-A454-A94BAF51395E}" type="slidenum">
               <a:rPr lang="es-ES" smtClean="0"/>
-              <a:t>‹Nº›</a:t>
+              <a:t>‹#›</a:t>
             </a:fld>
             <a:endParaRPr lang="es-ES"/>
           </a:p>
@@ -413,7 +414,7 @@
           <a:p>
             <a:fld id="{FACBDC12-F39B-4B97-8F4D-6734F9D366FF}" type="datetimeFigureOut">
               <a:rPr lang="es-ES" smtClean="0"/>
-              <a:t>03/05/2026</a:t>
+              <a:t>28/05/2026</a:t>
             </a:fld>
             <a:endParaRPr lang="es-ES"/>
           </a:p>
@@ -571,7 +572,7 @@
           <a:p>
             <a:fld id="{676223B9-C868-4436-87D9-1A3152E1157A}" type="slidenum">
               <a:rPr lang="es-ES" smtClean="0"/>
-              <a:t>‹Nº›</a:t>
+              <a:t>‹#›</a:t>
             </a:fld>
             <a:endParaRPr lang="es-ES"/>
           </a:p>
@@ -1051,7 +1052,7 @@
           </a:lstStyle>
           <a:p>
             <a:fld id="{B6F15528-21DE-4FAA-801E-634DDDAF4B2B}" type="slidenum">
-              <a:t>‹Nº›</a:t>
+              <a:t>‹#›</a:t>
             </a:fld>
             <a:endParaRPr/>
           </a:p>
@@ -1218,7 +1219,7 @@
           </a:lstStyle>
           <a:p>
             <a:fld id="{B6F15528-21DE-4FAA-801E-634DDDAF4B2B}" type="slidenum">
-              <a:t>‹Nº›</a:t>
+              <a:t>‹#›</a:t>
             </a:fld>
             <a:endParaRPr/>
           </a:p>
@@ -1440,7 +1441,7 @@
           </a:lstStyle>
           <a:p>
             <a:fld id="{B6F15528-21DE-4FAA-801E-634DDDAF4B2B}" type="slidenum">
-              <a:t>‹Nº›</a:t>
+              <a:t>‹#›</a:t>
             </a:fld>
             <a:endParaRPr/>
           </a:p>
@@ -1647,7 +1648,7 @@
           </a:lstStyle>
           <a:p>
             <a:fld id="{B6F15528-21DE-4FAA-801E-634DDDAF4B2B}" type="slidenum">
-              <a:t>‹Nº›</a:t>
+              <a:t>‹#›</a:t>
             </a:fld>
             <a:endParaRPr/>
           </a:p>
@@ -1811,7 +1812,7 @@
           </a:lstStyle>
           <a:p>
             <a:fld id="{B6F15528-21DE-4FAA-801E-634DDDAF4B2B}" type="slidenum">
-              <a:t>‹Nº›</a:t>
+              <a:t>‹#›</a:t>
             </a:fld>
             <a:endParaRPr/>
           </a:p>
@@ -2214,7 +2215,7 @@
             <a:fld id="{C2F52289-4012-4053-9770-FE82CEB9514F}" type="slidenum">
               <a:rPr lang="en-US" smtClean="0"/>
               <a:pPr/>
-              <a:t>‹Nº›</a:t>
+              <a:t>‹#›</a:t>
             </a:fld>
             <a:endParaRPr lang="en-US" dirty="0"/>
           </a:p>
@@ -2501,7 +2502,7 @@
           </a:lstStyle>
           <a:p>
             <a:fld id="{B6F15528-21DE-4FAA-801E-634DDDAF4B2B}" type="slidenum">
-              <a:t>‹Nº›</a:t>
+              <a:t>‹#›</a:t>
             </a:fld>
             <a:endParaRPr/>
           </a:p>
@@ -2710,20 +2711,34 @@
               </a:spcBef>
             </a:pPr>
             <a:r>
-              <a:rPr lang="es-ES" sz="3200" b="1" dirty="0">
+              <a:rPr lang="es-ES" sz="3200" b="1" noProof="0" dirty="0">
                 <a:latin typeface="Lucida Sans"/>
                 <a:cs typeface="Lucida Sans"/>
               </a:rPr>
-              <a:t>Lab Book 3.0 Circuits and Compact </a:t>
-            </a:r>
-            <a:r>
-              <a:rPr lang="es-ES" sz="3200" b="1" dirty="0" err="1">
+              <a:t>Lab Book 3.0 </a:t>
+            </a:r>
+            <a:r>
+              <a:rPr lang="es-ES" sz="3200" b="1" noProof="0" dirty="0" err="1">
                 <a:latin typeface="Lucida Sans"/>
                 <a:cs typeface="Lucida Sans"/>
               </a:rPr>
+              <a:t>Circuits</a:t>
+            </a:r>
+            <a:r>
+              <a:rPr lang="es-ES" sz="3200" b="1" noProof="0" dirty="0">
+                <a:latin typeface="Lucida Sans"/>
+                <a:cs typeface="Lucida Sans"/>
+              </a:rPr>
+              <a:t> and Compact </a:t>
+            </a:r>
+            <a:r>
+              <a:rPr lang="es-ES" sz="3200" b="1" noProof="0" dirty="0" err="1">
+                <a:latin typeface="Lucida Sans"/>
+                <a:cs typeface="Lucida Sans"/>
+              </a:rPr>
               <a:t>Models</a:t>
             </a:r>
-            <a:endParaRPr sz="3200" dirty="0">
+            <a:endParaRPr lang="es-ES" sz="3200" noProof="0" dirty="0">
               <a:latin typeface="Lucida Sans"/>
               <a:cs typeface="Lucida Sans"/>
             </a:endParaRPr>
@@ -2760,20 +2775,13 @@
               </a:spcBef>
             </a:pPr>
             <a:r>
-              <a:rPr lang="es-ES" spc="165" dirty="0" err="1">
+              <a:rPr lang="es-ES" spc="165" noProof="0" dirty="0">
                 <a:latin typeface="Arial"/>
                 <a:cs typeface="Arial"/>
               </a:rPr>
-              <a:t>Student</a:t>
-            </a:r>
-            <a:r>
-              <a:rPr lang="es-ES" spc="165" dirty="0">
-                <a:latin typeface="Arial"/>
-                <a:cs typeface="Arial"/>
-              </a:rPr>
-              <a:t>: </a:t>
-            </a:r>
-            <a:endParaRPr sz="1800" dirty="0">
+              <a:t>Student: </a:t>
+            </a:r>
+            <a:endParaRPr lang="es-ES" sz="1800" noProof="0" dirty="0">
               <a:latin typeface="Arial"/>
               <a:cs typeface="Arial"/>
             </a:endParaRPr>
@@ -2805,7 +2813,7 @@
           <a:bodyPr wrap="square" lIns="0" tIns="0" rIns="0" bIns="0" rtlCol="0"/>
           <a:lstStyle/>
           <a:p>
-            <a:endParaRPr/>
+            <a:endParaRPr lang="es-ES" noProof="0" dirty="0"/>
           </a:p>
         </p:txBody>
       </p:sp>
@@ -2831,10 +2839,10 @@
           <a:lstStyle/>
           <a:p>
             <a:fld id="{B6F15528-21DE-4FAA-801E-634DDDAF4B2B}" type="slidenum">
-              <a:rPr lang="es-ES" smtClean="0"/>
+              <a:rPr lang="es-ES" noProof="0" smtClean="0"/>
               <a:t>1</a:t>
             </a:fld>
-            <a:endParaRPr lang="es-ES"/>
+            <a:endParaRPr lang="es-ES" noProof="0" dirty="0"/>
           </a:p>
         </p:txBody>
       </p:sp>
@@ -2885,7 +2893,7 @@
           <a:lstStyle/>
           <a:p>
             <a:r>
-              <a:rPr lang="en-US"/>
+              <a:rPr lang="es-ES" noProof="0" dirty="0"/>
               <a:t>LAB 3.0. CIRCUITS &amp; COMPACT MODELS</a:t>
             </a:r>
           </a:p>
@@ -2913,11 +2921,11 @@
           <a:lstStyle/>
           <a:p>
             <a:fld id="{C2F52289-4012-4053-9770-FE82CEB9514F}" type="slidenum">
-              <a:rPr lang="en-US" smtClean="0"/>
+              <a:rPr lang="es-ES" noProof="0" smtClean="0"/>
               <a:pPr/>
               <a:t>10</a:t>
             </a:fld>
-            <a:endParaRPr lang="en-US" dirty="0"/>
+            <a:endParaRPr lang="es-ES" noProof="0" dirty="0"/>
           </a:p>
         </p:txBody>
       </p:sp>
@@ -2935,8 +2943,8 @@
         </p:nvSpPr>
         <p:spPr>
           <a:xfrm>
-            <a:off x="611029" y="4860335"/>
-            <a:ext cx="11199530" cy="830997"/>
+            <a:off x="583240" y="5024005"/>
+            <a:ext cx="11199530" cy="1015663"/>
           </a:xfrm>
           <a:prstGeom prst="rect">
             <a:avLst/>
@@ -2960,42 +2968,66 @@
           <a:p>
             <a:pPr algn="just"/>
             <a:r>
-              <a:rPr lang="en-US" sz="1200" dirty="0">
-                <a:latin typeface="Arial" panose="020B0604020202020204" pitchFamily="34" charset="0"/>
-                <a:cs typeface="Arial" panose="020B0604020202020204" pitchFamily="34" charset="0"/>
-              </a:rPr>
-              <a:t>Comment results. Try to classify the resonances, in which case are you close to critical coupling? Why?</a:t>
+              <a:rPr lang="es-ES" sz="1200" noProof="0" dirty="0">
+                <a:latin typeface="Arial" panose="020B0604020202020204" pitchFamily="34" charset="0"/>
+                <a:cs typeface="Arial" panose="020B0604020202020204" pitchFamily="34" charset="0"/>
+              </a:rPr>
+              <a:t>En los casos de K=0.1 y 0.2, existe sub acoplamiento, en este caso la luz entrante es menor de la que se pierde en el anillo.</a:t>
             </a:r>
           </a:p>
           <a:p>
             <a:pPr algn="just"/>
-            <a:endParaRPr lang="en-US" sz="1200" dirty="0">
+            <a:r>
+              <a:rPr lang="es-ES" sz="1200" dirty="0">
+                <a:latin typeface="Arial" panose="020B0604020202020204" pitchFamily="34" charset="0"/>
+                <a:cs typeface="Arial" panose="020B0604020202020204" pitchFamily="34" charset="0"/>
+              </a:rPr>
+              <a:t>El caso de K=0.3 es el acoplamiento crítico, donde la potencia introducida es exactamente igual a la de perdida en el anillo, esto se muestra con la muesca que vemos más fácilmente en la gráfica en dB, donde vemos que llega por debajo de -60 dB</a:t>
+            </a:r>
+          </a:p>
+          <a:p>
+            <a:pPr algn="just"/>
+            <a:r>
+              <a:rPr lang="es-ES" sz="1200" noProof="0" dirty="0">
+                <a:latin typeface="Arial" panose="020B0604020202020204" pitchFamily="34" charset="0"/>
+                <a:cs typeface="Arial" panose="020B0604020202020204" pitchFamily="34" charset="0"/>
+              </a:rPr>
+              <a:t>A partir de este caso, para K&gt;0.3, nos encontramos con sobre acoplamiento, en este </a:t>
+            </a:r>
+            <a:r>
+              <a:rPr lang="es-ES" sz="1200" noProof="0" dirty="0" err="1">
+                <a:latin typeface="Arial" panose="020B0604020202020204" pitchFamily="34" charset="0"/>
+                <a:cs typeface="Arial" panose="020B0604020202020204" pitchFamily="34" charset="0"/>
+              </a:rPr>
+              <a:t>régi</a:t>
+            </a:r>
+            <a:r>
+              <a:rPr lang="es-ES" sz="1200" dirty="0" err="1">
+                <a:latin typeface="Arial" panose="020B0604020202020204" pitchFamily="34" charset="0"/>
+                <a:cs typeface="Arial" panose="020B0604020202020204" pitchFamily="34" charset="0"/>
+              </a:rPr>
+              <a:t>men</a:t>
+            </a:r>
+            <a:r>
+              <a:rPr lang="es-ES" sz="1200" dirty="0">
+                <a:latin typeface="Arial" panose="020B0604020202020204" pitchFamily="34" charset="0"/>
+                <a:cs typeface="Arial" panose="020B0604020202020204" pitchFamily="34" charset="0"/>
+              </a:rPr>
+              <a:t> la luz entra y sale del anillo antes de que se pueda disipar, ensanchando la resonancia y haciendo la muesca cada vez más superficial.</a:t>
+            </a:r>
+            <a:endParaRPr lang="es-ES" sz="1200" noProof="0" dirty="0">
               <a:latin typeface="Arial" panose="020B0604020202020204" pitchFamily="34" charset="0"/>
               <a:cs typeface="Arial" panose="020B0604020202020204" pitchFamily="34" charset="0"/>
             </a:endParaRPr>
           </a:p>
-          <a:p>
-            <a:pPr algn="just"/>
-            <a:endParaRPr lang="en-US" sz="1200" dirty="0">
-              <a:latin typeface="Arial" panose="020B0604020202020204" pitchFamily="34" charset="0"/>
-              <a:cs typeface="Arial" panose="020B0604020202020204" pitchFamily="34" charset="0"/>
-            </a:endParaRPr>
-          </a:p>
-          <a:p>
-            <a:pPr algn="just"/>
-            <a:endParaRPr lang="en-US" sz="1200" dirty="0">
-              <a:latin typeface="Arial" panose="020B0604020202020204" pitchFamily="34" charset="0"/>
-              <a:cs typeface="Arial" panose="020B0604020202020204" pitchFamily="34" charset="0"/>
-            </a:endParaRPr>
-          </a:p>
-        </p:txBody>
-      </p:sp>
-      <p:sp>
-        <p:nvSpPr>
-          <p:cNvPr id="11" name="Rectángulo 10">
+        </p:txBody>
+      </p:sp>
+      <p:sp>
+        <p:nvSpPr>
+          <p:cNvPr id="14" name="Rectángulo 13">
             <a:extLst>
               <a:ext uri="{FF2B5EF4-FFF2-40B4-BE49-F238E27FC236}">
-                <a16:creationId xmlns:a16="http://schemas.microsoft.com/office/drawing/2014/main" id="{B811A5F9-C0B5-716C-70FB-9472E1BC2CD3}"/>
+                <a16:creationId xmlns:a16="http://schemas.microsoft.com/office/drawing/2014/main" id="{6AA857E7-5C39-DCE1-10B5-40300FCF4B26}"/>
               </a:ext>
             </a:extLst>
           </p:cNvPr>
@@ -3004,7 +3036,7 @@
         </p:nvSpPr>
         <p:spPr>
           <a:xfrm>
-            <a:off x="611030" y="1418373"/>
+            <a:off x="3277315" y="1419036"/>
             <a:ext cx="2538552" cy="3306028"/>
           </a:xfrm>
           <a:prstGeom prst="rect">
@@ -3038,16 +3070,16 @@
           <a:lstStyle/>
           <a:p>
             <a:pPr algn="ctr"/>
-            <a:endParaRPr lang="en-US"/>
-          </a:p>
-        </p:txBody>
-      </p:sp>
-      <p:sp>
-        <p:nvSpPr>
-          <p:cNvPr id="14" name="Rectángulo 13">
+            <a:endParaRPr lang="es-ES" noProof="0" dirty="0"/>
+          </a:p>
+        </p:txBody>
+      </p:sp>
+      <p:sp>
+        <p:nvSpPr>
+          <p:cNvPr id="9" name="Rectángulo 8">
             <a:extLst>
               <a:ext uri="{FF2B5EF4-FFF2-40B4-BE49-F238E27FC236}">
-                <a16:creationId xmlns:a16="http://schemas.microsoft.com/office/drawing/2014/main" id="{6AA857E7-5C39-DCE1-10B5-40300FCF4B26}"/>
+                <a16:creationId xmlns:a16="http://schemas.microsoft.com/office/drawing/2014/main" id="{11F0F5FC-B571-59FC-7890-3105A6A843BB}"/>
               </a:ext>
             </a:extLst>
           </p:cNvPr>
@@ -3056,7 +3088,7 @@
         </p:nvSpPr>
         <p:spPr>
           <a:xfrm>
-            <a:off x="3277315" y="1419036"/>
+            <a:off x="5943600" y="1418373"/>
             <a:ext cx="2538552" cy="3306028"/>
           </a:xfrm>
           <a:prstGeom prst="rect">
@@ -3090,16 +3122,16 @@
           <a:lstStyle/>
           <a:p>
             <a:pPr algn="ctr"/>
-            <a:endParaRPr lang="en-US"/>
-          </a:p>
-        </p:txBody>
-      </p:sp>
-      <p:sp>
-        <p:nvSpPr>
-          <p:cNvPr id="15" name="CuadroTexto 14">
+            <a:endParaRPr lang="es-ES" noProof="0" dirty="0"/>
+          </a:p>
+        </p:txBody>
+      </p:sp>
+      <p:sp>
+        <p:nvSpPr>
+          <p:cNvPr id="10" name="CuadroTexto 9">
             <a:extLst>
               <a:ext uri="{FF2B5EF4-FFF2-40B4-BE49-F238E27FC236}">
-                <a16:creationId xmlns:a16="http://schemas.microsoft.com/office/drawing/2014/main" id="{54CF28B4-1346-F41D-2CD8-EA104ABBFB98}"/>
+                <a16:creationId xmlns:a16="http://schemas.microsoft.com/office/drawing/2014/main" id="{3146642F-220B-8F6A-59A8-2D128DDF3BEB}"/>
               </a:ext>
             </a:extLst>
           </p:cNvPr>
@@ -3108,7 +3140,7 @@
         </p:nvSpPr>
         <p:spPr>
           <a:xfrm>
-            <a:off x="863650" y="2101891"/>
+            <a:off x="3529935" y="2104638"/>
             <a:ext cx="2033313" cy="1938992"/>
           </a:xfrm>
           <a:prstGeom prst="rect">
@@ -3124,114 +3156,132 @@
           <a:p>
             <a:pPr algn="ctr"/>
             <a:r>
-              <a:rPr lang="es-ES" sz="2000" dirty="0"/>
+              <a:rPr lang="es-ES" sz="2000" noProof="0" dirty="0"/>
               <a:t>Single ring</a:t>
             </a:r>
           </a:p>
           <a:p>
             <a:pPr algn="ctr"/>
             <a:r>
-              <a:rPr lang="es-ES" sz="2000" dirty="0"/>
+              <a:rPr lang="es-ES" sz="2000" noProof="0" dirty="0"/>
               <a:t>transfer </a:t>
             </a:r>
             <a:r>
-              <a:rPr lang="es-ES" sz="2000" dirty="0" err="1"/>
+              <a:rPr lang="es-ES" sz="2000" noProof="0" dirty="0" err="1"/>
               <a:t>functions</a:t>
             </a:r>
-            <a:endParaRPr lang="es-ES" sz="2000" dirty="0"/>
+            <a:endParaRPr lang="es-ES" sz="2000" noProof="0" dirty="0"/>
           </a:p>
           <a:p>
             <a:pPr algn="ctr"/>
-            <a:endParaRPr lang="es-ES" sz="2000" dirty="0"/>
+            <a:endParaRPr lang="es-ES" sz="2000" noProof="0" dirty="0"/>
           </a:p>
           <a:p>
             <a:pPr algn="ctr"/>
             <a:r>
-              <a:rPr lang="es-ES" sz="2000" dirty="0"/>
+              <a:rPr lang="es-ES" sz="2000" noProof="0" dirty="0"/>
               <a:t>Linear </a:t>
             </a:r>
             <a:r>
-              <a:rPr lang="es-ES" sz="2000" dirty="0" err="1"/>
+              <a:rPr lang="es-ES" sz="2000" noProof="0" dirty="0" err="1"/>
               <a:t>units</a:t>
             </a:r>
-            <a:endParaRPr lang="es-ES" sz="2000" dirty="0"/>
+            <a:endParaRPr lang="es-ES" sz="2000" noProof="0" dirty="0"/>
           </a:p>
           <a:p>
             <a:pPr algn="ctr"/>
-            <a:endParaRPr lang="es-ES" sz="2000" dirty="0"/>
+            <a:endParaRPr lang="es-ES" sz="2000" noProof="0" dirty="0"/>
           </a:p>
           <a:p>
             <a:pPr algn="ctr"/>
             <a:r>
-              <a:rPr lang="es-ES" sz="2000" dirty="0" err="1"/>
-              <a:t>alpha</a:t>
-            </a:r>
-            <a:r>
-              <a:rPr lang="es-ES" sz="2000" dirty="0"/>
-              <a:t>=0 dB/cm</a:t>
-            </a:r>
-            <a:endParaRPr lang="en-US" sz="2000" dirty="0"/>
-          </a:p>
-        </p:txBody>
-      </p:sp>
-      <p:sp>
-        <p:nvSpPr>
-          <p:cNvPr id="9" name="Rectángulo 8">
+              <a:rPr lang="es-ES" sz="2000" noProof="0" dirty="0"/>
+              <a:t>K=</a:t>
+            </a:r>
+          </a:p>
+        </p:txBody>
+      </p:sp>
+      <p:sp>
+        <p:nvSpPr>
+          <p:cNvPr id="13" name="CuadroTexto 12">
             <a:extLst>
               <a:ext uri="{FF2B5EF4-FFF2-40B4-BE49-F238E27FC236}">
-                <a16:creationId xmlns:a16="http://schemas.microsoft.com/office/drawing/2014/main" id="{11F0F5FC-B571-59FC-7890-3105A6A843BB}"/>
+                <a16:creationId xmlns:a16="http://schemas.microsoft.com/office/drawing/2014/main" id="{057C499E-829F-FB11-9128-843C937CB822}"/>
               </a:ext>
             </a:extLst>
           </p:cNvPr>
-          <p:cNvSpPr/>
+          <p:cNvSpPr txBox="1"/>
           <p:nvPr/>
         </p:nvSpPr>
         <p:spPr>
           <a:xfrm>
-            <a:off x="5943600" y="1418373"/>
-            <a:ext cx="2538552" cy="3306028"/>
+            <a:off x="6195187" y="2101891"/>
+            <a:ext cx="2033313" cy="1938992"/>
           </a:xfrm>
           <a:prstGeom prst="rect">
             <a:avLst/>
           </a:prstGeom>
           <a:noFill/>
-          <a:ln w="28575">
-            <a:solidFill>
-              <a:srgbClr val="E0700D"/>
-            </a:solidFill>
-          </a:ln>
-        </p:spPr>
-        <p:style>
-          <a:lnRef idx="2">
-            <a:schemeClr val="accent1">
-              <a:shade val="15000"/>
-            </a:schemeClr>
-          </a:lnRef>
-          <a:fillRef idx="1">
-            <a:schemeClr val="accent1"/>
-          </a:fillRef>
-          <a:effectRef idx="0">
-            <a:schemeClr val="accent1"/>
-          </a:effectRef>
-          <a:fontRef idx="minor">
-            <a:schemeClr val="lt1"/>
-          </a:fontRef>
-        </p:style>
-        <p:txBody>
-          <a:bodyPr rtlCol="0" anchor="ctr"/>
+        </p:spPr>
+        <p:txBody>
+          <a:bodyPr wrap="none" rtlCol="0">
+            <a:spAutoFit/>
+          </a:bodyPr>
           <a:lstStyle/>
           <a:p>
             <a:pPr algn="ctr"/>
-            <a:endParaRPr lang="en-US"/>
-          </a:p>
-        </p:txBody>
-      </p:sp>
-      <p:sp>
-        <p:nvSpPr>
-          <p:cNvPr id="10" name="CuadroTexto 9">
+            <a:r>
+              <a:rPr lang="es-ES" sz="2000" noProof="0" dirty="0"/>
+              <a:t>Single ring</a:t>
+            </a:r>
+          </a:p>
+          <a:p>
+            <a:pPr algn="ctr"/>
+            <a:r>
+              <a:rPr lang="es-ES" sz="2000" noProof="0" dirty="0"/>
+              <a:t>transfer </a:t>
+            </a:r>
+            <a:r>
+              <a:rPr lang="es-ES" sz="2000" noProof="0" dirty="0" err="1"/>
+              <a:t>functions</a:t>
+            </a:r>
+            <a:endParaRPr lang="es-ES" sz="2000" noProof="0" dirty="0"/>
+          </a:p>
+          <a:p>
+            <a:pPr algn="ctr"/>
+            <a:endParaRPr lang="es-ES" sz="2000" noProof="0" dirty="0"/>
+          </a:p>
+          <a:p>
+            <a:pPr algn="ctr"/>
+            <a:r>
+              <a:rPr lang="es-ES" sz="2000" noProof="0" dirty="0"/>
+              <a:t>Linear </a:t>
+            </a:r>
+            <a:r>
+              <a:rPr lang="es-ES" sz="2000" noProof="0" dirty="0" err="1"/>
+              <a:t>units</a:t>
+            </a:r>
+            <a:endParaRPr lang="es-ES" sz="2000" noProof="0" dirty="0"/>
+          </a:p>
+          <a:p>
+            <a:pPr algn="ctr"/>
+            <a:endParaRPr lang="es-ES" sz="2000" noProof="0" dirty="0"/>
+          </a:p>
+          <a:p>
+            <a:pPr algn="ctr"/>
+            <a:r>
+              <a:rPr lang="es-ES" sz="2000" noProof="0" dirty="0"/>
+              <a:t>K=</a:t>
+            </a:r>
+          </a:p>
+        </p:txBody>
+      </p:sp>
+      <p:sp>
+        <p:nvSpPr>
+          <p:cNvPr id="12" name="CuadroTexto 11">
             <a:extLst>
               <a:ext uri="{FF2B5EF4-FFF2-40B4-BE49-F238E27FC236}">
-                <a16:creationId xmlns:a16="http://schemas.microsoft.com/office/drawing/2014/main" id="{3146642F-220B-8F6A-59A8-2D128DDF3BEB}"/>
+                <a16:creationId xmlns:a16="http://schemas.microsoft.com/office/drawing/2014/main" id="{4E78CC89-1377-28A4-024D-1B017D551FC5}"/>
               </a:ext>
             </a:extLst>
           </p:cNvPr>
@@ -3240,8 +3290,8 @@
         </p:nvSpPr>
         <p:spPr>
           <a:xfrm>
-            <a:off x="3529935" y="2104638"/>
-            <a:ext cx="2033313" cy="1938992"/>
+            <a:off x="9869875" y="2871332"/>
+            <a:ext cx="360996" cy="400110"/>
           </a:xfrm>
           <a:prstGeom prst="rect">
             <a:avLst/>
@@ -3256,274 +3306,18 @@
           <a:p>
             <a:pPr algn="ctr"/>
             <a:r>
-              <a:rPr lang="es-ES" sz="2000" dirty="0"/>
-              <a:t>Single ring</a:t>
-            </a:r>
-          </a:p>
-          <a:p>
-            <a:pPr algn="ctr"/>
-            <a:r>
-              <a:rPr lang="es-ES" sz="2000" dirty="0"/>
-              <a:t>transfer </a:t>
-            </a:r>
-            <a:r>
-              <a:rPr lang="es-ES" sz="2000" dirty="0" err="1"/>
-              <a:t>functions</a:t>
-            </a:r>
-            <a:endParaRPr lang="es-ES" sz="2000" dirty="0"/>
-          </a:p>
-          <a:p>
-            <a:pPr algn="ctr"/>
-            <a:endParaRPr lang="es-ES" sz="2000" dirty="0"/>
-          </a:p>
-          <a:p>
-            <a:pPr algn="ctr"/>
-            <a:r>
-              <a:rPr lang="es-ES" sz="2000" dirty="0"/>
-              <a:t>Linear </a:t>
-            </a:r>
-            <a:r>
-              <a:rPr lang="es-ES" sz="2000" dirty="0" err="1"/>
-              <a:t>units</a:t>
-            </a:r>
-            <a:endParaRPr lang="es-ES" sz="2000" dirty="0"/>
-          </a:p>
-          <a:p>
-            <a:pPr algn="ctr"/>
-            <a:endParaRPr lang="es-ES" sz="2000" dirty="0"/>
-          </a:p>
-          <a:p>
-            <a:pPr algn="ctr"/>
-            <a:r>
-              <a:rPr lang="es-ES" sz="2000" dirty="0" err="1"/>
-              <a:t>alpha</a:t>
-            </a:r>
-            <a:r>
-              <a:rPr lang="es-ES" sz="2000" dirty="0"/>
-              <a:t>=1 dB/cm</a:t>
-            </a:r>
-            <a:endParaRPr lang="en-US" sz="2000" dirty="0"/>
-          </a:p>
-        </p:txBody>
-      </p:sp>
-      <p:sp>
-        <p:nvSpPr>
-          <p:cNvPr id="13" name="CuadroTexto 12">
-            <a:extLst>
-              <a:ext uri="{FF2B5EF4-FFF2-40B4-BE49-F238E27FC236}">
-                <a16:creationId xmlns:a16="http://schemas.microsoft.com/office/drawing/2014/main" id="{057C499E-829F-FB11-9128-843C937CB822}"/>
-              </a:ext>
-            </a:extLst>
-          </p:cNvPr>
-          <p:cNvSpPr txBox="1"/>
-          <p:nvPr/>
-        </p:nvSpPr>
-        <p:spPr>
-          <a:xfrm>
-            <a:off x="6195187" y="2101891"/>
-            <a:ext cx="2033313" cy="1938992"/>
-          </a:xfrm>
-          <a:prstGeom prst="rect">
-            <a:avLst/>
-          </a:prstGeom>
-          <a:noFill/>
-        </p:spPr>
-        <p:txBody>
-          <a:bodyPr wrap="none" rtlCol="0">
-            <a:spAutoFit/>
-          </a:bodyPr>
-          <a:lstStyle/>
-          <a:p>
-            <a:pPr algn="ctr"/>
-            <a:r>
-              <a:rPr lang="es-ES" sz="2000" dirty="0"/>
-              <a:t>Single ring</a:t>
-            </a:r>
-          </a:p>
-          <a:p>
-            <a:pPr algn="ctr"/>
-            <a:r>
-              <a:rPr lang="es-ES" sz="2000" dirty="0"/>
-              <a:t>transfer </a:t>
-            </a:r>
-            <a:r>
-              <a:rPr lang="es-ES" sz="2000" dirty="0" err="1"/>
-              <a:t>functions</a:t>
-            </a:r>
-            <a:endParaRPr lang="es-ES" sz="2000" dirty="0"/>
-          </a:p>
-          <a:p>
-            <a:pPr algn="ctr"/>
-            <a:endParaRPr lang="es-ES" sz="2000" dirty="0"/>
-          </a:p>
-          <a:p>
-            <a:pPr algn="ctr"/>
-            <a:r>
-              <a:rPr lang="es-ES" sz="2000" dirty="0"/>
-              <a:t>Linear </a:t>
-            </a:r>
-            <a:r>
-              <a:rPr lang="es-ES" sz="2000" dirty="0" err="1"/>
-              <a:t>units</a:t>
-            </a:r>
-            <a:endParaRPr lang="es-ES" sz="2000" dirty="0"/>
-          </a:p>
-          <a:p>
-            <a:pPr algn="ctr"/>
-            <a:endParaRPr lang="es-ES" sz="2000" dirty="0"/>
-          </a:p>
-          <a:p>
-            <a:pPr algn="ctr"/>
-            <a:r>
-              <a:rPr lang="es-ES" sz="2000" dirty="0" err="1"/>
-              <a:t>alpha</a:t>
-            </a:r>
-            <a:r>
-              <a:rPr lang="es-ES" sz="2000" dirty="0"/>
-              <a:t>=2 dB/cm</a:t>
-            </a:r>
-            <a:endParaRPr lang="en-US" sz="2000" dirty="0"/>
-          </a:p>
-        </p:txBody>
-      </p:sp>
-      <p:sp>
-        <p:nvSpPr>
-          <p:cNvPr id="12" name="Rectángulo 11">
-            <a:extLst>
-              <a:ext uri="{FF2B5EF4-FFF2-40B4-BE49-F238E27FC236}">
-                <a16:creationId xmlns:a16="http://schemas.microsoft.com/office/drawing/2014/main" id="{D9D5941A-D9F5-22E7-7E85-0D04C2B214EC}"/>
-              </a:ext>
-            </a:extLst>
-          </p:cNvPr>
-          <p:cNvSpPr/>
-          <p:nvPr/>
-        </p:nvSpPr>
-        <p:spPr>
-          <a:xfrm>
-            <a:off x="8609885" y="1418373"/>
-            <a:ext cx="2538552" cy="3306028"/>
-          </a:xfrm>
-          <a:prstGeom prst="rect">
-            <a:avLst/>
-          </a:prstGeom>
-          <a:noFill/>
-          <a:ln w="28575">
-            <a:solidFill>
-              <a:srgbClr val="E0700D"/>
-            </a:solidFill>
-          </a:ln>
-        </p:spPr>
-        <p:style>
-          <a:lnRef idx="2">
-            <a:schemeClr val="accent1">
-              <a:shade val="15000"/>
-            </a:schemeClr>
-          </a:lnRef>
-          <a:fillRef idx="1">
-            <a:schemeClr val="accent1"/>
-          </a:fillRef>
-          <a:effectRef idx="0">
-            <a:schemeClr val="accent1"/>
-          </a:effectRef>
-          <a:fontRef idx="minor">
-            <a:schemeClr val="lt1"/>
-          </a:fontRef>
-        </p:style>
-        <p:txBody>
-          <a:bodyPr rtlCol="0" anchor="ctr"/>
-          <a:lstStyle/>
-          <a:p>
-            <a:pPr algn="ctr"/>
-            <a:endParaRPr lang="en-US"/>
-          </a:p>
-        </p:txBody>
-      </p:sp>
-      <p:sp>
-        <p:nvSpPr>
-          <p:cNvPr id="16" name="CuadroTexto 15">
-            <a:extLst>
-              <a:ext uri="{FF2B5EF4-FFF2-40B4-BE49-F238E27FC236}">
-                <a16:creationId xmlns:a16="http://schemas.microsoft.com/office/drawing/2014/main" id="{4A6C8490-F65B-32C9-44E8-9A1A1A1B1769}"/>
-              </a:ext>
-            </a:extLst>
-          </p:cNvPr>
-          <p:cNvSpPr txBox="1"/>
-          <p:nvPr/>
-        </p:nvSpPr>
-        <p:spPr>
-          <a:xfrm>
-            <a:off x="8861472" y="2101891"/>
-            <a:ext cx="2033313" cy="1938992"/>
-          </a:xfrm>
-          <a:prstGeom prst="rect">
-            <a:avLst/>
-          </a:prstGeom>
-          <a:noFill/>
-        </p:spPr>
-        <p:txBody>
-          <a:bodyPr wrap="none" rtlCol="0">
-            <a:spAutoFit/>
-          </a:bodyPr>
-          <a:lstStyle/>
-          <a:p>
-            <a:pPr algn="ctr"/>
-            <a:r>
-              <a:rPr lang="es-ES" sz="2000" dirty="0"/>
-              <a:t>Single ring</a:t>
-            </a:r>
-          </a:p>
-          <a:p>
-            <a:pPr algn="ctr"/>
-            <a:r>
-              <a:rPr lang="es-ES" sz="2000" dirty="0"/>
-              <a:t>transfer </a:t>
-            </a:r>
-            <a:r>
-              <a:rPr lang="es-ES" sz="2000" dirty="0" err="1"/>
-              <a:t>functions</a:t>
-            </a:r>
-            <a:endParaRPr lang="es-ES" sz="2000" dirty="0"/>
-          </a:p>
-          <a:p>
-            <a:pPr algn="ctr"/>
-            <a:endParaRPr lang="es-ES" sz="2000" dirty="0"/>
-          </a:p>
-          <a:p>
-            <a:pPr algn="ctr"/>
-            <a:r>
-              <a:rPr lang="es-ES" sz="2000" dirty="0"/>
-              <a:t>Linear </a:t>
-            </a:r>
-            <a:r>
-              <a:rPr lang="es-ES" sz="2000" dirty="0" err="1"/>
-              <a:t>units</a:t>
-            </a:r>
-            <a:endParaRPr lang="es-ES" sz="2000" dirty="0"/>
-          </a:p>
-          <a:p>
-            <a:pPr algn="ctr"/>
-            <a:endParaRPr lang="es-ES" sz="2000" dirty="0"/>
-          </a:p>
-          <a:p>
-            <a:pPr algn="ctr"/>
-            <a:r>
-              <a:rPr lang="es-ES" sz="2000" dirty="0" err="1"/>
-              <a:t>alpha</a:t>
-            </a:r>
-            <a:r>
-              <a:rPr lang="es-ES" sz="2000" dirty="0"/>
-              <a:t>=2 dB/cm</a:t>
-            </a:r>
-            <a:endParaRPr lang="en-US" sz="2000" dirty="0"/>
+              <a:rPr lang="es-ES" sz="2000" noProof="0" dirty="0"/>
+              <a:t>…</a:t>
+            </a:r>
           </a:p>
         </p:txBody>
       </p:sp>
       <p:pic>
         <p:nvPicPr>
-          <p:cNvPr id="17" name="Gráfico 16">
+          <p:cNvPr id="3" name="Gráfico 2">
             <a:extLst>
               <a:ext uri="{FF2B5EF4-FFF2-40B4-BE49-F238E27FC236}">
-                <a16:creationId xmlns:a16="http://schemas.microsoft.com/office/drawing/2014/main" id="{16D15CB1-2EB9-A3F2-8611-C524CCD1CAE2}"/>
+                <a16:creationId xmlns:a16="http://schemas.microsoft.com/office/drawing/2014/main" id="{0B245A9E-6C9A-F3A8-E4B7-661580126414}"/>
               </a:ext>
             </a:extLst>
           </p:cNvPr>
@@ -3556,10 +3350,10 @@
       </p:pic>
       <p:sp>
         <p:nvSpPr>
-          <p:cNvPr id="18" name="object 16">
+          <p:cNvPr id="16" name="object 16">
             <a:extLst>
               <a:ext uri="{FF2B5EF4-FFF2-40B4-BE49-F238E27FC236}">
-                <a16:creationId xmlns:a16="http://schemas.microsoft.com/office/drawing/2014/main" id="{989133D6-A9B3-EFEA-2703-51A6BDA0A885}"/>
+                <a16:creationId xmlns:a16="http://schemas.microsoft.com/office/drawing/2014/main" id="{8266F13B-05F1-81DE-B638-66D10EEB9FA2}"/>
               </a:ext>
             </a:extLst>
           </p:cNvPr>
@@ -3600,14 +3394,37 @@
               </a:spcBef>
             </a:pPr>
             <a:r>
-              <a:rPr lang="en-US" sz="2500" kern="0" dirty="0"/>
-              <a:t>Learning outcome #6b – E</a:t>
-            </a:r>
-            <a:r>
-              <a:rPr lang="en-US" sz="2500" dirty="0"/>
-              <a:t>ffect of loss</a:t>
-            </a:r>
-            <a:endParaRPr lang="en-US" sz="2500" kern="0" dirty="0"/>
+              <a:rPr lang="es-ES" sz="2500" kern="0" noProof="0" dirty="0" err="1"/>
+              <a:t>Learning</a:t>
+            </a:r>
+            <a:r>
+              <a:rPr lang="es-ES" sz="2500" kern="0" noProof="0" dirty="0"/>
+              <a:t> </a:t>
+            </a:r>
+            <a:r>
+              <a:rPr lang="es-ES" sz="2500" kern="0" noProof="0" dirty="0" err="1"/>
+              <a:t>outcome</a:t>
+            </a:r>
+            <a:r>
+              <a:rPr lang="es-ES" sz="2500" kern="0" noProof="0" dirty="0"/>
+              <a:t> #6a – </a:t>
+            </a:r>
+            <a:r>
+              <a:rPr lang="es-ES" sz="2500" kern="0" noProof="0" dirty="0" err="1"/>
+              <a:t>Effect</a:t>
+            </a:r>
+            <a:r>
+              <a:rPr lang="es-ES" sz="2500" kern="0" noProof="0" dirty="0"/>
+              <a:t> </a:t>
+            </a:r>
+            <a:r>
+              <a:rPr lang="es-ES" sz="2500" kern="0" noProof="0" dirty="0" err="1"/>
+              <a:t>of</a:t>
+            </a:r>
+            <a:r>
+              <a:rPr lang="es-ES" sz="2500" kern="0" noProof="0" dirty="0"/>
+              <a:t> K </a:t>
+            </a:r>
           </a:p>
           <a:p>
             <a:pPr marL="12700">
@@ -3616,36 +3433,105 @@
               </a:spcBef>
             </a:pPr>
             <a:r>
-              <a:rPr lang="en-US" b="0" kern="0" spc="-5" dirty="0">
+              <a:rPr lang="es-ES" b="0" kern="0" spc="-5" noProof="0" dirty="0">
                 <a:latin typeface="+mj-lt"/>
                 <a:cs typeface="Lucida Sans"/>
               </a:rPr>
-              <a:t>Change losses value between 0 and 8 </a:t>
-            </a:r>
-            <a:r>
-              <a:rPr lang="en-US" b="0" kern="0" spc="-5" dirty="0">
-                <a:solidFill>
-                  <a:srgbClr val="FF0000"/>
-                </a:solidFill>
+              <a:t>Change K </a:t>
+            </a:r>
+            <a:r>
+              <a:rPr lang="es-ES" b="0" kern="0" spc="-5" noProof="0" dirty="0" err="1">
                 <a:latin typeface="+mj-lt"/>
                 <a:cs typeface="Lucida Sans"/>
               </a:rPr>
-              <a:t>dB/cm </a:t>
-            </a:r>
-            <a:r>
-              <a:rPr lang="en-US" b="0" kern="0" spc="-5" dirty="0">
+              <a:t>value</a:t>
+            </a:r>
+            <a:r>
+              <a:rPr lang="es-ES" b="0" kern="0" spc="-5" noProof="0" dirty="0">
                 <a:latin typeface="+mj-lt"/>
                 <a:cs typeface="Lucida Sans"/>
               </a:rPr>
-              <a:t>in steps of 1</a:t>
-            </a:r>
-          </a:p>
-        </p:txBody>
-      </p:sp>
+              <a:t> </a:t>
+            </a:r>
+            <a:r>
+              <a:rPr lang="es-ES" b="0" kern="0" spc="-5" noProof="0" dirty="0" err="1">
+                <a:latin typeface="+mj-lt"/>
+                <a:cs typeface="Lucida Sans"/>
+              </a:rPr>
+              <a:t>between</a:t>
+            </a:r>
+            <a:r>
+              <a:rPr lang="es-ES" b="0" kern="0" spc="-5" noProof="0" dirty="0">
+                <a:latin typeface="+mj-lt"/>
+                <a:cs typeface="Lucida Sans"/>
+              </a:rPr>
+              <a:t> 0.1 and 0.9 in </a:t>
+            </a:r>
+            <a:r>
+              <a:rPr lang="es-ES" b="0" kern="0" spc="-5" noProof="0" dirty="0" err="1">
+                <a:latin typeface="+mj-lt"/>
+                <a:cs typeface="Lucida Sans"/>
+              </a:rPr>
+              <a:t>steps</a:t>
+            </a:r>
+            <a:r>
+              <a:rPr lang="es-ES" b="0" kern="0" spc="-5" noProof="0" dirty="0">
+                <a:latin typeface="+mj-lt"/>
+                <a:cs typeface="Lucida Sans"/>
+              </a:rPr>
+              <a:t> </a:t>
+            </a:r>
+            <a:r>
+              <a:rPr lang="es-ES" b="0" kern="0" spc="-5" noProof="0" dirty="0" err="1">
+                <a:latin typeface="+mj-lt"/>
+                <a:cs typeface="Lucida Sans"/>
+              </a:rPr>
+              <a:t>of</a:t>
+            </a:r>
+            <a:r>
+              <a:rPr lang="es-ES" b="0" kern="0" spc="-5" noProof="0" dirty="0">
+                <a:latin typeface="+mj-lt"/>
+                <a:cs typeface="Lucida Sans"/>
+              </a:rPr>
+              <a:t> 0.1</a:t>
+            </a:r>
+          </a:p>
+        </p:txBody>
+      </p:sp>
+      <p:pic>
+        <p:nvPicPr>
+          <p:cNvPr id="7" name="Picture 6">
+            <a:extLst>
+              <a:ext uri="{FF2B5EF4-FFF2-40B4-BE49-F238E27FC236}">
+                <a16:creationId xmlns:a16="http://schemas.microsoft.com/office/drawing/2014/main" id="{5934818B-0C5F-2261-3283-DEEE14E53E19}"/>
+              </a:ext>
+            </a:extLst>
+          </p:cNvPr>
+          <p:cNvPicPr>
+            <a:picLocks noChangeAspect="1"/>
+          </p:cNvPicPr>
+          <p:nvPr/>
+        </p:nvPicPr>
+        <p:blipFill>
+          <a:blip r:embed="rId3"/>
+          <a:stretch>
+            <a:fillRect/>
+          </a:stretch>
+        </p:blipFill>
+        <p:spPr>
+          <a:xfrm>
+            <a:off x="3074194" y="1187664"/>
+            <a:ext cx="6043612" cy="3767446"/>
+          </a:xfrm>
+          <a:prstGeom prst="rect">
+            <a:avLst/>
+          </a:prstGeom>
+        </p:spPr>
+      </p:pic>
     </p:spTree>
     <p:extLst>
       <p:ext uri="{BB962C8B-B14F-4D97-AF65-F5344CB8AC3E}">
-        <p14:creationId xmlns:p14="http://schemas.microsoft.com/office/powerpoint/2010/main" val="1461196698"/>
+        <p14:creationId xmlns:p14="http://schemas.microsoft.com/office/powerpoint/2010/main" val="1931625216"/>
       </p:ext>
     </p:extLst>
   </p:cSld>
@@ -3674,6 +3560,565 @@
       </p:grpSpPr>
       <p:sp>
         <p:nvSpPr>
+          <p:cNvPr id="5" name="Marcador de pie de página 4">
+            <a:extLst>
+              <a:ext uri="{FF2B5EF4-FFF2-40B4-BE49-F238E27FC236}">
+                <a16:creationId xmlns:a16="http://schemas.microsoft.com/office/drawing/2014/main" id="{F929251A-3DC4-36B2-3FB3-341378364BED}"/>
+              </a:ext>
+            </a:extLst>
+          </p:cNvPr>
+          <p:cNvSpPr>
+            <a:spLocks noGrp="1"/>
+          </p:cNvSpPr>
+          <p:nvPr>
+            <p:ph type="ftr" sz="quarter" idx="5"/>
+          </p:nvPr>
+        </p:nvSpPr>
+        <p:spPr>
+          <a:xfrm>
+            <a:off x="609600" y="6444734"/>
+            <a:ext cx="2743200" cy="184666"/>
+          </a:xfrm>
+        </p:spPr>
+        <p:txBody>
+          <a:bodyPr/>
+          <a:lstStyle/>
+          <a:p>
+            <a:r>
+              <a:rPr lang="es-ES" noProof="0" dirty="0"/>
+              <a:t>LAB 3.0. CIRCUITS &amp; COMPACT MODELS</a:t>
+            </a:r>
+          </a:p>
+        </p:txBody>
+      </p:sp>
+      <p:sp>
+        <p:nvSpPr>
+          <p:cNvPr id="6" name="Marcador de número de diapositiva 5">
+            <a:extLst>
+              <a:ext uri="{FF2B5EF4-FFF2-40B4-BE49-F238E27FC236}">
+                <a16:creationId xmlns:a16="http://schemas.microsoft.com/office/drawing/2014/main" id="{8E91A34C-DF76-97CF-3EFD-546BC64A2184}"/>
+              </a:ext>
+            </a:extLst>
+          </p:cNvPr>
+          <p:cNvSpPr>
+            <a:spLocks noGrp="1"/>
+          </p:cNvSpPr>
+          <p:nvPr>
+            <p:ph type="sldNum" sz="quarter" idx="7"/>
+          </p:nvPr>
+        </p:nvSpPr>
+        <p:spPr/>
+        <p:txBody>
+          <a:bodyPr/>
+          <a:lstStyle/>
+          <a:p>
+            <a:fld id="{C2F52289-4012-4053-9770-FE82CEB9514F}" type="slidenum">
+              <a:rPr lang="es-ES" noProof="0" smtClean="0"/>
+              <a:pPr/>
+              <a:t>11</a:t>
+            </a:fld>
+            <a:endParaRPr lang="es-ES" noProof="0" dirty="0"/>
+          </a:p>
+        </p:txBody>
+      </p:sp>
+      <p:sp>
+        <p:nvSpPr>
+          <p:cNvPr id="8" name="CuadroTexto 7">
+            <a:extLst>
+              <a:ext uri="{FF2B5EF4-FFF2-40B4-BE49-F238E27FC236}">
+                <a16:creationId xmlns:a16="http://schemas.microsoft.com/office/drawing/2014/main" id="{D9601617-351E-AE1A-1F4D-693F2EA59361}"/>
+              </a:ext>
+            </a:extLst>
+          </p:cNvPr>
+          <p:cNvSpPr txBox="1"/>
+          <p:nvPr/>
+        </p:nvSpPr>
+        <p:spPr>
+          <a:xfrm>
+            <a:off x="611029" y="4860335"/>
+            <a:ext cx="11199530" cy="461665"/>
+          </a:xfrm>
+          <a:prstGeom prst="rect">
+            <a:avLst/>
+          </a:prstGeom>
+          <a:solidFill>
+            <a:schemeClr val="bg1">
+              <a:lumMod val="95000"/>
+            </a:schemeClr>
+          </a:solidFill>
+          <a:ln w="28575">
+            <a:solidFill>
+              <a:srgbClr val="E0700D"/>
+            </a:solidFill>
+          </a:ln>
+        </p:spPr>
+        <p:txBody>
+          <a:bodyPr wrap="square" rtlCol="0">
+            <a:spAutoFit/>
+          </a:bodyPr>
+          <a:lstStyle/>
+          <a:p>
+            <a:pPr algn="just"/>
+            <a:r>
+              <a:rPr lang="es-ES" sz="1200" dirty="0">
+                <a:latin typeface="Arial" panose="020B0604020202020204" pitchFamily="34" charset="0"/>
+                <a:cs typeface="Arial" panose="020B0604020202020204" pitchFamily="34" charset="0"/>
+              </a:rPr>
+              <a:t>Se puede observar que tenemos un sobre acoplamiento en todos los casos, pero estando más cerca del acoplamiento crítico con 8 dB/cm. En este caso, el anillo se queda cerca de conseguir que la potencia que entra a este se pierda al darle una vuelta, pero no lo hace perfectamente y por eso no baja a el 0 en lineal.</a:t>
+            </a:r>
+            <a:endParaRPr lang="es-ES" sz="1200" noProof="0" dirty="0">
+              <a:latin typeface="Arial" panose="020B0604020202020204" pitchFamily="34" charset="0"/>
+              <a:cs typeface="Arial" panose="020B0604020202020204" pitchFamily="34" charset="0"/>
+            </a:endParaRPr>
+          </a:p>
+        </p:txBody>
+      </p:sp>
+      <p:sp>
+        <p:nvSpPr>
+          <p:cNvPr id="10" name="CuadroTexto 9">
+            <a:extLst>
+              <a:ext uri="{FF2B5EF4-FFF2-40B4-BE49-F238E27FC236}">
+                <a16:creationId xmlns:a16="http://schemas.microsoft.com/office/drawing/2014/main" id="{3146642F-220B-8F6A-59A8-2D128DDF3BEB}"/>
+              </a:ext>
+            </a:extLst>
+          </p:cNvPr>
+          <p:cNvSpPr txBox="1"/>
+          <p:nvPr/>
+        </p:nvSpPr>
+        <p:spPr>
+          <a:xfrm>
+            <a:off x="3529935" y="2104638"/>
+            <a:ext cx="2033313" cy="1938992"/>
+          </a:xfrm>
+          <a:prstGeom prst="rect">
+            <a:avLst/>
+          </a:prstGeom>
+          <a:noFill/>
+        </p:spPr>
+        <p:txBody>
+          <a:bodyPr wrap="none" rtlCol="0">
+            <a:spAutoFit/>
+          </a:bodyPr>
+          <a:lstStyle/>
+          <a:p>
+            <a:pPr algn="ctr"/>
+            <a:r>
+              <a:rPr lang="es-ES" sz="2000" noProof="0" dirty="0"/>
+              <a:t>Single ring</a:t>
+            </a:r>
+          </a:p>
+          <a:p>
+            <a:pPr algn="ctr"/>
+            <a:r>
+              <a:rPr lang="es-ES" sz="2000" noProof="0" dirty="0"/>
+              <a:t>transfer </a:t>
+            </a:r>
+            <a:r>
+              <a:rPr lang="es-ES" sz="2000" noProof="0" dirty="0" err="1"/>
+              <a:t>functions</a:t>
+            </a:r>
+            <a:endParaRPr lang="es-ES" sz="2000" noProof="0" dirty="0"/>
+          </a:p>
+          <a:p>
+            <a:pPr algn="ctr"/>
+            <a:endParaRPr lang="es-ES" sz="2000" noProof="0" dirty="0"/>
+          </a:p>
+          <a:p>
+            <a:pPr algn="ctr"/>
+            <a:r>
+              <a:rPr lang="es-ES" sz="2000" noProof="0" dirty="0"/>
+              <a:t>Linear </a:t>
+            </a:r>
+            <a:r>
+              <a:rPr lang="es-ES" sz="2000" noProof="0" dirty="0" err="1"/>
+              <a:t>units</a:t>
+            </a:r>
+            <a:endParaRPr lang="es-ES" sz="2000" noProof="0" dirty="0"/>
+          </a:p>
+          <a:p>
+            <a:pPr algn="ctr"/>
+            <a:endParaRPr lang="es-ES" sz="2000" noProof="0" dirty="0"/>
+          </a:p>
+          <a:p>
+            <a:pPr algn="ctr"/>
+            <a:r>
+              <a:rPr lang="es-ES" sz="2000" noProof="0" dirty="0" err="1"/>
+              <a:t>alpha</a:t>
+            </a:r>
+            <a:r>
+              <a:rPr lang="es-ES" sz="2000" noProof="0" dirty="0"/>
+              <a:t>=1 dB/cm</a:t>
+            </a:r>
+          </a:p>
+        </p:txBody>
+      </p:sp>
+      <p:sp>
+        <p:nvSpPr>
+          <p:cNvPr id="13" name="CuadroTexto 12">
+            <a:extLst>
+              <a:ext uri="{FF2B5EF4-FFF2-40B4-BE49-F238E27FC236}">
+                <a16:creationId xmlns:a16="http://schemas.microsoft.com/office/drawing/2014/main" id="{057C499E-829F-FB11-9128-843C937CB822}"/>
+              </a:ext>
+            </a:extLst>
+          </p:cNvPr>
+          <p:cNvSpPr txBox="1"/>
+          <p:nvPr/>
+        </p:nvSpPr>
+        <p:spPr>
+          <a:xfrm>
+            <a:off x="6195187" y="2101891"/>
+            <a:ext cx="2033313" cy="1938992"/>
+          </a:xfrm>
+          <a:prstGeom prst="rect">
+            <a:avLst/>
+          </a:prstGeom>
+          <a:noFill/>
+        </p:spPr>
+        <p:txBody>
+          <a:bodyPr wrap="none" rtlCol="0">
+            <a:spAutoFit/>
+          </a:bodyPr>
+          <a:lstStyle/>
+          <a:p>
+            <a:pPr algn="ctr"/>
+            <a:r>
+              <a:rPr lang="es-ES" sz="2000" noProof="0" dirty="0"/>
+              <a:t>Single ring</a:t>
+            </a:r>
+          </a:p>
+          <a:p>
+            <a:pPr algn="ctr"/>
+            <a:r>
+              <a:rPr lang="es-ES" sz="2000" noProof="0" dirty="0"/>
+              <a:t>transfer </a:t>
+            </a:r>
+            <a:r>
+              <a:rPr lang="es-ES" sz="2000" noProof="0" dirty="0" err="1"/>
+              <a:t>functions</a:t>
+            </a:r>
+            <a:endParaRPr lang="es-ES" sz="2000" noProof="0" dirty="0"/>
+          </a:p>
+          <a:p>
+            <a:pPr algn="ctr"/>
+            <a:endParaRPr lang="es-ES" sz="2000" noProof="0" dirty="0"/>
+          </a:p>
+          <a:p>
+            <a:pPr algn="ctr"/>
+            <a:r>
+              <a:rPr lang="es-ES" sz="2000" noProof="0" dirty="0"/>
+              <a:t>Linear </a:t>
+            </a:r>
+            <a:r>
+              <a:rPr lang="es-ES" sz="2000" noProof="0" dirty="0" err="1"/>
+              <a:t>units</a:t>
+            </a:r>
+            <a:endParaRPr lang="es-ES" sz="2000" noProof="0" dirty="0"/>
+          </a:p>
+          <a:p>
+            <a:pPr algn="ctr"/>
+            <a:endParaRPr lang="es-ES" sz="2000" noProof="0" dirty="0"/>
+          </a:p>
+          <a:p>
+            <a:pPr algn="ctr"/>
+            <a:r>
+              <a:rPr lang="es-ES" sz="2000" noProof="0" dirty="0" err="1"/>
+              <a:t>alpha</a:t>
+            </a:r>
+            <a:r>
+              <a:rPr lang="es-ES" sz="2000" noProof="0" dirty="0"/>
+              <a:t>=2 dB/cm</a:t>
+            </a:r>
+          </a:p>
+        </p:txBody>
+      </p:sp>
+      <p:pic>
+        <p:nvPicPr>
+          <p:cNvPr id="17" name="Gráfico 16">
+            <a:extLst>
+              <a:ext uri="{FF2B5EF4-FFF2-40B4-BE49-F238E27FC236}">
+                <a16:creationId xmlns:a16="http://schemas.microsoft.com/office/drawing/2014/main" id="{16D15CB1-2EB9-A3F2-8611-C524CCD1CAE2}"/>
+              </a:ext>
+            </a:extLst>
+          </p:cNvPr>
+          <p:cNvPicPr>
+            <a:picLocks noChangeAspect="1"/>
+          </p:cNvPicPr>
+          <p:nvPr/>
+        </p:nvPicPr>
+        <p:blipFill>
+          <a:blip>
+            <a:extLst>
+              <a:ext uri="{96DAC541-7B7A-43D3-8B79-37D633B846F1}">
+                <asvg:svgBlip xmlns:asvg="http://schemas.microsoft.com/office/drawing/2016/SVG/main" r:embed="rId2"/>
+              </a:ext>
+            </a:extLst>
+          </a:blip>
+          <a:stretch>
+            <a:fillRect/>
+          </a:stretch>
+        </p:blipFill>
+        <p:spPr>
+          <a:xfrm>
+            <a:off x="5045006" y="6356057"/>
+            <a:ext cx="6409575" cy="363174"/>
+          </a:xfrm>
+          <a:prstGeom prst="rect">
+            <a:avLst/>
+          </a:prstGeom>
+        </p:spPr>
+      </p:pic>
+      <p:sp>
+        <p:nvSpPr>
+          <p:cNvPr id="18" name="object 16">
+            <a:extLst>
+              <a:ext uri="{FF2B5EF4-FFF2-40B4-BE49-F238E27FC236}">
+                <a16:creationId xmlns:a16="http://schemas.microsoft.com/office/drawing/2014/main" id="{989133D6-A9B3-EFEA-2703-51A6BDA0A885}"/>
+              </a:ext>
+            </a:extLst>
+          </p:cNvPr>
+          <p:cNvSpPr txBox="1">
+            <a:spLocks/>
+          </p:cNvSpPr>
+          <p:nvPr/>
+        </p:nvSpPr>
+        <p:spPr>
+          <a:xfrm>
+            <a:off x="685800" y="408883"/>
+            <a:ext cx="10994410" cy="718145"/>
+          </a:xfrm>
+          <a:prstGeom prst="rect">
+            <a:avLst/>
+          </a:prstGeom>
+        </p:spPr>
+        <p:txBody>
+          <a:bodyPr vert="horz" wrap="square" lIns="0" tIns="12700" rIns="0" bIns="0" rtlCol="0">
+            <a:spAutoFit/>
+          </a:bodyPr>
+          <a:lstStyle>
+            <a:lvl1pPr>
+              <a:defRPr sz="2000" b="1" i="0">
+                <a:solidFill>
+                  <a:schemeClr val="tx1"/>
+                </a:solidFill>
+                <a:latin typeface="Calibri"/>
+                <a:ea typeface="+mj-ea"/>
+                <a:cs typeface="Calibri"/>
+              </a:defRPr>
+            </a:lvl1pPr>
+          </a:lstStyle>
+          <a:p>
+            <a:pPr marL="12700">
+              <a:spcBef>
+                <a:spcPts val="100"/>
+              </a:spcBef>
+            </a:pPr>
+            <a:r>
+              <a:rPr lang="es-ES" sz="2500" kern="0" noProof="0" dirty="0" err="1"/>
+              <a:t>Learning</a:t>
+            </a:r>
+            <a:r>
+              <a:rPr lang="es-ES" sz="2500" kern="0" noProof="0" dirty="0"/>
+              <a:t> </a:t>
+            </a:r>
+            <a:r>
+              <a:rPr lang="es-ES" sz="2500" kern="0" noProof="0" dirty="0" err="1"/>
+              <a:t>outcome</a:t>
+            </a:r>
+            <a:r>
+              <a:rPr lang="es-ES" sz="2500" kern="0" noProof="0" dirty="0"/>
+              <a:t> #6b – </a:t>
+            </a:r>
+            <a:r>
+              <a:rPr lang="es-ES" sz="2500" kern="0" noProof="0" dirty="0" err="1"/>
+              <a:t>E</a:t>
+            </a:r>
+            <a:r>
+              <a:rPr lang="es-ES" sz="2500" noProof="0" dirty="0" err="1"/>
+              <a:t>ffect</a:t>
+            </a:r>
+            <a:r>
+              <a:rPr lang="es-ES" sz="2500" noProof="0" dirty="0"/>
+              <a:t> </a:t>
+            </a:r>
+            <a:r>
+              <a:rPr lang="es-ES" sz="2500" noProof="0" dirty="0" err="1"/>
+              <a:t>of</a:t>
+            </a:r>
+            <a:r>
+              <a:rPr lang="es-ES" sz="2500" noProof="0" dirty="0"/>
+              <a:t> </a:t>
+            </a:r>
+            <a:r>
+              <a:rPr lang="es-ES" sz="2500" noProof="0" dirty="0" err="1"/>
+              <a:t>loss</a:t>
+            </a:r>
+            <a:endParaRPr lang="es-ES" sz="2500" kern="0" noProof="0" dirty="0"/>
+          </a:p>
+          <a:p>
+            <a:pPr marL="12700">
+              <a:spcBef>
+                <a:spcPts val="100"/>
+              </a:spcBef>
+            </a:pPr>
+            <a:r>
+              <a:rPr lang="es-ES" b="0" kern="0" spc="-5" noProof="0" dirty="0">
+                <a:latin typeface="+mj-lt"/>
+                <a:cs typeface="Lucida Sans"/>
+              </a:rPr>
+              <a:t>Change </a:t>
+            </a:r>
+            <a:r>
+              <a:rPr lang="es-ES" b="0" kern="0" spc="-5" noProof="0" dirty="0" err="1">
+                <a:latin typeface="+mj-lt"/>
+                <a:cs typeface="Lucida Sans"/>
+              </a:rPr>
+              <a:t>losses</a:t>
+            </a:r>
+            <a:r>
+              <a:rPr lang="es-ES" b="0" kern="0" spc="-5" noProof="0" dirty="0">
+                <a:latin typeface="+mj-lt"/>
+                <a:cs typeface="Lucida Sans"/>
+              </a:rPr>
+              <a:t> </a:t>
+            </a:r>
+            <a:r>
+              <a:rPr lang="es-ES" b="0" kern="0" spc="-5" noProof="0" dirty="0" err="1">
+                <a:latin typeface="+mj-lt"/>
+                <a:cs typeface="Lucida Sans"/>
+              </a:rPr>
+              <a:t>value</a:t>
+            </a:r>
+            <a:r>
+              <a:rPr lang="es-ES" b="0" kern="0" spc="-5" noProof="0" dirty="0">
+                <a:latin typeface="+mj-lt"/>
+                <a:cs typeface="Lucida Sans"/>
+              </a:rPr>
+              <a:t> </a:t>
+            </a:r>
+            <a:r>
+              <a:rPr lang="es-ES" b="0" kern="0" spc="-5" noProof="0" dirty="0" err="1">
+                <a:latin typeface="+mj-lt"/>
+                <a:cs typeface="Lucida Sans"/>
+              </a:rPr>
+              <a:t>between</a:t>
+            </a:r>
+            <a:r>
+              <a:rPr lang="es-ES" b="0" kern="0" spc="-5" noProof="0" dirty="0">
+                <a:latin typeface="+mj-lt"/>
+                <a:cs typeface="Lucida Sans"/>
+              </a:rPr>
+              <a:t> 0 and 8 </a:t>
+            </a:r>
+            <a:r>
+              <a:rPr lang="es-ES" b="0" kern="0" spc="-5" noProof="0" dirty="0">
+                <a:solidFill>
+                  <a:srgbClr val="FF0000"/>
+                </a:solidFill>
+                <a:latin typeface="+mj-lt"/>
+                <a:cs typeface="Lucida Sans"/>
+              </a:rPr>
+              <a:t>dB/cm </a:t>
+            </a:r>
+            <a:r>
+              <a:rPr lang="es-ES" b="0" kern="0" spc="-5" noProof="0" dirty="0">
+                <a:latin typeface="+mj-lt"/>
+                <a:cs typeface="Lucida Sans"/>
+              </a:rPr>
+              <a:t>in </a:t>
+            </a:r>
+            <a:r>
+              <a:rPr lang="es-ES" b="0" kern="0" spc="-5" noProof="0" dirty="0" err="1">
+                <a:latin typeface="+mj-lt"/>
+                <a:cs typeface="Lucida Sans"/>
+              </a:rPr>
+              <a:t>steps</a:t>
+            </a:r>
+            <a:r>
+              <a:rPr lang="es-ES" b="0" kern="0" spc="-5" noProof="0" dirty="0">
+                <a:latin typeface="+mj-lt"/>
+                <a:cs typeface="Lucida Sans"/>
+              </a:rPr>
+              <a:t> </a:t>
+            </a:r>
+            <a:r>
+              <a:rPr lang="es-ES" b="0" kern="0" spc="-5" noProof="0" dirty="0" err="1">
+                <a:latin typeface="+mj-lt"/>
+                <a:cs typeface="Lucida Sans"/>
+              </a:rPr>
+              <a:t>of</a:t>
+            </a:r>
+            <a:r>
+              <a:rPr lang="es-ES" b="0" kern="0" spc="-5" noProof="0" dirty="0">
+                <a:latin typeface="+mj-lt"/>
+                <a:cs typeface="Lucida Sans"/>
+              </a:rPr>
+              <a:t> 1</a:t>
+            </a:r>
+          </a:p>
+        </p:txBody>
+      </p:sp>
+      <p:pic>
+        <p:nvPicPr>
+          <p:cNvPr id="3" name="Picture 2">
+            <a:extLst>
+              <a:ext uri="{FF2B5EF4-FFF2-40B4-BE49-F238E27FC236}">
+                <a16:creationId xmlns:a16="http://schemas.microsoft.com/office/drawing/2014/main" id="{F51B11AB-1397-9049-9592-CA829B6ACB60}"/>
+              </a:ext>
+            </a:extLst>
+          </p:cNvPr>
+          <p:cNvPicPr>
+            <a:picLocks noChangeAspect="1"/>
+          </p:cNvPicPr>
+          <p:nvPr/>
+        </p:nvPicPr>
+        <p:blipFill>
+          <a:blip r:embed="rId3"/>
+          <a:stretch>
+            <a:fillRect/>
+          </a:stretch>
+        </p:blipFill>
+        <p:spPr>
+          <a:xfrm>
+            <a:off x="2866038" y="1382069"/>
+            <a:ext cx="6017846" cy="3294942"/>
+          </a:xfrm>
+          <a:prstGeom prst="rect">
+            <a:avLst/>
+          </a:prstGeom>
+        </p:spPr>
+      </p:pic>
+    </p:spTree>
+    <p:extLst>
+      <p:ext uri="{BB962C8B-B14F-4D97-AF65-F5344CB8AC3E}">
+        <p14:creationId xmlns:p14="http://schemas.microsoft.com/office/powerpoint/2010/main" val="1461196698"/>
+      </p:ext>
+    </p:extLst>
+  </p:cSld>
+  <p:clrMapOvr>
+    <a:masterClrMapping/>
+  </p:clrMapOvr>
+</p:sld>
+</file>
+
+<file path=ppt/slides/slide12.xml><?xml version="1.0" encoding="utf-8"?>
+<p:sld xmlns:a="http://schemas.openxmlformats.org/drawingml/2006/main" xmlns:r="http://schemas.openxmlformats.org/officeDocument/2006/relationships" xmlns:p="http://schemas.openxmlformats.org/presentationml/2006/main">
+  <p:cSld>
+    <p:spTree>
+      <p:nvGrpSpPr>
+        <p:cNvPr id="1" name=""/>
+        <p:cNvGrpSpPr/>
+        <p:nvPr/>
+      </p:nvGrpSpPr>
+      <p:grpSpPr>
+        <a:xfrm>
+          <a:off x="0" y="0"/>
+          <a:ext cx="0" cy="0"/>
+          <a:chOff x="0" y="0"/>
+          <a:chExt cx="0" cy="0"/>
+        </a:xfrm>
+      </p:grpSpPr>
+      <p:sp>
+        <p:nvSpPr>
           <p:cNvPr id="3" name="object 3"/>
           <p:cNvSpPr/>
           <p:nvPr/>
@@ -3697,7 +4142,7 @@
           <a:bodyPr wrap="square" lIns="0" tIns="0" rIns="0" bIns="0" rtlCol="0"/>
           <a:lstStyle/>
           <a:p>
-            <a:endParaRPr/>
+            <a:endParaRPr lang="es-ES" noProof="0" dirty="0"/>
           </a:p>
         </p:txBody>
       </p:sp>
@@ -3735,7 +4180,7 @@
               </a:spcBef>
             </a:pPr>
             <a:r>
-              <a:rPr sz="3200" b="1" spc="-5" dirty="0">
+              <a:rPr lang="es-ES" sz="3200" b="1" spc="-5" noProof="0" dirty="0" err="1">
                 <a:solidFill>
                   <a:srgbClr val="FFFFFF"/>
                 </a:solidFill>
@@ -3745,7 +4190,7 @@
               <a:t>Thank</a:t>
             </a:r>
             <a:r>
-              <a:rPr sz="3200" b="1" spc="-55" dirty="0">
+              <a:rPr lang="es-ES" sz="3200" b="1" spc="-55" noProof="0" dirty="0">
                 <a:solidFill>
                   <a:srgbClr val="FFFFFF"/>
                 </a:solidFill>
@@ -3755,7 +4200,7 @@
               <a:t> </a:t>
             </a:r>
             <a:r>
-              <a:rPr sz="3200" b="1" dirty="0">
+              <a:rPr lang="es-ES" sz="3200" b="1" noProof="0" dirty="0" err="1">
                 <a:solidFill>
                   <a:srgbClr val="FFFFFF"/>
                 </a:solidFill>
@@ -3764,7 +4209,7 @@
               </a:rPr>
               <a:t>you</a:t>
             </a:r>
-            <a:endParaRPr sz="3200">
+            <a:endParaRPr lang="es-ES" sz="3200" noProof="0" dirty="0">
               <a:latin typeface="Lucida Sans"/>
               <a:cs typeface="Lucida Sans"/>
             </a:endParaRPr>
@@ -3793,10 +4238,10 @@
           <a:lstStyle/>
           <a:p>
             <a:fld id="{B6F15528-21DE-4FAA-801E-634DDDAF4B2B}" type="slidenum">
-              <a:rPr lang="es-ES" smtClean="0"/>
-              <a:t>11</a:t>
+              <a:rPr lang="es-ES" noProof="0" smtClean="0"/>
+              <a:t>12</a:t>
             </a:fld>
-            <a:endParaRPr lang="es-ES"/>
+            <a:endParaRPr lang="es-ES" noProof="0" dirty="0"/>
           </a:p>
         </p:txBody>
       </p:sp>
@@ -3871,26 +4316,26 @@
               </a:spcBef>
             </a:pPr>
             <a:r>
-              <a:rPr lang="es-ES" sz="2500" u="sng" spc="-5" dirty="0" err="1">
+              <a:rPr lang="es-ES" sz="2500" u="sng" spc="-5" noProof="0" dirty="0" err="1">
                 <a:latin typeface="+mj-lt"/>
                 <a:cs typeface="Lucida Sans"/>
               </a:rPr>
               <a:t>Instructions</a:t>
             </a:r>
             <a:br>
-              <a:rPr lang="es-ES" sz="2400" spc="-5" dirty="0">
+              <a:rPr lang="es-ES" sz="2400" spc="-5" noProof="0" dirty="0">
                 <a:latin typeface="+mj-lt"/>
                 <a:cs typeface="Lucida Sans"/>
               </a:rPr>
             </a:br>
             <a:r>
-              <a:rPr lang="es-ES" b="0" spc="-5" dirty="0">
+              <a:rPr lang="es-ES" b="0" spc="-5" noProof="0" dirty="0">
                 <a:latin typeface="+mj-lt"/>
                 <a:cs typeface="Lucida Sans"/>
               </a:rPr>
               <a:t>General</a:t>
             </a:r>
-            <a:endParaRPr sz="2400" b="0" dirty="0">
+            <a:endParaRPr lang="es-ES" sz="2400" b="0" noProof="0" dirty="0">
               <a:latin typeface="+mj-lt"/>
               <a:cs typeface="Lucida Sans"/>
             </a:endParaRPr>
@@ -3955,10 +4400,10 @@
           <a:lstStyle/>
           <a:p>
             <a:fld id="{B6F15528-21DE-4FAA-801E-634DDDAF4B2B}" type="slidenum">
-              <a:rPr lang="es-ES" smtClean="0"/>
+              <a:rPr lang="es-ES" noProof="0" smtClean="0"/>
               <a:t>2</a:t>
             </a:fld>
-            <a:endParaRPr lang="es-ES"/>
+            <a:endParaRPr lang="es-ES" noProof="0" dirty="0"/>
           </a:p>
         </p:txBody>
       </p:sp>
@@ -3989,10 +4434,9 @@
               </a:spcBef>
             </a:pPr>
             <a:r>
-              <a:rPr lang="es-ES" spc="-5"/>
+              <a:rPr lang="es-ES" spc="-5" noProof="0" dirty="0"/>
               <a:t>LAB 3.0. CIRCUITS &amp; COMPACT MODELS</a:t>
             </a:r>
-            <a:endParaRPr lang="es-ES" spc="-5" dirty="0"/>
           </a:p>
         </p:txBody>
       </p:sp>
@@ -4091,7 +4535,7 @@
           <a:p>
             <a:pPr algn="just"/>
             <a:r>
-              <a:rPr lang="en-US" sz="2000" b="1" kern="0" dirty="0">
+              <a:rPr lang="es-ES" sz="2000" b="1" kern="0" noProof="0" dirty="0">
                 <a:solidFill>
                   <a:sysClr val="windowText" lastClr="000000"/>
                 </a:solidFill>
@@ -4106,7 +4550,7 @@
               <a:buChar char="•"/>
             </a:pPr>
             <a:r>
-              <a:rPr lang="en-US" kern="0" dirty="0">
+              <a:rPr lang="es-ES" kern="0" noProof="0" dirty="0">
                 <a:solidFill>
                   <a:sysClr val="windowText" lastClr="000000"/>
                 </a:solidFill>
@@ -4121,13 +4565,31 @@
               <a:buChar char="•"/>
             </a:pPr>
             <a:r>
-              <a:rPr lang="en-US" kern="0" dirty="0">
+              <a:rPr lang="es-ES" kern="0" noProof="0" dirty="0">
                 <a:solidFill>
                   <a:sysClr val="windowText" lastClr="000000"/>
                 </a:solidFill>
                 <a:sym typeface="Wingdings" pitchFamily="2" charset="2"/>
               </a:rPr>
-              <a:t>Fork the repo: https://github.com/cccanvas-upv/cifoin-lab3.git</a:t>
+              <a:t>Fork </a:t>
+            </a:r>
+            <a:r>
+              <a:rPr lang="es-ES" kern="0" noProof="0" dirty="0" err="1">
+                <a:solidFill>
+                  <a:sysClr val="windowText" lastClr="000000"/>
+                </a:solidFill>
+                <a:sym typeface="Wingdings" pitchFamily="2" charset="2"/>
+              </a:rPr>
+              <a:t>the</a:t>
+            </a:r>
+            <a:r>
+              <a:rPr lang="es-ES" kern="0" noProof="0" dirty="0">
+                <a:solidFill>
+                  <a:sysClr val="windowText" lastClr="000000"/>
+                </a:solidFill>
+                <a:sym typeface="Wingdings" pitchFamily="2" charset="2"/>
+              </a:rPr>
+              <a:t> repo: https://github.com/cccanvas-upv/cifoin-lab3.git</a:t>
             </a:r>
           </a:p>
           <a:p>
@@ -4136,24 +4598,60 @@
               <a:buChar char="•"/>
             </a:pPr>
             <a:r>
-              <a:rPr lang="en-US" kern="0" dirty="0">
+              <a:rPr lang="es-ES" kern="0" noProof="0" dirty="0">
                 <a:solidFill>
                   <a:sysClr val="windowText" lastClr="000000"/>
                 </a:solidFill>
                 <a:sym typeface="Wingdings" pitchFamily="2" charset="2"/>
               </a:rPr>
-              <a:t>Clone the repo using </a:t>
-            </a:r>
-            <a:r>
-              <a:rPr lang="en-US" kern="0" dirty="0" err="1">
+              <a:t>Clone </a:t>
+            </a:r>
+            <a:r>
+              <a:rPr lang="es-ES" kern="0" noProof="0" dirty="0" err="1">
                 <a:solidFill>
                   <a:sysClr val="windowText" lastClr="000000"/>
                 </a:solidFill>
                 <a:sym typeface="Wingdings" pitchFamily="2" charset="2"/>
               </a:rPr>
+              <a:t>the</a:t>
+            </a:r>
+            <a:r>
+              <a:rPr lang="es-ES" kern="0" noProof="0" dirty="0">
+                <a:solidFill>
+                  <a:sysClr val="windowText" lastClr="000000"/>
+                </a:solidFill>
+                <a:sym typeface="Wingdings" pitchFamily="2" charset="2"/>
+              </a:rPr>
+              <a:t> repo </a:t>
+            </a:r>
+            <a:r>
+              <a:rPr lang="es-ES" kern="0" noProof="0" dirty="0" err="1">
+                <a:solidFill>
+                  <a:sysClr val="windowText" lastClr="000000"/>
+                </a:solidFill>
+                <a:sym typeface="Wingdings" pitchFamily="2" charset="2"/>
+              </a:rPr>
+              <a:t>using</a:t>
+            </a:r>
+            <a:r>
+              <a:rPr lang="es-ES" kern="0" noProof="0" dirty="0">
+                <a:solidFill>
+                  <a:sysClr val="windowText" lastClr="000000"/>
+                </a:solidFill>
+                <a:sym typeface="Wingdings" pitchFamily="2" charset="2"/>
+              </a:rPr>
+              <a:t> </a:t>
+            </a:r>
+            <a:r>
+              <a:rPr lang="es-ES" kern="0" noProof="0" dirty="0" err="1">
+                <a:solidFill>
+                  <a:sysClr val="windowText" lastClr="000000"/>
+                </a:solidFill>
+                <a:sym typeface="Wingdings" pitchFamily="2" charset="2"/>
+              </a:rPr>
               <a:t>VSCode</a:t>
             </a:r>
-            <a:endParaRPr lang="en-US" kern="0" dirty="0">
+            <a:endParaRPr lang="es-ES" kern="0" noProof="0" dirty="0">
               <a:solidFill>
                 <a:sysClr val="windowText" lastClr="000000"/>
               </a:solidFill>
@@ -4166,23 +4664,39 @@
               <a:buChar char="•"/>
             </a:pPr>
             <a:r>
-              <a:rPr lang="en-US" kern="0" dirty="0">
+              <a:rPr lang="es-ES" kern="0" noProof="0" dirty="0">
                 <a:solidFill>
                   <a:sysClr val="windowText" lastClr="000000"/>
                 </a:solidFill>
               </a:rPr>
-              <a:t>Run the </a:t>
-            </a:r>
-            <a:r>
-              <a:rPr lang="en-US" kern="0" dirty="0" err="1">
+              <a:t>Run </a:t>
+            </a:r>
+            <a:r>
+              <a:rPr lang="es-ES" kern="0" noProof="0" dirty="0" err="1">
                 <a:solidFill>
                   <a:sysClr val="windowText" lastClr="000000"/>
                 </a:solidFill>
               </a:rPr>
+              <a:t>the</a:t>
+            </a:r>
+            <a:r>
+              <a:rPr lang="es-ES" kern="0" noProof="0" dirty="0">
+                <a:solidFill>
+                  <a:sysClr val="windowText" lastClr="000000"/>
+                </a:solidFill>
+              </a:rPr>
+              <a:t> </a:t>
+            </a:r>
+            <a:r>
+              <a:rPr lang="es-ES" kern="0" noProof="0" dirty="0" err="1">
+                <a:solidFill>
+                  <a:sysClr val="windowText" lastClr="000000"/>
+                </a:solidFill>
+              </a:rPr>
               <a:t>Jupyter</a:t>
             </a:r>
             <a:r>
-              <a:rPr lang="en-US" kern="0" dirty="0">
+              <a:rPr lang="es-ES" kern="0" noProof="0" dirty="0">
                 <a:solidFill>
                   <a:sysClr val="windowText" lastClr="000000"/>
                 </a:solidFill>
@@ -4196,7 +4710,7 @@
               <a:buChar char="•"/>
             </a:pPr>
             <a:r>
-              <a:rPr lang="en-US" kern="0" dirty="0">
+              <a:rPr lang="es-ES" kern="0" noProof="0" dirty="0">
                 <a:solidFill>
                   <a:sysClr val="windowText" lastClr="000000"/>
                 </a:solidFill>
@@ -4204,7 +4718,7 @@
               <a:t>CIRCUITS_&amp;_</a:t>
             </a:r>
             <a:r>
-              <a:rPr lang="en-US" kern="0" dirty="0" err="1">
+              <a:rPr lang="es-ES" kern="0" noProof="0" dirty="0" err="1">
                 <a:solidFill>
                   <a:sysClr val="windowText" lastClr="000000"/>
                 </a:solidFill>
@@ -4212,7 +4726,7 @@
               <a:t>COMPACT_MODELS.ipynb</a:t>
             </a:r>
             <a:r>
-              <a:rPr lang="en-US" kern="0" dirty="0">
+              <a:rPr lang="es-ES" kern="0" noProof="0" dirty="0">
                 <a:solidFill>
                   <a:sysClr val="windowText" lastClr="000000"/>
                 </a:solidFill>
@@ -4222,27 +4736,43 @@
           </a:p>
           <a:p>
             <a:pPr algn="just"/>
-            <a:endParaRPr lang="en-US" b="1" i="1" dirty="0"/>
+            <a:endParaRPr lang="es-ES" b="1" i="1" noProof="0" dirty="0"/>
           </a:p>
           <a:p>
             <a:pPr algn="just"/>
             <a:r>
-              <a:rPr lang="en-US" b="1" i="1" dirty="0"/>
-              <a:t>Devices </a:t>
-            </a:r>
-            <a:r>
-              <a:rPr lang="en-US" i="1" dirty="0"/>
-              <a:t>to be studied:</a:t>
-            </a:r>
-            <a:endParaRPr lang="en-US" b="1" i="1" dirty="0"/>
+              <a:rPr lang="es-ES" b="1" i="1" noProof="0" dirty="0" err="1"/>
+              <a:t>Devices</a:t>
+            </a:r>
+            <a:r>
+              <a:rPr lang="es-ES" b="1" i="1" noProof="0" dirty="0"/>
+              <a:t> </a:t>
+            </a:r>
+            <a:r>
+              <a:rPr lang="es-ES" i="1" noProof="0" dirty="0" err="1"/>
+              <a:t>to</a:t>
+            </a:r>
+            <a:r>
+              <a:rPr lang="es-ES" i="1" noProof="0" dirty="0"/>
+              <a:t> be </a:t>
+            </a:r>
+            <a:r>
+              <a:rPr lang="es-ES" i="1" noProof="0" dirty="0" err="1"/>
+              <a:t>studied</a:t>
+            </a:r>
+            <a:r>
+              <a:rPr lang="es-ES" i="1" noProof="0" dirty="0"/>
+              <a:t>:</a:t>
+            </a:r>
+            <a:endParaRPr lang="es-ES" b="1" i="1" noProof="0" dirty="0"/>
           </a:p>
           <a:p>
             <a:pPr algn="just"/>
-            <a:endParaRPr lang="en-US" sz="2000" b="1" i="1" dirty="0"/>
+            <a:endParaRPr lang="es-ES" sz="2000" b="1" i="1" noProof="0" dirty="0"/>
           </a:p>
           <a:p>
             <a:pPr algn="just"/>
-            <a:endParaRPr lang="en-US" sz="2000" kern="0" dirty="0">
+            <a:endParaRPr lang="es-ES" sz="2000" kern="0" noProof="0" dirty="0">
               <a:solidFill>
                 <a:sysClr val="windowText" lastClr="000000"/>
               </a:solidFill>
@@ -4280,10 +4810,18 @@
           <a:p>
             <a:pPr algn="r"/>
             <a:r>
-              <a:rPr lang="en-US" b="1" dirty="0"/>
-              <a:t>Ring Resonators (RR)</a:t>
-            </a:r>
-            <a:endParaRPr lang="en-US" dirty="0"/>
+              <a:rPr lang="es-ES" b="1" noProof="0" dirty="0"/>
+              <a:t>Ring </a:t>
+            </a:r>
+            <a:r>
+              <a:rPr lang="es-ES" b="1" noProof="0" dirty="0" err="1"/>
+              <a:t>Resonators</a:t>
+            </a:r>
+            <a:r>
+              <a:rPr lang="es-ES" b="1" noProof="0" dirty="0"/>
+              <a:t> (RR)</a:t>
+            </a:r>
+            <a:endParaRPr lang="es-ES" noProof="0" dirty="0"/>
           </a:p>
         </p:txBody>
       </p:sp>
@@ -4317,10 +4855,18 @@
           <a:p>
             <a:pPr algn="ctr"/>
             <a:r>
-              <a:rPr lang="en-US" b="1" dirty="0"/>
-              <a:t>Mach-Zehnder Interferometer (MZI)</a:t>
-            </a:r>
-            <a:endParaRPr lang="en-US" dirty="0"/>
+              <a:rPr lang="es-ES" b="1" noProof="0" dirty="0"/>
+              <a:t>Mach-Zehnder </a:t>
+            </a:r>
+            <a:r>
+              <a:rPr lang="es-ES" b="1" noProof="0" dirty="0" err="1"/>
+              <a:t>Interferometer</a:t>
+            </a:r>
+            <a:r>
+              <a:rPr lang="es-ES" b="1" noProof="0" dirty="0"/>
+              <a:t> (MZI)</a:t>
+            </a:r>
+            <a:endParaRPr lang="es-ES" noProof="0" dirty="0"/>
           </a:p>
         </p:txBody>
       </p:sp>
@@ -4522,7 +5068,7 @@
           <a:lstStyle/>
           <a:p>
             <a:pPr algn="just"/>
-            <a:endParaRPr lang="en-US" sz="1600" dirty="0">
+            <a:endParaRPr lang="es-ES" sz="1600" noProof="0" dirty="0">
               <a:solidFill>
                 <a:schemeClr val="tx1"/>
               </a:solidFill>
@@ -4533,7 +5079,7 @@
           </a:p>
           <a:p>
             <a:pPr algn="just"/>
-            <a:endParaRPr lang="en-US" sz="1600" dirty="0">
+            <a:endParaRPr lang="es-ES" sz="1600" noProof="0" dirty="0">
               <a:solidFill>
                 <a:schemeClr val="tx1"/>
               </a:solidFill>
@@ -4544,7 +5090,7 @@
           </a:p>
           <a:p>
             <a:pPr algn="just"/>
-            <a:endParaRPr lang="en-US" sz="1600" dirty="0">
+            <a:endParaRPr lang="es-ES" sz="1600" noProof="0" dirty="0">
               <a:solidFill>
                 <a:schemeClr val="tx1"/>
               </a:solidFill>
@@ -4555,7 +5101,7 @@
           </a:p>
           <a:p>
             <a:pPr algn="just"/>
-            <a:endParaRPr lang="en-US" sz="1600" dirty="0">
+            <a:endParaRPr lang="es-ES" sz="1600" noProof="0" dirty="0">
               <a:solidFill>
                 <a:schemeClr val="tx1"/>
               </a:solidFill>
@@ -4565,7 +5111,7 @@
           </a:p>
           <a:p>
             <a:pPr algn="just"/>
-            <a:endParaRPr lang="en-US" sz="1600" dirty="0">
+            <a:endParaRPr lang="es-ES" sz="1600" noProof="0" dirty="0">
               <a:solidFill>
                 <a:schemeClr val="tx1"/>
               </a:solidFill>
@@ -4575,7 +5121,7 @@
           </a:p>
           <a:p>
             <a:pPr algn="just"/>
-            <a:endParaRPr lang="en-US" sz="1600" dirty="0">
+            <a:endParaRPr lang="es-ES" sz="1600" noProof="0" dirty="0">
               <a:solidFill>
                 <a:schemeClr val="tx1"/>
               </a:solidFill>
@@ -4625,16 +5171,44 @@
               </a:spcBef>
             </a:pPr>
             <a:r>
-              <a:rPr lang="en-US" sz="2500" dirty="0"/>
-              <a:t>Learning outcome #1a – Perfectly balanced MZI</a:t>
+              <a:rPr lang="es-ES" sz="2500" noProof="0" dirty="0" err="1"/>
+              <a:t>Learning</a:t>
+            </a:r>
+            <a:r>
+              <a:rPr lang="es-ES" sz="2500" noProof="0" dirty="0"/>
+              <a:t> </a:t>
+            </a:r>
+            <a:r>
+              <a:rPr lang="es-ES" sz="2500" noProof="0" dirty="0" err="1"/>
+              <a:t>outcome</a:t>
+            </a:r>
+            <a:r>
+              <a:rPr lang="es-ES" sz="2500" noProof="0" dirty="0"/>
+              <a:t> #1a – </a:t>
+            </a:r>
+            <a:r>
+              <a:rPr lang="es-ES" sz="2500" noProof="0" dirty="0" err="1"/>
+              <a:t>Perfectly</a:t>
+            </a:r>
+            <a:r>
+              <a:rPr lang="es-ES" sz="2500" noProof="0" dirty="0"/>
+              <a:t> </a:t>
+            </a:r>
+            <a:r>
+              <a:rPr lang="es-ES" sz="2500" noProof="0" dirty="0" err="1"/>
+              <a:t>balanced</a:t>
+            </a:r>
+            <a:r>
+              <a:rPr lang="es-ES" sz="2500" noProof="0" dirty="0"/>
+              <a:t> MZI</a:t>
             </a:r>
             <a:br>
-              <a:rPr lang="es-ES" sz="2500" spc="-5" dirty="0">
+              <a:rPr lang="es-ES" sz="2500" spc="-5" noProof="0" dirty="0">
                 <a:latin typeface="+mj-lt"/>
                 <a:cs typeface="Lucida Sans"/>
               </a:rPr>
             </a:br>
-            <a:endParaRPr sz="2500" b="0" dirty="0">
+            <a:endParaRPr lang="es-ES" sz="2500" b="0" noProof="0" dirty="0">
               <a:latin typeface="+mj-lt"/>
               <a:cs typeface="Lucida Sans"/>
             </a:endParaRPr>
@@ -4699,10 +5273,10 @@
           <a:lstStyle/>
           <a:p>
             <a:fld id="{B6F15528-21DE-4FAA-801E-634DDDAF4B2B}" type="slidenum">
-              <a:rPr lang="es-ES" smtClean="0"/>
+              <a:rPr lang="es-ES" noProof="0" smtClean="0"/>
               <a:t>3</a:t>
             </a:fld>
-            <a:endParaRPr lang="es-ES"/>
+            <a:endParaRPr lang="es-ES" noProof="0" dirty="0"/>
           </a:p>
         </p:txBody>
       </p:sp>
@@ -4733,10 +5307,9 @@
               </a:spcBef>
             </a:pPr>
             <a:r>
-              <a:rPr lang="es-ES" spc="-5"/>
+              <a:rPr lang="es-ES" spc="-5" noProof="0" dirty="0"/>
               <a:t>LAB 3.0. CIRCUITS &amp; COMPACT MODELS</a:t>
             </a:r>
-            <a:endParaRPr lang="es-ES" spc="-5" dirty="0"/>
           </a:p>
         </p:txBody>
       </p:sp>
@@ -4837,7 +5410,7 @@
               <a:buNone/>
             </a:pPr>
             <a:r>
-              <a:rPr lang="en-US" sz="2000" b="1" dirty="0"/>
+              <a:rPr lang="es-ES" sz="2000" b="1" noProof="0" dirty="0"/>
               <a:t>INSTRUCTOR:</a:t>
             </a:r>
           </a:p>
@@ -4847,16 +5420,56 @@
               <a:buChar char="•"/>
             </a:pPr>
             <a:r>
-              <a:rPr lang="en-US" sz="2000" dirty="0"/>
+              <a:rPr lang="es-ES" sz="2000" noProof="0" dirty="0"/>
               <a:t>Present Python and </a:t>
             </a:r>
             <a:r>
-              <a:rPr lang="en-US" sz="2000" dirty="0" err="1"/>
+              <a:rPr lang="es-ES" sz="2000" noProof="0" dirty="0" err="1"/>
               <a:t>GDSFactory</a:t>
             </a:r>
             <a:r>
-              <a:rPr lang="en-US" sz="2000" dirty="0"/>
-              <a:t> implementation of the Compact Models and Circuit Model</a:t>
+              <a:rPr lang="es-ES" sz="2000" noProof="0" dirty="0"/>
+              <a:t> </a:t>
+            </a:r>
+            <a:r>
+              <a:rPr lang="es-ES" sz="2000" noProof="0" dirty="0" err="1"/>
+              <a:t>implementation</a:t>
+            </a:r>
+            <a:r>
+              <a:rPr lang="es-ES" sz="2000" noProof="0" dirty="0"/>
+              <a:t> </a:t>
+            </a:r>
+            <a:r>
+              <a:rPr lang="es-ES" sz="2000" noProof="0" dirty="0" err="1"/>
+              <a:t>of</a:t>
+            </a:r>
+            <a:r>
+              <a:rPr lang="es-ES" sz="2000" noProof="0" dirty="0"/>
+              <a:t> </a:t>
+            </a:r>
+            <a:r>
+              <a:rPr lang="es-ES" sz="2000" noProof="0" dirty="0" err="1"/>
+              <a:t>the</a:t>
+            </a:r>
+            <a:r>
+              <a:rPr lang="es-ES" sz="2000" noProof="0" dirty="0"/>
+              <a:t> Compact </a:t>
+            </a:r>
+            <a:r>
+              <a:rPr lang="es-ES" sz="2000" noProof="0" dirty="0" err="1"/>
+              <a:t>Models</a:t>
+            </a:r>
+            <a:r>
+              <a:rPr lang="es-ES" sz="2000" noProof="0" dirty="0"/>
+              <a:t> and </a:t>
+            </a:r>
+            <a:r>
+              <a:rPr lang="es-ES" sz="2000" noProof="0" dirty="0" err="1"/>
+              <a:t>Circuit</a:t>
+            </a:r>
+            <a:r>
+              <a:rPr lang="es-ES" sz="2000" noProof="0" dirty="0"/>
+              <a:t> Model</a:t>
             </a:r>
           </a:p>
           <a:p>
@@ -4865,30 +5478,46 @@
               <a:buChar char="•"/>
             </a:pPr>
             <a:r>
-              <a:rPr lang="en-US" sz="2000" dirty="0"/>
-              <a:t>Describe how to </a:t>
-            </a:r>
-            <a:r>
-              <a:rPr lang="es-ES" sz="2000" dirty="0" err="1"/>
+              <a:rPr lang="es-ES" sz="2000" noProof="0" dirty="0"/>
+              <a:t>Describe </a:t>
+            </a:r>
+            <a:r>
+              <a:rPr lang="es-ES" sz="2000" noProof="0" dirty="0" err="1"/>
+              <a:t>how</a:t>
+            </a:r>
+            <a:r>
+              <a:rPr lang="es-ES" sz="2000" noProof="0" dirty="0"/>
+              <a:t> </a:t>
+            </a:r>
+            <a:r>
+              <a:rPr lang="es-ES" sz="2000" noProof="0" dirty="0" err="1"/>
+              <a:t>to</a:t>
+            </a:r>
+            <a:r>
+              <a:rPr lang="es-ES" sz="2000" noProof="0" dirty="0"/>
+              <a:t> </a:t>
+            </a:r>
+            <a:r>
+              <a:rPr lang="es-ES" sz="2000" noProof="0" dirty="0" err="1"/>
               <a:t>simulate</a:t>
             </a:r>
             <a:r>
-              <a:rPr lang="es-ES" sz="2000" dirty="0"/>
+              <a:rPr lang="es-ES" sz="2000" noProof="0" dirty="0"/>
               <a:t> </a:t>
             </a:r>
             <a:r>
-              <a:rPr lang="es-ES" sz="2000" dirty="0" err="1"/>
+              <a:rPr lang="es-ES" sz="2000" noProof="0" dirty="0" err="1"/>
               <a:t>usin</a:t>
             </a:r>
             <a:r>
-              <a:rPr lang="es-ES" sz="2000" dirty="0"/>
+              <a:rPr lang="es-ES" sz="2000" noProof="0" dirty="0"/>
               <a:t> SAX </a:t>
             </a:r>
             <a:r>
-              <a:rPr lang="es-ES" sz="2000" dirty="0" err="1"/>
+              <a:rPr lang="es-ES" sz="2000" noProof="0" dirty="0" err="1"/>
               <a:t>library</a:t>
             </a:r>
-            <a:endParaRPr lang="en-US" sz="2000" dirty="0"/>
+            <a:endParaRPr lang="es-ES" sz="2000" noProof="0" dirty="0"/>
           </a:p>
           <a:p>
             <a:pPr marL="342900" indent="-342900" algn="just">
@@ -4896,8 +5525,16 @@
               <a:buChar char="•"/>
             </a:pPr>
             <a:r>
-              <a:rPr lang="en-US" sz="2000" dirty="0"/>
-              <a:t>Describe the outputs.</a:t>
+              <a:rPr lang="es-ES" sz="2000" noProof="0" dirty="0"/>
+              <a:t>Describe </a:t>
+            </a:r>
+            <a:r>
+              <a:rPr lang="es-ES" sz="2000" noProof="0" dirty="0" err="1"/>
+              <a:t>the</a:t>
+            </a:r>
+            <a:r>
+              <a:rPr lang="es-ES" sz="2000" noProof="0" dirty="0"/>
+              <a:t> outputs.</a:t>
             </a:r>
           </a:p>
           <a:p>
@@ -4905,7 +5542,7 @@
               <a:buNone/>
             </a:pPr>
             <a:r>
-              <a:rPr lang="en-US" b="1" dirty="0"/>
+              <a:rPr lang="es-ES" b="1" noProof="0" dirty="0"/>
               <a:t>ALL EXAMPLE #1: </a:t>
             </a:r>
           </a:p>
@@ -4914,11 +5551,11 @@
               <a:buNone/>
             </a:pPr>
             <a:r>
-              <a:rPr lang="en-US" dirty="0" err="1"/>
+              <a:rPr lang="es-ES" noProof="0" dirty="0" err="1"/>
               <a:t>wvl</a:t>
             </a:r>
             <a:r>
-              <a:rPr lang="en-US" dirty="0"/>
+              <a:rPr lang="es-ES" noProof="0" dirty="0"/>
               <a:t> [1500-1600] step 0.001</a:t>
             </a:r>
           </a:p>
@@ -4927,8 +5564,12 @@
               <a:buNone/>
             </a:pPr>
             <a:r>
-              <a:rPr lang="en-US" dirty="0"/>
-              <a:t>dL = 0</a:t>
+              <a:rPr lang="es-ES" noProof="0" dirty="0" err="1"/>
+              <a:t>dL</a:t>
+            </a:r>
+            <a:r>
+              <a:rPr lang="es-ES" noProof="0" dirty="0"/>
+              <a:t> = 0</a:t>
             </a:r>
           </a:p>
           <a:p>
@@ -4936,22 +5577,38 @@
               <a:buNone/>
             </a:pPr>
             <a:r>
-              <a:rPr lang="en-US" dirty="0"/>
-              <a:t>Kin = Kout = 0.5 for all </a:t>
-            </a:r>
-            <a:r>
-              <a:rPr lang="en-US" dirty="0" err="1"/>
+              <a:rPr lang="es-ES" noProof="0" dirty="0"/>
+              <a:t>Kin = Kout = 0.5 </a:t>
+            </a:r>
+            <a:r>
+              <a:rPr lang="es-ES" noProof="0" dirty="0" err="1"/>
+              <a:t>for</a:t>
+            </a:r>
+            <a:r>
+              <a:rPr lang="es-ES" noProof="0" dirty="0"/>
+              <a:t> </a:t>
+            </a:r>
+            <a:r>
+              <a:rPr lang="es-ES" noProof="0" dirty="0" err="1"/>
+              <a:t>all</a:t>
+            </a:r>
+            <a:r>
+              <a:rPr lang="es-ES" noProof="0" dirty="0"/>
+              <a:t> </a:t>
+            </a:r>
+            <a:r>
+              <a:rPr lang="es-ES" noProof="0" dirty="0" err="1"/>
               <a:t>wvl</a:t>
             </a:r>
-            <a:endParaRPr lang="en-US" dirty="0"/>
+            <a:endParaRPr lang="es-ES" noProof="0" dirty="0"/>
           </a:p>
           <a:p>
             <a:pPr algn="just"/>
-            <a:endParaRPr lang="en-US" sz="2000" b="1" i="1" dirty="0"/>
+            <a:endParaRPr lang="es-ES" sz="2000" b="1" i="1" noProof="0" dirty="0"/>
           </a:p>
           <a:p>
             <a:pPr algn="just"/>
-            <a:endParaRPr lang="en-US" sz="2000" kern="0" dirty="0">
+            <a:endParaRPr lang="es-ES" sz="2000" kern="0" noProof="0" dirty="0">
               <a:solidFill>
                 <a:sysClr val="windowText" lastClr="000000"/>
               </a:solidFill>
@@ -4974,7 +5631,7 @@
         <p:spPr>
           <a:xfrm>
             <a:off x="609441" y="4860334"/>
-            <a:ext cx="11199971" cy="1200329"/>
+            <a:ext cx="11199971" cy="1384995"/>
           </a:xfrm>
           <a:prstGeom prst="rect">
             <a:avLst/>
@@ -4998,44 +5655,65 @@
           <a:p>
             <a:pPr algn="just"/>
             <a:r>
-              <a:rPr lang="en-US" sz="1200" dirty="0">
-                <a:latin typeface="Arial" panose="020B0604020202020204" pitchFamily="34" charset="0"/>
-                <a:cs typeface="Arial" panose="020B0604020202020204" pitchFamily="34" charset="0"/>
-              </a:rPr>
-              <a:t>Document and comment your results</a:t>
+              <a:rPr lang="es-ES" sz="1200" noProof="0" dirty="0">
+                <a:latin typeface="Arial" panose="020B0604020202020204" pitchFamily="34" charset="0"/>
+                <a:cs typeface="Arial" panose="020B0604020202020204" pitchFamily="34" charset="0"/>
+              </a:rPr>
+              <a:t>Podemos ver cómo cuando el MZI está perfectamente balanceado, </a:t>
+            </a:r>
+            <a:r>
+              <a:rPr lang="es-ES" sz="1200" noProof="0" dirty="0" err="1">
+                <a:latin typeface="Arial" panose="020B0604020202020204" pitchFamily="34" charset="0"/>
+                <a:cs typeface="Arial" panose="020B0604020202020204" pitchFamily="34" charset="0"/>
+              </a:rPr>
+              <a:t>temenos</a:t>
+            </a:r>
+            <a:r>
+              <a:rPr lang="es-ES" sz="1200" noProof="0" dirty="0">
+                <a:latin typeface="Arial" panose="020B0604020202020204" pitchFamily="34" charset="0"/>
+                <a:cs typeface="Arial" panose="020B0604020202020204" pitchFamily="34" charset="0"/>
+              </a:rPr>
+              <a:t> una función de transferencia completamente plana, teniendo una transferencia de potencia perfecta entre </a:t>
+            </a:r>
+            <a:r>
+              <a:rPr lang="es-ES" sz="1200" noProof="0" dirty="0" err="1">
+                <a:latin typeface="Arial" panose="020B0604020202020204" pitchFamily="34" charset="0"/>
+                <a:cs typeface="Arial" panose="020B0604020202020204" pitchFamily="34" charset="0"/>
+              </a:rPr>
+              <a:t>kos</a:t>
+            </a:r>
+            <a:r>
+              <a:rPr lang="es-ES" sz="1200" noProof="0" dirty="0">
+                <a:latin typeface="Arial" panose="020B0604020202020204" pitchFamily="34" charset="0"/>
+                <a:cs typeface="Arial" panose="020B0604020202020204" pitchFamily="34" charset="0"/>
+              </a:rPr>
+              <a:t> puertos 1 y 0 pero sin transmitir potencia entre los puertos iguales (0,0)(1,1). Esto es debido a la interferencia destructive entre los puertos.</a:t>
             </a:r>
           </a:p>
           <a:p>
             <a:pPr algn="just"/>
-            <a:endParaRPr lang="en-US" sz="1200" dirty="0">
+            <a:endParaRPr lang="es-ES" sz="1200" noProof="0" dirty="0">
               <a:latin typeface="Arial" panose="020B0604020202020204" pitchFamily="34" charset="0"/>
               <a:cs typeface="Arial" panose="020B0604020202020204" pitchFamily="34" charset="0"/>
             </a:endParaRPr>
           </a:p>
           <a:p>
             <a:pPr algn="just"/>
-            <a:endParaRPr lang="en-US" sz="1200" dirty="0">
+            <a:endParaRPr lang="es-ES" sz="1200" noProof="0" dirty="0">
               <a:latin typeface="Arial" panose="020B0604020202020204" pitchFamily="34" charset="0"/>
               <a:cs typeface="Arial" panose="020B0604020202020204" pitchFamily="34" charset="0"/>
             </a:endParaRPr>
           </a:p>
           <a:p>
             <a:pPr algn="just"/>
-            <a:endParaRPr lang="en-US" sz="1200" dirty="0">
+            <a:endParaRPr lang="es-ES" sz="1200" noProof="0" dirty="0">
               <a:latin typeface="Arial" panose="020B0604020202020204" pitchFamily="34" charset="0"/>
               <a:cs typeface="Arial" panose="020B0604020202020204" pitchFamily="34" charset="0"/>
             </a:endParaRPr>
           </a:p>
           <a:p>
             <a:pPr algn="just"/>
-            <a:endParaRPr lang="en-US" sz="1200" dirty="0">
-              <a:latin typeface="Arial" panose="020B0604020202020204" pitchFamily="34" charset="0"/>
-              <a:cs typeface="Arial" panose="020B0604020202020204" pitchFamily="34" charset="0"/>
-            </a:endParaRPr>
-          </a:p>
-          <a:p>
-            <a:pPr algn="just"/>
-            <a:endParaRPr lang="en-US" sz="1200" dirty="0">
+            <a:endParaRPr lang="es-ES" sz="1200" noProof="0" dirty="0">
               <a:latin typeface="Arial" panose="020B0604020202020204" pitchFamily="34" charset="0"/>
               <a:cs typeface="Arial" panose="020B0604020202020204" pitchFamily="34" charset="0"/>
             </a:endParaRPr>
@@ -5090,7 +5768,7 @@
           <a:lstStyle/>
           <a:p>
             <a:pPr algn="ctr"/>
-            <a:endParaRPr lang="en-US"/>
+            <a:endParaRPr lang="es-ES" noProof="0" dirty="0"/>
           </a:p>
         </p:txBody>
       </p:sp>
@@ -5124,28 +5802,71 @@
           <a:p>
             <a:pPr algn="ctr"/>
             <a:r>
-              <a:rPr lang="es-ES" dirty="0"/>
+              <a:rPr lang="es-ES" noProof="0" dirty="0"/>
               <a:t>MZI transfer </a:t>
             </a:r>
             <a:r>
-              <a:rPr lang="es-ES" dirty="0" err="1"/>
+              <a:rPr lang="es-ES" noProof="0" dirty="0" err="1"/>
               <a:t>functions</a:t>
             </a:r>
-            <a:endParaRPr lang="en-US" dirty="0"/>
+            <a:endParaRPr lang="es-ES" noProof="0" dirty="0"/>
           </a:p>
           <a:p>
             <a:pPr algn="ctr"/>
-            <a:endParaRPr lang="en-US" dirty="0"/>
+            <a:endParaRPr lang="es-ES" noProof="0" dirty="0"/>
           </a:p>
           <a:p>
             <a:pPr algn="ctr"/>
             <a:r>
-              <a:rPr lang="en-US" dirty="0"/>
-              <a:t>Paste plot here</a:t>
-            </a:r>
-          </a:p>
-        </p:txBody>
-      </p:sp>
+              <a:rPr lang="es-ES" noProof="0" dirty="0"/>
+              <a:t>Paste </a:t>
+            </a:r>
+            <a:r>
+              <a:rPr lang="es-ES" noProof="0" dirty="0" err="1"/>
+              <a:t>plot</a:t>
+            </a:r>
+            <a:r>
+              <a:rPr lang="es-ES" noProof="0" dirty="0"/>
+              <a:t> </a:t>
+            </a:r>
+            <a:r>
+              <a:rPr lang="es-ES" noProof="0" dirty="0" err="1"/>
+              <a:t>here</a:t>
+            </a:r>
+            <a:endParaRPr lang="es-ES" noProof="0" dirty="0"/>
+          </a:p>
+        </p:txBody>
+      </p:sp>
+      <p:pic>
+        <p:nvPicPr>
+          <p:cNvPr id="11" name="Picture 10">
+            <a:extLst>
+              <a:ext uri="{FF2B5EF4-FFF2-40B4-BE49-F238E27FC236}">
+                <a16:creationId xmlns:a16="http://schemas.microsoft.com/office/drawing/2014/main" id="{E128DFBC-C348-1E74-CB97-AEDABE4BE6CF}"/>
+              </a:ext>
+            </a:extLst>
+          </p:cNvPr>
+          <p:cNvPicPr>
+            <a:picLocks noChangeAspect="1"/>
+          </p:cNvPicPr>
+          <p:nvPr/>
+        </p:nvPicPr>
+        <p:blipFill>
+          <a:blip r:embed="rId4"/>
+          <a:stretch>
+            <a:fillRect/>
+          </a:stretch>
+        </p:blipFill>
+        <p:spPr>
+          <a:xfrm>
+            <a:off x="870897" y="1682664"/>
+            <a:ext cx="4963805" cy="2781276"/>
+          </a:xfrm>
+          <a:prstGeom prst="rect">
+            <a:avLst/>
+          </a:prstGeom>
+        </p:spPr>
+      </p:pic>
     </p:spTree>
     <p:extLst>
       <p:ext uri="{BB962C8B-B14F-4D97-AF65-F5344CB8AC3E}">
@@ -5196,7 +5917,7 @@
         </p:nvSpPr>
         <p:spPr>
           <a:xfrm>
-            <a:off x="6476400" y="1418373"/>
+            <a:off x="6401161" y="856106"/>
             <a:ext cx="5332571" cy="3306028"/>
           </a:xfrm>
           <a:prstGeom prst="rect">
@@ -5234,7 +5955,7 @@
           <a:lstStyle/>
           <a:p>
             <a:pPr algn="just"/>
-            <a:endParaRPr lang="en-US" sz="1600" dirty="0">
+            <a:endParaRPr lang="es-ES" sz="1600" noProof="0" dirty="0">
               <a:solidFill>
                 <a:schemeClr val="tx1"/>
               </a:solidFill>
@@ -5245,7 +5966,7 @@
           </a:p>
           <a:p>
             <a:pPr algn="just"/>
-            <a:endParaRPr lang="en-US" sz="1600" dirty="0">
+            <a:endParaRPr lang="es-ES" sz="1600" noProof="0" dirty="0">
               <a:solidFill>
                 <a:schemeClr val="tx1"/>
               </a:solidFill>
@@ -5256,7 +5977,7 @@
           </a:p>
           <a:p>
             <a:pPr algn="just"/>
-            <a:endParaRPr lang="en-US" sz="1600" dirty="0">
+            <a:endParaRPr lang="es-ES" sz="1600" noProof="0" dirty="0">
               <a:solidFill>
                 <a:schemeClr val="tx1"/>
               </a:solidFill>
@@ -5267,7 +5988,7 @@
           </a:p>
           <a:p>
             <a:pPr algn="just"/>
-            <a:endParaRPr lang="en-US" sz="1600" dirty="0">
+            <a:endParaRPr lang="es-ES" sz="1600" noProof="0" dirty="0">
               <a:solidFill>
                 <a:schemeClr val="tx1"/>
               </a:solidFill>
@@ -5277,7 +5998,7 @@
           </a:p>
           <a:p>
             <a:pPr algn="just"/>
-            <a:endParaRPr lang="en-US" sz="1600" dirty="0">
+            <a:endParaRPr lang="es-ES" sz="1600" noProof="0" dirty="0">
               <a:solidFill>
                 <a:schemeClr val="tx1"/>
               </a:solidFill>
@@ -5287,7 +6008,7 @@
           </a:p>
           <a:p>
             <a:pPr algn="just"/>
-            <a:endParaRPr lang="en-US" sz="1600" dirty="0">
+            <a:endParaRPr lang="es-ES" sz="1600" noProof="0" dirty="0">
               <a:solidFill>
                 <a:schemeClr val="tx1"/>
               </a:solidFill>
@@ -5337,16 +6058,28 @@
               </a:spcBef>
             </a:pPr>
             <a:r>
-              <a:rPr lang="en-US" sz="2500" dirty="0"/>
-              <a:t>Learning outcome #1b – Unbalanced MZI</a:t>
+              <a:rPr lang="es-ES" sz="2500" noProof="0" dirty="0" err="1"/>
+              <a:t>Learning</a:t>
+            </a:r>
+            <a:r>
+              <a:rPr lang="es-ES" sz="2500" noProof="0" dirty="0"/>
+              <a:t> </a:t>
+            </a:r>
+            <a:r>
+              <a:rPr lang="es-ES" sz="2500" noProof="0" dirty="0" err="1"/>
+              <a:t>outcome</a:t>
+            </a:r>
+            <a:r>
+              <a:rPr lang="es-ES" sz="2500" noProof="0" dirty="0"/>
+              <a:t> #1b – Unbalanced MZI</a:t>
             </a:r>
             <a:br>
-              <a:rPr lang="es-ES" sz="2500" spc="-5" dirty="0">
+              <a:rPr lang="es-ES" sz="2500" spc="-5" noProof="0" dirty="0">
                 <a:latin typeface="+mj-lt"/>
                 <a:cs typeface="Lucida Sans"/>
               </a:rPr>
             </a:br>
-            <a:endParaRPr sz="2500" b="0" dirty="0">
+            <a:endParaRPr lang="es-ES" sz="2500" b="0" noProof="0" dirty="0">
               <a:latin typeface="+mj-lt"/>
               <a:cs typeface="Lucida Sans"/>
             </a:endParaRPr>
@@ -5411,10 +6144,10 @@
           <a:lstStyle/>
           <a:p>
             <a:fld id="{B6F15528-21DE-4FAA-801E-634DDDAF4B2B}" type="slidenum">
-              <a:rPr lang="es-ES" smtClean="0"/>
+              <a:rPr lang="es-ES" noProof="0" smtClean="0"/>
               <a:t>4</a:t>
             </a:fld>
-            <a:endParaRPr lang="es-ES"/>
+            <a:endParaRPr lang="es-ES" noProof="0" dirty="0"/>
           </a:p>
         </p:txBody>
       </p:sp>
@@ -5445,10 +6178,9 @@
               </a:spcBef>
             </a:pPr>
             <a:r>
-              <a:rPr lang="en-US" spc="-5"/>
+              <a:rPr lang="es-ES" spc="-5" noProof="0" dirty="0"/>
               <a:t>LAB 3.0. CIRCUITS &amp; COMPACT MODELS</a:t>
             </a:r>
-            <a:endParaRPr lang="es-ES" spc="-5" dirty="0"/>
           </a:p>
         </p:txBody>
       </p:sp>
@@ -5468,7 +6200,7 @@
         </p:nvSpPr>
         <p:spPr>
           <a:xfrm>
-            <a:off x="6629399" y="1556991"/>
+            <a:off x="6554160" y="994724"/>
             <a:ext cx="5050811" cy="2895600"/>
           </a:xfrm>
           <a:prstGeom prst="rect">
@@ -5549,12 +6281,8 @@
               <a:buNone/>
             </a:pPr>
             <a:r>
-              <a:rPr lang="es-ES" b="1" dirty="0"/>
-              <a:t>HINTS</a:t>
-            </a:r>
-            <a:r>
-              <a:rPr lang="en-US" b="1" dirty="0"/>
-              <a:t>: </a:t>
+              <a:rPr lang="es-ES" b="1" noProof="0" dirty="0"/>
+              <a:t>HINTS: </a:t>
             </a:r>
           </a:p>
           <a:p>
@@ -5562,55 +6290,67 @@
               <a:buNone/>
             </a:pPr>
             <a:r>
-              <a:rPr lang="en-US" dirty="0" err="1"/>
+              <a:rPr lang="es-ES" noProof="0" dirty="0" err="1"/>
               <a:t>wvl</a:t>
             </a:r>
             <a:r>
-              <a:rPr lang="en-US" dirty="0"/>
+              <a:rPr lang="es-ES" noProof="0" dirty="0"/>
               <a:t> [1500-1600] step 0.001</a:t>
             </a:r>
           </a:p>
           <a:p>
             <a:pPr algn="just"/>
             <a:r>
-              <a:rPr lang="en-US" dirty="0"/>
-              <a:t>dL = </a:t>
-            </a:r>
-            <a:r>
-              <a:rPr lang="en-US" dirty="0">
+              <a:rPr lang="es-ES" noProof="0" dirty="0" err="1"/>
+              <a:t>dL</a:t>
+            </a:r>
+            <a:r>
+              <a:rPr lang="es-ES" noProof="0" dirty="0"/>
+              <a:t> = </a:t>
+            </a:r>
+            <a:r>
+              <a:rPr lang="es-ES" noProof="0" dirty="0">
                 <a:latin typeface="Arial" panose="020B0604020202020204" pitchFamily="34" charset="0"/>
                 <a:cs typeface="Arial" panose="020B0604020202020204" pitchFamily="34" charset="0"/>
                 <a:sym typeface="Wingdings" pitchFamily="2" charset="2"/>
               </a:rPr>
               <a:t>100 µm</a:t>
             </a:r>
-            <a:endParaRPr lang="en-US" dirty="0"/>
+            <a:endParaRPr lang="es-ES" noProof="0" dirty="0"/>
           </a:p>
           <a:p>
             <a:pPr marL="0" indent="0" algn="just">
               <a:buNone/>
             </a:pPr>
             <a:r>
-              <a:rPr lang="en-US" dirty="0"/>
-              <a:t>Kin = Kout = 0.5 for all </a:t>
-            </a:r>
-            <a:r>
-              <a:rPr lang="en-US" dirty="0" err="1"/>
+              <a:rPr lang="es-ES" noProof="0" dirty="0"/>
+              <a:t>Kin = Kout = 0.5 </a:t>
+            </a:r>
+            <a:r>
+              <a:rPr lang="es-ES" noProof="0" dirty="0" err="1"/>
+              <a:t>for</a:t>
+            </a:r>
+            <a:r>
+              <a:rPr lang="es-ES" noProof="0" dirty="0"/>
+              <a:t> </a:t>
+            </a:r>
+            <a:r>
+              <a:rPr lang="es-ES" noProof="0" dirty="0" err="1"/>
+              <a:t>all</a:t>
+            </a:r>
+            <a:r>
+              <a:rPr lang="es-ES" noProof="0" dirty="0"/>
+              <a:t> </a:t>
+            </a:r>
+            <a:r>
+              <a:rPr lang="es-ES" noProof="0" dirty="0" err="1"/>
               <a:t>wvl</a:t>
             </a:r>
-            <a:endParaRPr lang="en-US" dirty="0"/>
+            <a:endParaRPr lang="es-ES" noProof="0" dirty="0"/>
           </a:p>
           <a:p>
             <a:pPr algn="just"/>
-            <a:endParaRPr lang="en-US" sz="2000" b="1" i="1" dirty="0"/>
-          </a:p>
-          <a:p>
-            <a:pPr algn="just"/>
-            <a:endParaRPr lang="en-US" sz="2000" kern="0" dirty="0">
-              <a:solidFill>
-                <a:sysClr val="windowText" lastClr="000000"/>
-              </a:solidFill>
-            </a:endParaRPr>
+            <a:endParaRPr lang="es-ES" sz="2000" b="1" i="1" noProof="0" dirty="0"/>
           </a:p>
         </p:txBody>
       </p:sp>
@@ -5628,8 +6368,8 @@
         </p:nvSpPr>
         <p:spPr>
           <a:xfrm>
-            <a:off x="609441" y="4860334"/>
-            <a:ext cx="11199971" cy="1200329"/>
+            <a:off x="534202" y="4298067"/>
+            <a:ext cx="11199971" cy="1938992"/>
           </a:xfrm>
           <a:prstGeom prst="rect">
             <a:avLst/>
@@ -5653,23 +6393,47 @@
           <a:p>
             <a:pPr algn="just"/>
             <a:r>
-              <a:rPr lang="en-US" sz="1200" dirty="0">
-                <a:latin typeface="Arial" panose="020B0604020202020204" pitchFamily="34" charset="0"/>
-                <a:cs typeface="Arial" panose="020B0604020202020204" pitchFamily="34" charset="0"/>
-              </a:rPr>
-              <a:t>Comment results: describe the transfer function, which is the FSR? How is it related to the length difference among arms? </a:t>
+              <a:rPr lang="es-ES" sz="1200" noProof="0" dirty="0">
+                <a:latin typeface="Arial" panose="020B0604020202020204" pitchFamily="34" charset="0"/>
+                <a:cs typeface="Arial" panose="020B0604020202020204" pitchFamily="34" charset="0"/>
+              </a:rPr>
+              <a:t>En las gráficas observamos que la energía se conserva, ya que cuando no se transmite por un puerto, se transmite por el otro. De esta forma se van alternando entre los puertos para transmitir la energía obteniendo una forma sinusoidal. Esto es debido a la interferencia destructive que aparece en los puertos cada cierta longitud de onda.</a:t>
             </a:r>
           </a:p>
           <a:p>
             <a:pPr algn="just"/>
-            <a:endParaRPr lang="en-US" sz="1200" dirty="0">
+            <a:endParaRPr lang="es-ES" sz="1200" noProof="0" dirty="0">
               <a:latin typeface="Arial" panose="020B0604020202020204" pitchFamily="34" charset="0"/>
               <a:cs typeface="Arial" panose="020B0604020202020204" pitchFamily="34" charset="0"/>
             </a:endParaRPr>
           </a:p>
           <a:p>
             <a:pPr algn="just"/>
-            <a:endParaRPr lang="en-US" sz="1200" dirty="0">
+            <a:r>
+              <a:rPr lang="es-ES" sz="1200" noProof="0" dirty="0">
+                <a:latin typeface="Arial" panose="020B0604020202020204" pitchFamily="34" charset="0"/>
+                <a:cs typeface="Arial" panose="020B0604020202020204" pitchFamily="34" charset="0"/>
+              </a:rPr>
+              <a:t>El FSR viene dado por la ecuación:                                      Teniendo en cuenta que la diferencia de longitud es de 100 </a:t>
+            </a:r>
+            <a:r>
+              <a:rPr lang="es-ES" sz="1200" noProof="0" dirty="0" err="1">
+                <a:latin typeface="Arial" panose="020B0604020202020204" pitchFamily="34" charset="0"/>
+                <a:cs typeface="Arial" panose="020B0604020202020204" pitchFamily="34" charset="0"/>
+              </a:rPr>
+              <a:t>um</a:t>
+            </a:r>
+            <a:r>
+              <a:rPr lang="es-ES" sz="1200" noProof="0" dirty="0">
+                <a:latin typeface="Arial" panose="020B0604020202020204" pitchFamily="34" charset="0"/>
+                <a:cs typeface="Arial" panose="020B0604020202020204" pitchFamily="34" charset="0"/>
+              </a:rPr>
+              <a:t> y a una longitud de onda de 1523 nm, obtenemos el valor de FSR = 5.46nm.</a:t>
+            </a:r>
+          </a:p>
+          <a:p>
+            <a:pPr algn="just"/>
+            <a:endParaRPr lang="es-ES" sz="1200" noProof="0" dirty="0">
               <a:latin typeface="Arial" panose="020B0604020202020204" pitchFamily="34" charset="0"/>
               <a:cs typeface="Arial" panose="020B0604020202020204" pitchFamily="34" charset="0"/>
             </a:endParaRPr>
@@ -5677,26 +6441,12 @@
           <a:p>
             <a:pPr algn="just"/>
             <a:r>
-              <a:rPr lang="en-US" sz="1200" dirty="0">
-                <a:latin typeface="Arial" panose="020B0604020202020204" pitchFamily="34" charset="0"/>
-                <a:cs typeface="Arial" panose="020B0604020202020204" pitchFamily="34" charset="0"/>
-              </a:rPr>
-              <a:t>Show a numeric calculation of the FSR and length difference matching the results in the graph,</a:t>
-            </a:r>
-          </a:p>
-          <a:p>
-            <a:pPr algn="just"/>
-            <a:endParaRPr lang="en-US" sz="1200" dirty="0">
-              <a:latin typeface="Arial" panose="020B0604020202020204" pitchFamily="34" charset="0"/>
-              <a:cs typeface="Arial" panose="020B0604020202020204" pitchFamily="34" charset="0"/>
-            </a:endParaRPr>
-          </a:p>
-          <a:p>
-            <a:pPr algn="just"/>
-            <a:endParaRPr lang="en-US" sz="1200" dirty="0">
-              <a:latin typeface="Arial" panose="020B0604020202020204" pitchFamily="34" charset="0"/>
-              <a:cs typeface="Arial" panose="020B0604020202020204" pitchFamily="34" charset="0"/>
-            </a:endParaRPr>
+              <a:rPr lang="es-ES" sz="1200" noProof="0" dirty="0">
+                <a:latin typeface="Arial" panose="020B0604020202020204" pitchFamily="34" charset="0"/>
+                <a:cs typeface="Arial" panose="020B0604020202020204" pitchFamily="34" charset="0"/>
+              </a:rPr>
+              <a:t>También podemos obtener el FSR de manera visual mediante la gráfica, para conseguirlo tenemos que observar la distancia entre máximos. Como en 1500 hay un máximo y en unos 1540 está el séptimo máximo, como es una función periódica, al dividir la distancia entre los dos máximos por el número de máximos obtenemos la distancia entre dos máximos consecutivos, siendo esta (1540-1500)/7 = 5.7, que no difiere en gran medida del calculado anteriormente.</a:t>
+            </a:r>
           </a:p>
         </p:txBody>
       </p:sp>
@@ -5714,7 +6464,7 @@
         </p:nvSpPr>
         <p:spPr>
           <a:xfrm>
-            <a:off x="609441" y="1418373"/>
+            <a:off x="534202" y="856106"/>
             <a:ext cx="5332571" cy="3306028"/>
           </a:xfrm>
           <a:prstGeom prst="rect">
@@ -5748,7 +6498,7 @@
           <a:lstStyle/>
           <a:p>
             <a:pPr algn="ctr"/>
-            <a:endParaRPr lang="en-US"/>
+            <a:endParaRPr lang="es-ES" noProof="0" dirty="0"/>
           </a:p>
         </p:txBody>
       </p:sp>
@@ -5782,28 +6532,101 @@
           <a:p>
             <a:pPr algn="ctr"/>
             <a:r>
-              <a:rPr lang="es-ES" dirty="0"/>
+              <a:rPr lang="es-ES" noProof="0" dirty="0"/>
               <a:t>MZI transfer </a:t>
             </a:r>
             <a:r>
-              <a:rPr lang="es-ES" dirty="0" err="1"/>
+              <a:rPr lang="es-ES" noProof="0" dirty="0" err="1"/>
               <a:t>functions</a:t>
             </a:r>
-            <a:endParaRPr lang="en-US" dirty="0"/>
+            <a:endParaRPr lang="es-ES" noProof="0" dirty="0"/>
           </a:p>
           <a:p>
             <a:pPr algn="ctr"/>
-            <a:endParaRPr lang="en-US" dirty="0"/>
+            <a:endParaRPr lang="es-ES" noProof="0" dirty="0"/>
           </a:p>
           <a:p>
             <a:pPr algn="ctr"/>
             <a:r>
-              <a:rPr lang="en-US" dirty="0"/>
-              <a:t>Paste plot here</a:t>
-            </a:r>
-          </a:p>
-        </p:txBody>
-      </p:sp>
+              <a:rPr lang="es-ES" noProof="0" dirty="0"/>
+              <a:t>Paste </a:t>
+            </a:r>
+            <a:r>
+              <a:rPr lang="es-ES" noProof="0" dirty="0" err="1"/>
+              <a:t>plot</a:t>
+            </a:r>
+            <a:r>
+              <a:rPr lang="es-ES" noProof="0" dirty="0"/>
+              <a:t> </a:t>
+            </a:r>
+            <a:r>
+              <a:rPr lang="es-ES" noProof="0" dirty="0" err="1"/>
+              <a:t>here</a:t>
+            </a:r>
+            <a:endParaRPr lang="es-ES" noProof="0" dirty="0"/>
+          </a:p>
+        </p:txBody>
+      </p:sp>
+      <p:pic>
+        <p:nvPicPr>
+          <p:cNvPr id="9" name="Picture 8">
+            <a:extLst>
+              <a:ext uri="{FF2B5EF4-FFF2-40B4-BE49-F238E27FC236}">
+                <a16:creationId xmlns:a16="http://schemas.microsoft.com/office/drawing/2014/main" id="{3F1D1409-8165-0B2A-907A-C2149005A4C3}"/>
+              </a:ext>
+            </a:extLst>
+          </p:cNvPr>
+          <p:cNvPicPr>
+            <a:picLocks noChangeAspect="1"/>
+          </p:cNvPicPr>
+          <p:nvPr/>
+        </p:nvPicPr>
+        <p:blipFill>
+          <a:blip r:embed="rId4"/>
+          <a:stretch>
+            <a:fillRect/>
+          </a:stretch>
+        </p:blipFill>
+        <p:spPr>
+          <a:xfrm>
+            <a:off x="610561" y="1112563"/>
+            <a:ext cx="5195839" cy="2844871"/>
+          </a:xfrm>
+          <a:prstGeom prst="rect">
+            <a:avLst/>
+          </a:prstGeom>
+        </p:spPr>
+      </p:pic>
+      <p:pic>
+        <p:nvPicPr>
+          <p:cNvPr id="10" name="Picture 9">
+            <a:extLst>
+              <a:ext uri="{FF2B5EF4-FFF2-40B4-BE49-F238E27FC236}">
+                <a16:creationId xmlns:a16="http://schemas.microsoft.com/office/drawing/2014/main" id="{558F0E05-B8CA-542F-C870-5E884BDD3006}"/>
+              </a:ext>
+            </a:extLst>
+          </p:cNvPr>
+          <p:cNvPicPr>
+            <a:picLocks noChangeAspect="1"/>
+          </p:cNvPicPr>
+          <p:nvPr/>
+        </p:nvPicPr>
+        <p:blipFill>
+          <a:blip r:embed="rId5"/>
+          <a:stretch>
+            <a:fillRect/>
+          </a:stretch>
+        </p:blipFill>
+        <p:spPr>
+          <a:xfrm>
+            <a:off x="3275725" y="5267563"/>
+            <a:ext cx="1552495" cy="782265"/>
+          </a:xfrm>
+          <a:prstGeom prst="rect">
+            <a:avLst/>
+          </a:prstGeom>
+        </p:spPr>
+      </p:pic>
     </p:spTree>
     <p:extLst>
       <p:ext uri="{BB962C8B-B14F-4D97-AF65-F5344CB8AC3E}">
@@ -5856,7 +6679,7 @@
           <a:lstStyle/>
           <a:p>
             <a:r>
-              <a:rPr lang="en-US"/>
+              <a:rPr lang="es-ES" noProof="0" dirty="0"/>
               <a:t>LAB 3.0. CIRCUITS &amp; COMPACT MODELS</a:t>
             </a:r>
           </a:p>
@@ -5884,11 +6707,11 @@
           <a:lstStyle/>
           <a:p>
             <a:fld id="{C2F52289-4012-4053-9770-FE82CEB9514F}" type="slidenum">
-              <a:rPr lang="en-US" smtClean="0"/>
+              <a:rPr lang="es-ES" noProof="0" smtClean="0"/>
               <a:pPr/>
               <a:t>5</a:t>
             </a:fld>
-            <a:endParaRPr lang="en-US" dirty="0"/>
+            <a:endParaRPr lang="es-ES" noProof="0" dirty="0"/>
           </a:p>
         </p:txBody>
       </p:sp>
@@ -5931,40 +6754,43 @@
           <a:p>
             <a:pPr algn="just"/>
             <a:r>
-              <a:rPr lang="en-US" sz="1200" dirty="0">
-                <a:latin typeface="Arial" panose="020B0604020202020204" pitchFamily="34" charset="0"/>
-                <a:cs typeface="Arial" panose="020B0604020202020204" pitchFamily="34" charset="0"/>
-              </a:rPr>
-              <a:t>Comment results:</a:t>
+              <a:rPr lang="es-ES" sz="1200" noProof="0" dirty="0">
+                <a:latin typeface="Arial" panose="020B0604020202020204" pitchFamily="34" charset="0"/>
+                <a:cs typeface="Arial" panose="020B0604020202020204" pitchFamily="34" charset="0"/>
+              </a:rPr>
+              <a:t>Podemos ver que efectivamente se tiene un FSR de 2 nm, aunque se ha tenido que acortar el Arango visible de la gráfica para poder observarlo correctamente.</a:t>
             </a:r>
           </a:p>
           <a:p>
             <a:pPr algn="just"/>
-            <a:endParaRPr lang="en-US" sz="1200" dirty="0">
+            <a:r>
+              <a:rPr lang="es-ES" sz="1200" noProof="0" dirty="0">
+                <a:latin typeface="Arial" panose="020B0604020202020204" pitchFamily="34" charset="0"/>
+                <a:cs typeface="Arial" panose="020B0604020202020204" pitchFamily="34" charset="0"/>
+              </a:rPr>
+              <a:t>En la gráfica también podemos ver el cumplimiento de la conservación de energía como hemos analizado anteriormente.</a:t>
+            </a:r>
+          </a:p>
+          <a:p>
+            <a:pPr algn="just"/>
+            <a:r>
+              <a:rPr lang="es-ES" sz="1200" noProof="0" dirty="0">
+                <a:latin typeface="Arial" panose="020B0604020202020204" pitchFamily="34" charset="0"/>
+                <a:cs typeface="Arial" panose="020B0604020202020204" pitchFamily="34" charset="0"/>
+              </a:rPr>
+              <a:t> </a:t>
+            </a:r>
+          </a:p>
+          <a:p>
+            <a:pPr algn="just"/>
+            <a:endParaRPr lang="es-ES" sz="1200" noProof="0" dirty="0">
               <a:latin typeface="Arial" panose="020B0604020202020204" pitchFamily="34" charset="0"/>
               <a:cs typeface="Arial" panose="020B0604020202020204" pitchFamily="34" charset="0"/>
             </a:endParaRPr>
           </a:p>
           <a:p>
             <a:pPr algn="just"/>
-            <a:r>
-              <a:rPr lang="en-US" sz="1200" dirty="0">
-                <a:latin typeface="Arial" panose="020B0604020202020204" pitchFamily="34" charset="0"/>
-                <a:cs typeface="Arial" panose="020B0604020202020204" pitchFamily="34" charset="0"/>
-              </a:rPr>
-              <a:t> </a:t>
-            </a:r>
-          </a:p>
-          <a:p>
-            <a:pPr algn="just"/>
-            <a:endParaRPr lang="en-US" sz="1200" dirty="0">
-              <a:latin typeface="Arial" panose="020B0604020202020204" pitchFamily="34" charset="0"/>
-              <a:cs typeface="Arial" panose="020B0604020202020204" pitchFamily="34" charset="0"/>
-            </a:endParaRPr>
-          </a:p>
-          <a:p>
-            <a:pPr algn="just"/>
-            <a:endParaRPr lang="en-US" sz="1200" dirty="0">
+            <a:endParaRPr lang="es-ES" sz="1200" noProof="0" dirty="0">
               <a:latin typeface="Arial" panose="020B0604020202020204" pitchFamily="34" charset="0"/>
               <a:cs typeface="Arial" panose="020B0604020202020204" pitchFamily="34" charset="0"/>
             </a:endParaRPr>
@@ -6019,7 +6845,7 @@
           <a:lstStyle/>
           <a:p>
             <a:pPr algn="ctr"/>
-            <a:endParaRPr lang="en-US"/>
+            <a:endParaRPr lang="es-ES" noProof="0" dirty="0"/>
           </a:p>
         </p:txBody>
       </p:sp>
@@ -6053,25 +6879,38 @@
           <a:p>
             <a:pPr algn="ctr"/>
             <a:r>
-              <a:rPr lang="es-ES" sz="2000" dirty="0"/>
+              <a:rPr lang="es-ES" sz="2000" noProof="0" dirty="0"/>
               <a:t>MZI transfer </a:t>
             </a:r>
             <a:r>
-              <a:rPr lang="es-ES" sz="2000" dirty="0" err="1"/>
+              <a:rPr lang="es-ES" sz="2000" noProof="0" dirty="0" err="1"/>
               <a:t>functions</a:t>
             </a:r>
-            <a:endParaRPr lang="en-US" sz="2000" dirty="0"/>
+            <a:endParaRPr lang="es-ES" sz="2000" noProof="0" dirty="0"/>
           </a:p>
           <a:p>
             <a:pPr algn="ctr"/>
-            <a:endParaRPr lang="en-US" sz="2000" dirty="0"/>
+            <a:endParaRPr lang="es-ES" sz="2000" noProof="0" dirty="0"/>
           </a:p>
           <a:p>
             <a:pPr algn="ctr"/>
             <a:r>
-              <a:rPr lang="en-US" sz="2000" dirty="0"/>
-              <a:t>Paste plot here</a:t>
-            </a:r>
+              <a:rPr lang="es-ES" sz="2000" noProof="0" dirty="0"/>
+              <a:t>Paste </a:t>
+            </a:r>
+            <a:r>
+              <a:rPr lang="es-ES" sz="2000" noProof="0" dirty="0" err="1"/>
+              <a:t>plot</a:t>
+            </a:r>
+            <a:r>
+              <a:rPr lang="es-ES" sz="2000" noProof="0" dirty="0"/>
+              <a:t> </a:t>
+            </a:r>
+            <a:r>
+              <a:rPr lang="es-ES" sz="2000" noProof="0" dirty="0" err="1"/>
+              <a:t>here</a:t>
+            </a:r>
+            <a:endParaRPr lang="es-ES" sz="2000" noProof="0" dirty="0"/>
           </a:p>
         </p:txBody>
       </p:sp>
@@ -6128,16 +6967,26 @@
           <a:p>
             <a:pPr algn="just"/>
             <a:r>
-              <a:rPr lang="en-US" b="1" dirty="0">
+              <a:rPr lang="es-ES" b="1" noProof="0" dirty="0" err="1">
                 <a:solidFill>
                   <a:schemeClr val="tx1"/>
                 </a:solidFill>
                 <a:latin typeface="Arial" panose="020B0604020202020204" pitchFamily="34" charset="0"/>
                 <a:cs typeface="Arial" panose="020B0604020202020204" pitchFamily="34" charset="0"/>
               </a:rPr>
-              <a:t>Hints:</a:t>
-            </a:r>
-            <a:endParaRPr lang="en-US" dirty="0">
+              <a:t>Hints</a:t>
+            </a:r>
+            <a:r>
+              <a:rPr lang="es-ES" b="1" noProof="0" dirty="0">
+                <a:solidFill>
+                  <a:schemeClr val="tx1"/>
+                </a:solidFill>
+                <a:latin typeface="Arial" panose="020B0604020202020204" pitchFamily="34" charset="0"/>
+                <a:cs typeface="Arial" panose="020B0604020202020204" pitchFamily="34" charset="0"/>
+              </a:rPr>
+              <a:t>:</a:t>
+            </a:r>
+            <a:endParaRPr lang="es-ES" noProof="0" dirty="0">
               <a:solidFill>
                 <a:schemeClr val="tx1"/>
               </a:solidFill>
@@ -6148,7 +6997,7 @@
           <a:p>
             <a:pPr algn="just"/>
             <a:r>
-              <a:rPr lang="en-US" dirty="0" err="1">
+              <a:rPr lang="es-ES" noProof="0" dirty="0" err="1">
                 <a:solidFill>
                   <a:schemeClr val="tx1"/>
                 </a:solidFill>
@@ -6159,7 +7008,7 @@
               <a:t>wvl</a:t>
             </a:r>
             <a:r>
-              <a:rPr lang="en-US" dirty="0">
+              <a:rPr lang="es-ES" noProof="0" dirty="0">
                 <a:solidFill>
                   <a:schemeClr val="tx1"/>
                 </a:solidFill>
@@ -6173,7 +7022,7 @@
           <a:p>
             <a:pPr algn="just"/>
             <a:r>
-              <a:rPr lang="en-US" dirty="0">
+              <a:rPr lang="es-ES" noProof="0" dirty="0" err="1">
                 <a:solidFill>
                   <a:schemeClr val="tx1"/>
                 </a:solidFill>
@@ -6181,10 +7030,10 @@
                 <a:cs typeface="Arial" panose="020B0604020202020204" pitchFamily="34" charset="0"/>
                 <a:sym typeface="Wingdings" pitchFamily="2" charset="2"/>
               </a:rPr>
-              <a:t>dL = ? µm </a:t>
-            </a:r>
-            <a:r>
-              <a:rPr lang="en-US" b="1" dirty="0">
+              <a:t>dL</a:t>
+            </a:r>
+            <a:r>
+              <a:rPr lang="es-ES" noProof="0" dirty="0">
                 <a:solidFill>
                   <a:schemeClr val="tx1"/>
                 </a:solidFill>
@@ -6192,13 +7041,57 @@
                 <a:cs typeface="Arial" panose="020B0604020202020204" pitchFamily="34" charset="0"/>
                 <a:sym typeface="Wingdings" pitchFamily="2" charset="2"/>
               </a:rPr>
-              <a:t>calculate for FSR = 2 nm </a:t>
+              <a:t> = ? µm </a:t>
+            </a:r>
+            <a:r>
+              <a:rPr lang="es-ES" b="1" noProof="0" dirty="0" err="1">
+                <a:solidFill>
+                  <a:schemeClr val="tx1"/>
+                </a:solidFill>
+                <a:latin typeface="Arial" panose="020B0604020202020204" pitchFamily="34" charset="0"/>
+                <a:cs typeface="Arial" panose="020B0604020202020204" pitchFamily="34" charset="0"/>
+                <a:sym typeface="Wingdings" pitchFamily="2" charset="2"/>
+              </a:rPr>
+              <a:t>calculate</a:t>
+            </a:r>
+            <a:r>
+              <a:rPr lang="es-ES" b="1" noProof="0" dirty="0">
+                <a:solidFill>
+                  <a:schemeClr val="tx1"/>
+                </a:solidFill>
+                <a:latin typeface="Arial" panose="020B0604020202020204" pitchFamily="34" charset="0"/>
+                <a:cs typeface="Arial" panose="020B0604020202020204" pitchFamily="34" charset="0"/>
+                <a:sym typeface="Wingdings" pitchFamily="2" charset="2"/>
+              </a:rPr>
+              <a:t> </a:t>
+            </a:r>
+            <a:r>
+              <a:rPr lang="es-ES" b="1" noProof="0" dirty="0" err="1">
+                <a:solidFill>
+                  <a:schemeClr val="tx1"/>
+                </a:solidFill>
+                <a:latin typeface="Arial" panose="020B0604020202020204" pitchFamily="34" charset="0"/>
+                <a:cs typeface="Arial" panose="020B0604020202020204" pitchFamily="34" charset="0"/>
+                <a:sym typeface="Wingdings" pitchFamily="2" charset="2"/>
+              </a:rPr>
+              <a:t>for</a:t>
+            </a:r>
+            <a:r>
+              <a:rPr lang="es-ES" b="1" noProof="0" dirty="0">
+                <a:solidFill>
+                  <a:schemeClr val="tx1"/>
+                </a:solidFill>
+                <a:latin typeface="Arial" panose="020B0604020202020204" pitchFamily="34" charset="0"/>
+                <a:cs typeface="Arial" panose="020B0604020202020204" pitchFamily="34" charset="0"/>
+                <a:sym typeface="Wingdings" pitchFamily="2" charset="2"/>
+              </a:rPr>
+              <a:t> FSR = 2 nm </a:t>
             </a:r>
           </a:p>
           <a:p>
             <a:pPr algn="just"/>
             <a:r>
-              <a:rPr lang="en-US" dirty="0">
+              <a:rPr lang="es-ES" noProof="0" dirty="0">
                 <a:solidFill>
                   <a:schemeClr val="tx1"/>
                 </a:solidFill>
@@ -6206,10 +7099,10 @@
                 <a:cs typeface="Arial" panose="020B0604020202020204" pitchFamily="34" charset="0"/>
                 <a:sym typeface="Wingdings" pitchFamily="2" charset="2"/>
               </a:rPr>
-              <a:t>Ka = </a:t>
-            </a:r>
-            <a:r>
-              <a:rPr lang="en-US" dirty="0" err="1">
+              <a:t>Ka = Kb = 0.5 </a:t>
+            </a:r>
+            <a:r>
+              <a:rPr lang="es-ES" noProof="0" dirty="0" err="1">
                 <a:solidFill>
                   <a:schemeClr val="tx1"/>
                 </a:solidFill>
@@ -6217,10 +7110,10 @@
                 <a:cs typeface="Arial" panose="020B0604020202020204" pitchFamily="34" charset="0"/>
                 <a:sym typeface="Wingdings" pitchFamily="2" charset="2"/>
               </a:rPr>
-              <a:t>Kb</a:t>
-            </a:r>
-            <a:r>
-              <a:rPr lang="en-US" dirty="0">
+              <a:t>for</a:t>
+            </a:r>
+            <a:r>
+              <a:rPr lang="es-ES" noProof="0" dirty="0">
                 <a:solidFill>
                   <a:schemeClr val="tx1"/>
                 </a:solidFill>
@@ -6228,10 +7121,10 @@
                 <a:cs typeface="Arial" panose="020B0604020202020204" pitchFamily="34" charset="0"/>
                 <a:sym typeface="Wingdings" pitchFamily="2" charset="2"/>
               </a:rPr>
-              <a:t> = 0.5 for all </a:t>
-            </a:r>
-            <a:r>
-              <a:rPr lang="en-US" dirty="0" err="1">
+              <a:t> </a:t>
+            </a:r>
+            <a:r>
+              <a:rPr lang="es-ES" noProof="0" dirty="0" err="1">
                 <a:solidFill>
                   <a:schemeClr val="tx1"/>
                 </a:solidFill>
@@ -6239,9 +7132,31 @@
                 <a:cs typeface="Arial" panose="020B0604020202020204" pitchFamily="34" charset="0"/>
                 <a:sym typeface="Wingdings" pitchFamily="2" charset="2"/>
               </a:rPr>
+              <a:t>all</a:t>
+            </a:r>
+            <a:r>
+              <a:rPr lang="es-ES" noProof="0" dirty="0">
+                <a:solidFill>
+                  <a:schemeClr val="tx1"/>
+                </a:solidFill>
+                <a:latin typeface="Arial" panose="020B0604020202020204" pitchFamily="34" charset="0"/>
+                <a:cs typeface="Arial" panose="020B0604020202020204" pitchFamily="34" charset="0"/>
+                <a:sym typeface="Wingdings" pitchFamily="2" charset="2"/>
+              </a:rPr>
+              <a:t> </a:t>
+            </a:r>
+            <a:r>
+              <a:rPr lang="es-ES" noProof="0" dirty="0" err="1">
+                <a:solidFill>
+                  <a:schemeClr val="tx1"/>
+                </a:solidFill>
+                <a:latin typeface="Arial" panose="020B0604020202020204" pitchFamily="34" charset="0"/>
+                <a:cs typeface="Arial" panose="020B0604020202020204" pitchFamily="34" charset="0"/>
+                <a:sym typeface="Wingdings" pitchFamily="2" charset="2"/>
+              </a:rPr>
               <a:t>wvl</a:t>
             </a:r>
-            <a:endParaRPr lang="en-US" dirty="0">
+            <a:endParaRPr lang="es-ES" noProof="0" dirty="0">
               <a:solidFill>
                 <a:schemeClr val="tx1"/>
               </a:solidFill>
@@ -6252,7 +7167,7 @@
           </a:p>
           <a:p>
             <a:pPr algn="just"/>
-            <a:endParaRPr lang="en-US" sz="1200" dirty="0">
+            <a:endParaRPr lang="es-ES" sz="1200" noProof="0" dirty="0">
               <a:solidFill>
                 <a:schemeClr val="tx1"/>
               </a:solidFill>
@@ -6262,7 +7177,7 @@
           </a:p>
           <a:p>
             <a:pPr algn="just"/>
-            <a:endParaRPr lang="en-US" sz="1200" dirty="0">
+            <a:endParaRPr lang="es-ES" sz="1200" noProof="0" dirty="0">
               <a:solidFill>
                 <a:schemeClr val="tx1"/>
               </a:solidFill>
@@ -6320,54 +7235,7 @@
           <a:lstStyle/>
           <a:p>
             <a:pPr algn="ctr"/>
-            <a:endParaRPr lang="en-US"/>
-          </a:p>
-        </p:txBody>
-      </p:sp>
-      <p:sp>
-        <p:nvSpPr>
-          <p:cNvPr id="15" name="CuadroTexto 14">
-            <a:extLst>
-              <a:ext uri="{FF2B5EF4-FFF2-40B4-BE49-F238E27FC236}">
-                <a16:creationId xmlns:a16="http://schemas.microsoft.com/office/drawing/2014/main" id="{54CF28B4-1346-F41D-2CD8-EA104ABBFB98}"/>
-              </a:ext>
-            </a:extLst>
-          </p:cNvPr>
-          <p:cNvSpPr txBox="1"/>
-          <p:nvPr/>
-        </p:nvSpPr>
-        <p:spPr>
-          <a:xfrm>
-            <a:off x="1017546" y="2478160"/>
-            <a:ext cx="2996974" cy="1015663"/>
-          </a:xfrm>
-          <a:prstGeom prst="rect">
-            <a:avLst/>
-          </a:prstGeom>
-          <a:noFill/>
-        </p:spPr>
-        <p:txBody>
-          <a:bodyPr wrap="none" rtlCol="0">
-            <a:spAutoFit/>
-          </a:bodyPr>
-          <a:lstStyle/>
-          <a:p>
-            <a:pPr algn="ctr"/>
-            <a:r>
-              <a:rPr lang="en-US" sz="2000" dirty="0"/>
-              <a:t>Your design justification</a:t>
-            </a:r>
-          </a:p>
-          <a:p>
-            <a:pPr algn="ctr"/>
-            <a:endParaRPr lang="en-US" sz="2000" dirty="0"/>
-          </a:p>
-          <a:p>
-            <a:pPr algn="ctr"/>
-            <a:r>
-              <a:rPr lang="en-US" sz="2000" dirty="0"/>
-              <a:t>Write equations / numbers</a:t>
-            </a:r>
+            <a:endParaRPr lang="es-ES" noProof="0" dirty="0"/>
           </a:p>
         </p:txBody>
       </p:sp>
@@ -6453,9 +7321,26 @@
               </a:spcBef>
             </a:pPr>
             <a:r>
-              <a:rPr lang="en-US" sz="2500" kern="0" dirty="0"/>
-              <a:t>Learning outcome #2 – MZI Design</a:t>
-            </a:r>
+              <a:rPr lang="es-ES" sz="2500" kern="0" noProof="0" dirty="0" err="1"/>
+              <a:t>Learning</a:t>
+            </a:r>
+            <a:r>
+              <a:rPr lang="es-ES" sz="2500" kern="0" noProof="0" dirty="0"/>
+              <a:t> </a:t>
+            </a:r>
+            <a:r>
+              <a:rPr lang="es-ES" sz="2500" kern="0" noProof="0" dirty="0" err="1"/>
+              <a:t>outcome</a:t>
+            </a:r>
+            <a:r>
+              <a:rPr lang="es-ES" sz="2500" kern="0" noProof="0" dirty="0"/>
+              <a:t> #2 – MZI </a:t>
+            </a:r>
+            <a:r>
+              <a:rPr lang="es-ES" sz="2500" kern="0" noProof="0" dirty="0" err="1"/>
+              <a:t>Design</a:t>
+            </a:r>
+            <a:endParaRPr lang="es-ES" sz="2500" kern="0" noProof="0" dirty="0"/>
           </a:p>
           <a:p>
             <a:pPr marL="12700">
@@ -6464,25 +7349,210 @@
               </a:spcBef>
             </a:pPr>
             <a:r>
-              <a:rPr lang="en-US" b="0" kern="0" spc="-5" dirty="0">
+              <a:rPr lang="es-ES" b="0" kern="0" spc="-5" noProof="0" dirty="0" err="1">
                 <a:latin typeface="+mj-lt"/>
                 <a:cs typeface="Lucida Sans"/>
               </a:rPr>
-              <a:t>Design a MZI with FSR = 10 nm at 1550 nm</a:t>
-            </a:r>
-            <a:br>
-              <a:rPr lang="en-US" b="0" kern="0" spc="-5" dirty="0">
+              <a:t>Design</a:t>
+            </a:r>
+            <a:r>
+              <a:rPr lang="es-ES" b="0" kern="0" spc="-5" noProof="0" dirty="0">
                 <a:latin typeface="+mj-lt"/>
                 <a:cs typeface="Lucida Sans"/>
               </a:rPr>
+              <a:t> a MZI </a:t>
+            </a:r>
+            <a:r>
+              <a:rPr lang="es-ES" b="0" kern="0" spc="-5" noProof="0" dirty="0" err="1">
+                <a:latin typeface="+mj-lt"/>
+                <a:cs typeface="Lucida Sans"/>
+              </a:rPr>
+              <a:t>with</a:t>
+            </a:r>
+            <a:r>
+              <a:rPr lang="es-ES" b="0" kern="0" spc="-5" noProof="0" dirty="0">
+                <a:latin typeface="+mj-lt"/>
+                <a:cs typeface="Lucida Sans"/>
+              </a:rPr>
+              <a:t> FSR = 10 nm at 1550 nm</a:t>
+            </a:r>
+            <a:br>
+              <a:rPr lang="es-ES" b="0" kern="0" spc="-5" noProof="0" dirty="0">
+                <a:latin typeface="+mj-lt"/>
+                <a:cs typeface="Lucida Sans"/>
+              </a:rPr>
             </a:br>
-            <a:endParaRPr lang="en-US" b="0" kern="0" dirty="0">
+            <a:endParaRPr lang="es-ES" b="0" kern="0" noProof="0" dirty="0">
               <a:latin typeface="+mj-lt"/>
               <a:cs typeface="Lucida Sans"/>
             </a:endParaRPr>
           </a:p>
         </p:txBody>
       </p:sp>
+      <p:pic>
+        <p:nvPicPr>
+          <p:cNvPr id="9" name="Picture 8">
+            <a:extLst>
+              <a:ext uri="{FF2B5EF4-FFF2-40B4-BE49-F238E27FC236}">
+                <a16:creationId xmlns:a16="http://schemas.microsoft.com/office/drawing/2014/main" id="{6D3B50AF-A251-752D-AAE6-ADC98017F537}"/>
+              </a:ext>
+            </a:extLst>
+          </p:cNvPr>
+          <p:cNvPicPr>
+            <a:picLocks noChangeAspect="1"/>
+          </p:cNvPicPr>
+          <p:nvPr/>
+        </p:nvPicPr>
+        <p:blipFill>
+          <a:blip r:embed="rId3"/>
+          <a:stretch>
+            <a:fillRect/>
+          </a:stretch>
+        </p:blipFill>
+        <p:spPr>
+          <a:xfrm>
+            <a:off x="2709367" y="1506235"/>
+            <a:ext cx="1154787" cy="675973"/>
+          </a:xfrm>
+          <a:prstGeom prst="rect">
+            <a:avLst/>
+          </a:prstGeom>
+        </p:spPr>
+      </p:pic>
+      <p:sp>
+        <p:nvSpPr>
+          <p:cNvPr id="16" name="TextBox 15">
+            <a:extLst>
+              <a:ext uri="{FF2B5EF4-FFF2-40B4-BE49-F238E27FC236}">
+                <a16:creationId xmlns:a16="http://schemas.microsoft.com/office/drawing/2014/main" id="{3E645E56-B290-AF85-62BC-79F0E2B3138B}"/>
+              </a:ext>
+            </a:extLst>
+          </p:cNvPr>
+          <p:cNvSpPr txBox="1"/>
+          <p:nvPr/>
+        </p:nvSpPr>
+        <p:spPr>
+          <a:xfrm>
+            <a:off x="685800" y="1654970"/>
+            <a:ext cx="2023567" cy="307777"/>
+          </a:xfrm>
+          <a:prstGeom prst="rect">
+            <a:avLst/>
+          </a:prstGeom>
+          <a:noFill/>
+        </p:spPr>
+        <p:txBody>
+          <a:bodyPr wrap="none" rtlCol="0">
+            <a:spAutoFit/>
+          </a:bodyPr>
+          <a:lstStyle/>
+          <a:p>
+            <a:r>
+              <a:rPr lang="es-ES" sz="1400" noProof="0" dirty="0"/>
+              <a:t>La ecuación a utilizar es:  </a:t>
+            </a:r>
+          </a:p>
+        </p:txBody>
+      </p:sp>
+      <p:sp>
+        <p:nvSpPr>
+          <p:cNvPr id="17" name="TextBox 16">
+            <a:extLst>
+              <a:ext uri="{FF2B5EF4-FFF2-40B4-BE49-F238E27FC236}">
+                <a16:creationId xmlns:a16="http://schemas.microsoft.com/office/drawing/2014/main" id="{85F888ED-1D04-4119-B1AC-79160A6F2D73}"/>
+              </a:ext>
+            </a:extLst>
+          </p:cNvPr>
+          <p:cNvSpPr txBox="1"/>
+          <p:nvPr/>
+        </p:nvSpPr>
+        <p:spPr>
+          <a:xfrm>
+            <a:off x="609600" y="2330943"/>
+            <a:ext cx="3886641" cy="1169551"/>
+          </a:xfrm>
+          <a:prstGeom prst="rect">
+            <a:avLst/>
+          </a:prstGeom>
+          <a:noFill/>
+        </p:spPr>
+        <p:txBody>
+          <a:bodyPr wrap="none" rtlCol="0">
+            <a:spAutoFit/>
+          </a:bodyPr>
+          <a:lstStyle/>
+          <a:p>
+            <a:r>
+              <a:rPr lang="es-ES" sz="1400" noProof="0" dirty="0"/>
+              <a:t>Donde la longitud de onda tomamos 1550 nm. </a:t>
+            </a:r>
+          </a:p>
+          <a:p>
+            <a:r>
+              <a:rPr lang="es-ES" sz="1400" noProof="0" dirty="0"/>
+              <a:t>Se nos pide que el FSR sea 2 nm, y en el modelo de</a:t>
+            </a:r>
+          </a:p>
+          <a:p>
+            <a:r>
+              <a:rPr lang="es-ES" sz="1400" noProof="0" dirty="0"/>
+              <a:t>las guías se indica que el índice de grupo es 2.</a:t>
+            </a:r>
+          </a:p>
+          <a:p>
+            <a:endParaRPr lang="es-ES" sz="1400" noProof="0" dirty="0"/>
+          </a:p>
+          <a:p>
+            <a:r>
+              <a:rPr lang="es-ES" sz="1400" noProof="0" dirty="0"/>
+              <a:t>Con esto obtenemos un </a:t>
+            </a:r>
+            <a:r>
+              <a:rPr lang="es-ES" sz="1400" noProof="0" dirty="0" err="1"/>
+              <a:t>dL</a:t>
+            </a:r>
+            <a:r>
+              <a:rPr lang="es-ES" sz="1400" noProof="0" dirty="0"/>
+              <a:t> de 600.625 </a:t>
+            </a:r>
+            <a:r>
+              <a:rPr lang="es-ES" sz="1400" noProof="0" dirty="0" err="1"/>
+              <a:t>um</a:t>
+            </a:r>
+            <a:endParaRPr lang="es-ES" sz="1400" noProof="0" dirty="0"/>
+          </a:p>
+        </p:txBody>
+      </p:sp>
+      <p:pic>
+        <p:nvPicPr>
+          <p:cNvPr id="19" name="Picture 18">
+            <a:extLst>
+              <a:ext uri="{FF2B5EF4-FFF2-40B4-BE49-F238E27FC236}">
+                <a16:creationId xmlns:a16="http://schemas.microsoft.com/office/drawing/2014/main" id="{1BB6FBF4-B98E-470E-8671-5DC4E9EB60AD}"/>
+              </a:ext>
+            </a:extLst>
+          </p:cNvPr>
+          <p:cNvPicPr>
+            <a:picLocks noChangeAspect="1"/>
+          </p:cNvPicPr>
+          <p:nvPr/>
+        </p:nvPicPr>
+        <p:blipFill>
+          <a:blip r:embed="rId4"/>
+          <a:stretch>
+            <a:fillRect/>
+          </a:stretch>
+        </p:blipFill>
+        <p:spPr>
+          <a:xfrm>
+            <a:off x="4490698" y="1959015"/>
+            <a:ext cx="4076473" cy="2231985"/>
+          </a:xfrm>
+          <a:prstGeom prst="rect">
+            <a:avLst/>
+          </a:prstGeom>
+        </p:spPr>
+      </p:pic>
     </p:spTree>
     <p:extLst>
       <p:ext uri="{BB962C8B-B14F-4D97-AF65-F5344CB8AC3E}">
@@ -6541,7 +7611,7 @@
           <a:lstStyle/>
           <a:p>
             <a:r>
-              <a:rPr lang="en-US"/>
+              <a:rPr lang="es-ES" noProof="0" dirty="0"/>
               <a:t>LAB 3.0. CIRCUITS &amp; COMPACT MODELS</a:t>
             </a:r>
           </a:p>
@@ -6569,11 +7639,11 @@
           <a:lstStyle/>
           <a:p>
             <a:fld id="{C2F52289-4012-4053-9770-FE82CEB9514F}" type="slidenum">
-              <a:rPr lang="en-US" smtClean="0"/>
+              <a:rPr lang="es-ES" noProof="0" smtClean="0"/>
               <a:pPr/>
               <a:t>6</a:t>
             </a:fld>
-            <a:endParaRPr lang="en-US" dirty="0"/>
+            <a:endParaRPr lang="es-ES" noProof="0" dirty="0"/>
           </a:p>
         </p:txBody>
       </p:sp>
@@ -6659,9 +7729,42 @@
               </a:spcBef>
             </a:pPr>
             <a:r>
-              <a:rPr lang="en-US" sz="2500" kern="0" dirty="0"/>
-              <a:t>Learning outcome #3 – Delay imbalance with loss</a:t>
-            </a:r>
+              <a:rPr lang="es-ES" sz="2500" kern="0" noProof="0" dirty="0" err="1"/>
+              <a:t>Learning</a:t>
+            </a:r>
+            <a:r>
+              <a:rPr lang="es-ES" sz="2500" kern="0" noProof="0" dirty="0"/>
+              <a:t> </a:t>
+            </a:r>
+            <a:r>
+              <a:rPr lang="es-ES" sz="2500" kern="0" noProof="0" dirty="0" err="1"/>
+              <a:t>outcome</a:t>
+            </a:r>
+            <a:r>
+              <a:rPr lang="es-ES" sz="2500" kern="0" noProof="0" dirty="0"/>
+              <a:t> #3 – Delay </a:t>
+            </a:r>
+            <a:r>
+              <a:rPr lang="es-ES" sz="2500" kern="0" noProof="0" dirty="0" err="1"/>
+              <a:t>imbalance</a:t>
+            </a:r>
+            <a:r>
+              <a:rPr lang="es-ES" sz="2500" kern="0" noProof="0" dirty="0"/>
+              <a:t> </a:t>
+            </a:r>
+            <a:r>
+              <a:rPr lang="es-ES" sz="2500" kern="0" noProof="0" dirty="0" err="1"/>
+              <a:t>with</a:t>
+            </a:r>
+            <a:r>
+              <a:rPr lang="es-ES" sz="2500" kern="0" noProof="0" dirty="0"/>
+              <a:t> </a:t>
+            </a:r>
+            <a:r>
+              <a:rPr lang="es-ES" sz="2500" kern="0" noProof="0" dirty="0" err="1"/>
+              <a:t>loss</a:t>
+            </a:r>
+            <a:endParaRPr lang="es-ES" sz="2500" kern="0" noProof="0" dirty="0"/>
           </a:p>
           <a:p>
             <a:pPr marL="12700">
@@ -6670,13 +7773,27 @@
               </a:spcBef>
             </a:pPr>
             <a:r>
-              <a:rPr lang="en-US" b="0" kern="0" spc="-5" dirty="0">
+              <a:rPr lang="es-ES" b="0" kern="0" spc="-5" noProof="0" dirty="0" err="1">
                 <a:latin typeface="+mj-lt"/>
                 <a:cs typeface="Lucida Sans"/>
               </a:rPr>
-              <a:t>Fringe visibility</a:t>
-            </a:r>
-            <a:endParaRPr lang="en-US" b="0" kern="0" dirty="0">
+              <a:t>Fringe</a:t>
+            </a:r>
+            <a:r>
+              <a:rPr lang="es-ES" b="0" kern="0" spc="-5" noProof="0" dirty="0">
+                <a:latin typeface="+mj-lt"/>
+                <a:cs typeface="Lucida Sans"/>
+              </a:rPr>
+              <a:t> </a:t>
+            </a:r>
+            <a:r>
+              <a:rPr lang="es-ES" b="0" kern="0" spc="-5" noProof="0" dirty="0" err="1">
+                <a:latin typeface="+mj-lt"/>
+                <a:cs typeface="Lucida Sans"/>
+              </a:rPr>
+              <a:t>visibility</a:t>
+            </a:r>
+            <a:endParaRPr lang="es-ES" b="0" kern="0" noProof="0" dirty="0">
               <a:latin typeface="+mj-lt"/>
               <a:cs typeface="Lucida Sans"/>
             </a:endParaRPr>
@@ -6697,8 +7814,8 @@
         </p:nvSpPr>
         <p:spPr>
           <a:xfrm>
-            <a:off x="609441" y="4860334"/>
-            <a:ext cx="11199971" cy="1200329"/>
+            <a:off x="609600" y="4534860"/>
+            <a:ext cx="11199971" cy="1938992"/>
           </a:xfrm>
           <a:prstGeom prst="rect">
             <a:avLst/>
@@ -6722,43 +7839,60 @@
           <a:p>
             <a:pPr algn="just"/>
             <a:r>
-              <a:rPr lang="en-US" sz="1200" dirty="0">
-                <a:latin typeface="Arial" panose="020B0604020202020204" pitchFamily="34" charset="0"/>
-                <a:cs typeface="Arial" panose="020B0604020202020204" pitchFamily="34" charset="0"/>
-              </a:rPr>
-              <a:t>Comment results: describe the transfer function, is there any interference pattern in case 1? Is there any interference pattern in case 2? Explain the difference between both cases. Compare the Extinction Ratio of both variations. </a:t>
+              <a:rPr lang="es-ES" sz="1200" noProof="0" dirty="0">
+                <a:latin typeface="Arial" panose="020B0604020202020204" pitchFamily="34" charset="0"/>
+                <a:cs typeface="Arial" panose="020B0604020202020204" pitchFamily="34" charset="0"/>
+              </a:rPr>
+              <a:t>En la gráfica con Ka=Kb=0.5, podemos observar que se está en el intervalo entre -11.5 dB y -14 dB, mientras que en la de Ka=0.1 y Kb=0.5, se está entre -7.4 dB y -8.2 dB, esto es muestra de que la interferencia no llega a ser ni destructiva ni constructiva, sino que se queda a la mitad, provocando pérdidas de inserción. También podemos deducir que existen unas pérdidas de 22.38 dB.</a:t>
             </a:r>
           </a:p>
           <a:p>
             <a:pPr algn="just"/>
             <a:r>
-              <a:rPr lang="en-US" sz="1200" dirty="0">
-                <a:latin typeface="Arial" panose="020B0604020202020204" pitchFamily="34" charset="0"/>
-                <a:cs typeface="Arial" panose="020B0604020202020204" pitchFamily="34" charset="0"/>
-              </a:rPr>
-              <a:t>Extra: What coupling coefficient will you select for the input coupler if you want to match the losses of the longer arm? Simulate and extract the ER.</a:t>
+              <a:rPr lang="es-ES" sz="1200" dirty="0">
+                <a:latin typeface="Arial" panose="020B0604020202020204" pitchFamily="34" charset="0"/>
+                <a:cs typeface="Arial" panose="020B0604020202020204" pitchFamily="34" charset="0"/>
+              </a:rPr>
+              <a:t>En las dos gráficas podemos ver patrones de interferencia, pero son tan pequeños que apenas se pueden ver.</a:t>
             </a:r>
           </a:p>
           <a:p>
             <a:pPr algn="just"/>
-            <a:endParaRPr lang="en-US" sz="1200" dirty="0">
+            <a:r>
+              <a:rPr lang="es-ES" sz="1200" noProof="0" dirty="0">
+                <a:latin typeface="Arial" panose="020B0604020202020204" pitchFamily="34" charset="0"/>
+                <a:cs typeface="Arial" panose="020B0604020202020204" pitchFamily="34" charset="0"/>
+              </a:rPr>
+              <a:t>Para </a:t>
+            </a:r>
+            <a:r>
+              <a:rPr lang="es-ES" sz="1200" dirty="0">
+                <a:latin typeface="Arial" panose="020B0604020202020204" pitchFamily="34" charset="0"/>
+                <a:cs typeface="Arial" panose="020B0604020202020204" pitchFamily="34" charset="0"/>
+              </a:rPr>
+              <a:t>el caso 1, al final del brazo largo, el campo llega muy debilitado a comparación con el corto, por lo que la función oscila entre los valores descritos anteriormente, teniendo un ratio de extinción de 2.5 dB. Para el caso 2, al tener coeficientes de acoplamiento diferentes, tenemos más desequilibrio entre los brazos. Obteniendo un ratio de extinción aún menor que en el caso 1, en concreto de 0.8 dB.</a:t>
+            </a:r>
+            <a:endParaRPr lang="es-ES" sz="1200" noProof="0" dirty="0">
               <a:latin typeface="Arial" panose="020B0604020202020204" pitchFamily="34" charset="0"/>
               <a:cs typeface="Arial" panose="020B0604020202020204" pitchFamily="34" charset="0"/>
             </a:endParaRPr>
           </a:p>
           <a:p>
             <a:pPr algn="just"/>
-            <a:endParaRPr lang="en-US" sz="1200" dirty="0">
+            <a:endParaRPr lang="es-ES" sz="1200" dirty="0">
               <a:latin typeface="Arial" panose="020B0604020202020204" pitchFamily="34" charset="0"/>
               <a:cs typeface="Arial" panose="020B0604020202020204" pitchFamily="34" charset="0"/>
             </a:endParaRPr>
           </a:p>
           <a:p>
             <a:pPr algn="just"/>
-            <a:endParaRPr lang="en-US" sz="1200" dirty="0">
-              <a:latin typeface="Arial" panose="020B0604020202020204" pitchFamily="34" charset="0"/>
-              <a:cs typeface="Arial" panose="020B0604020202020204" pitchFamily="34" charset="0"/>
-            </a:endParaRPr>
+            <a:r>
+              <a:rPr lang="es-ES" sz="1200" noProof="0" dirty="0">
+                <a:latin typeface="Arial" panose="020B0604020202020204" pitchFamily="34" charset="0"/>
+                <a:cs typeface="Arial" panose="020B0604020202020204" pitchFamily="34" charset="0"/>
+              </a:rPr>
+              <a:t>Si queremos recuperar un ratio de extinción infinito, debemos de asegurar que la potencia antes de entrar a la salida sea igual en los dos brazos. Para ello debemos de inyectar mucha más potencia al brazo largo, quitándole potencia al corto.</a:t>
+            </a:r>
           </a:p>
         </p:txBody>
       </p:sp>
@@ -6776,7 +7910,7 @@
         </p:nvSpPr>
         <p:spPr>
           <a:xfrm>
-            <a:off x="609441" y="1418373"/>
+            <a:off x="609600" y="1092899"/>
             <a:ext cx="5332571" cy="3306028"/>
           </a:xfrm>
           <a:prstGeom prst="rect">
@@ -6810,7 +7944,7 @@
           <a:lstStyle/>
           <a:p>
             <a:pPr algn="ctr"/>
-            <a:endParaRPr lang="en-US"/>
+            <a:endParaRPr lang="es-ES" noProof="0" dirty="0"/>
           </a:p>
         </p:txBody>
       </p:sp>
@@ -6828,7 +7962,7 @@
         </p:nvSpPr>
         <p:spPr>
           <a:xfrm>
-            <a:off x="6476400" y="1418373"/>
+            <a:off x="6476559" y="1092899"/>
             <a:ext cx="5332571" cy="3306028"/>
           </a:xfrm>
           <a:prstGeom prst="rect">
@@ -6867,20 +8001,30 @@
           <a:p>
             <a:pPr algn="just"/>
             <a:r>
-              <a:rPr lang="en-US" sz="1600" b="1" dirty="0">
+              <a:rPr lang="es-ES" sz="1600" b="1" noProof="0" dirty="0" err="1">
                 <a:solidFill>
                   <a:schemeClr val="tx1"/>
                 </a:solidFill>
                 <a:latin typeface="Arial" panose="020B0604020202020204" pitchFamily="34" charset="0"/>
                 <a:cs typeface="Arial" panose="020B0604020202020204" pitchFamily="34" charset="0"/>
               </a:rPr>
-              <a:t>Hints:</a:t>
+              <a:t>Hints</a:t>
+            </a:r>
+            <a:r>
+              <a:rPr lang="es-ES" sz="1600" b="1" noProof="0" dirty="0">
+                <a:solidFill>
+                  <a:schemeClr val="tx1"/>
+                </a:solidFill>
+                <a:latin typeface="Arial" panose="020B0604020202020204" pitchFamily="34" charset="0"/>
+                <a:cs typeface="Arial" panose="020B0604020202020204" pitchFamily="34" charset="0"/>
+              </a:rPr>
+              <a:t>:</a:t>
             </a:r>
           </a:p>
           <a:p>
             <a:pPr algn="just"/>
             <a:r>
-              <a:rPr lang="en-US" sz="1600" dirty="0" err="1">
+              <a:rPr lang="es-ES" sz="1600" noProof="0" dirty="0" err="1">
                 <a:solidFill>
                   <a:schemeClr val="tx1"/>
                 </a:solidFill>
@@ -6891,7 +8035,7 @@
               <a:t>wvl</a:t>
             </a:r>
             <a:r>
-              <a:rPr lang="en-US" sz="1600" dirty="0">
+              <a:rPr lang="es-ES" sz="1600" noProof="0" dirty="0">
                 <a:solidFill>
                   <a:schemeClr val="tx1"/>
                 </a:solidFill>
@@ -6905,7 +8049,7 @@
           <a:p>
             <a:pPr algn="just"/>
             <a:r>
-              <a:rPr lang="en-US" sz="1600" dirty="0">
+              <a:rPr lang="es-ES" sz="1600" noProof="0" dirty="0">
                 <a:solidFill>
                   <a:schemeClr val="tx1"/>
                 </a:solidFill>
@@ -6913,13 +8057,57 @@
                 <a:cs typeface="Arial" panose="020B0604020202020204" pitchFamily="34" charset="0"/>
                 <a:sym typeface="Wingdings" pitchFamily="2" charset="2"/>
               </a:rPr>
-              <a:t>Silicon waveguide model:</a:t>
+              <a:t>Silicon </a:t>
+            </a:r>
+            <a:r>
+              <a:rPr lang="es-ES" sz="1600" noProof="0" dirty="0" err="1">
+                <a:solidFill>
+                  <a:schemeClr val="tx1"/>
+                </a:solidFill>
+                <a:latin typeface="Arial" panose="020B0604020202020204" pitchFamily="34" charset="0"/>
+                <a:cs typeface="Arial" panose="020B0604020202020204" pitchFamily="34" charset="0"/>
+                <a:sym typeface="Wingdings" pitchFamily="2" charset="2"/>
+              </a:rPr>
+              <a:t>waveguide</a:t>
+            </a:r>
+            <a:r>
+              <a:rPr lang="es-ES" sz="1600" noProof="0" dirty="0">
+                <a:solidFill>
+                  <a:schemeClr val="tx1"/>
+                </a:solidFill>
+                <a:latin typeface="Arial" panose="020B0604020202020204" pitchFamily="34" charset="0"/>
+                <a:cs typeface="Arial" panose="020B0604020202020204" pitchFamily="34" charset="0"/>
+                <a:sym typeface="Wingdings" pitchFamily="2" charset="2"/>
+              </a:rPr>
+              <a:t> </a:t>
+            </a:r>
+            <a:r>
+              <a:rPr lang="es-ES" sz="1600" noProof="0" dirty="0" err="1">
+                <a:solidFill>
+                  <a:schemeClr val="tx1"/>
+                </a:solidFill>
+                <a:latin typeface="Arial" panose="020B0604020202020204" pitchFamily="34" charset="0"/>
+                <a:cs typeface="Arial" panose="020B0604020202020204" pitchFamily="34" charset="0"/>
+                <a:sym typeface="Wingdings" pitchFamily="2" charset="2"/>
+              </a:rPr>
+              <a:t>model</a:t>
+            </a:r>
+            <a:r>
+              <a:rPr lang="es-ES" sz="1600" noProof="0" dirty="0">
+                <a:solidFill>
+                  <a:schemeClr val="tx1"/>
+                </a:solidFill>
+                <a:latin typeface="Arial" panose="020B0604020202020204" pitchFamily="34" charset="0"/>
+                <a:cs typeface="Arial" panose="020B0604020202020204" pitchFamily="34" charset="0"/>
+                <a:sym typeface="Wingdings" pitchFamily="2" charset="2"/>
+              </a:rPr>
+              <a:t>:</a:t>
             </a:r>
           </a:p>
           <a:p>
             <a:pPr algn="just"/>
             <a:r>
-              <a:rPr lang="en-US" sz="1600" dirty="0" err="1">
+              <a:rPr lang="es-ES" sz="1600" noProof="0" dirty="0" err="1">
                 <a:solidFill>
                   <a:schemeClr val="tx1"/>
                 </a:solidFill>
@@ -6930,7 +8118,7 @@
               <a:t>n_eff</a:t>
             </a:r>
             <a:r>
-              <a:rPr lang="en-US" sz="1600" dirty="0">
+              <a:rPr lang="es-ES" sz="1600" noProof="0" dirty="0">
                 <a:solidFill>
                   <a:schemeClr val="tx1"/>
                 </a:solidFill>
@@ -6944,7 +8132,7 @@
           <a:p>
             <a:pPr algn="just"/>
             <a:r>
-              <a:rPr lang="en-US" sz="1600" dirty="0" err="1">
+              <a:rPr lang="es-ES" sz="1600" noProof="0" dirty="0" err="1">
                 <a:solidFill>
                   <a:schemeClr val="tx1"/>
                 </a:solidFill>
@@ -6955,7 +8143,7 @@
               <a:t>n_g</a:t>
             </a:r>
             <a:r>
-              <a:rPr lang="en-US" sz="1600" dirty="0">
+              <a:rPr lang="es-ES" sz="1600" noProof="0" dirty="0">
                 <a:solidFill>
                   <a:schemeClr val="tx1"/>
                 </a:solidFill>
@@ -6969,7 +8157,7 @@
           <a:p>
             <a:pPr algn="just"/>
             <a:r>
-              <a:rPr lang="en-US" sz="1600" dirty="0">
+              <a:rPr lang="es-ES" sz="1600" noProof="0" dirty="0">
                 <a:solidFill>
                   <a:schemeClr val="tx1"/>
                 </a:solidFill>
@@ -6983,7 +8171,7 @@
           <a:p>
             <a:pPr algn="just"/>
             <a:r>
-              <a:rPr lang="en-US" sz="1600" dirty="0" err="1">
+              <a:rPr lang="es-ES" sz="1600" noProof="0" dirty="0" err="1">
                 <a:solidFill>
                   <a:schemeClr val="tx1"/>
                 </a:solidFill>
@@ -6994,7 +8182,7 @@
               <a:t>L_base</a:t>
             </a:r>
             <a:r>
-              <a:rPr lang="en-US" sz="1600" dirty="0">
+              <a:rPr lang="es-ES" sz="1600" noProof="0" dirty="0">
                 <a:solidFill>
                   <a:schemeClr val="tx1"/>
                 </a:solidFill>
@@ -7008,7 +8196,7 @@
           <a:p>
             <a:pPr algn="just"/>
             <a:r>
-              <a:rPr lang="en-US" sz="1600" dirty="0">
+              <a:rPr lang="es-ES" sz="1600" noProof="0" dirty="0" err="1">
                 <a:solidFill>
                   <a:schemeClr val="tx1"/>
                 </a:solidFill>
@@ -7016,10 +8204,10 @@
                 <a:cs typeface="Arial" panose="020B0604020202020204" pitchFamily="34" charset="0"/>
                 <a:sym typeface="Wingdings" pitchFamily="2" charset="2"/>
               </a:rPr>
-              <a:t>dL = </a:t>
-            </a:r>
-            <a:r>
-              <a:rPr lang="en-US" sz="1600" dirty="0" err="1">
+              <a:t>dL</a:t>
+            </a:r>
+            <a:r>
+              <a:rPr lang="es-ES" sz="1600" noProof="0" dirty="0">
                 <a:solidFill>
                   <a:schemeClr val="tx1"/>
                 </a:solidFill>
@@ -7027,10 +8215,21 @@
                 <a:cs typeface="Arial" panose="020B0604020202020204" pitchFamily="34" charset="0"/>
                 <a:sym typeface="Wingdings" pitchFamily="2" charset="2"/>
               </a:rPr>
+              <a:t> = </a:t>
+            </a:r>
+            <a:r>
+              <a:rPr lang="es-ES" sz="1600" noProof="0" dirty="0" err="1">
+                <a:solidFill>
+                  <a:schemeClr val="tx1"/>
+                </a:solidFill>
+                <a:latin typeface="Arial" panose="020B0604020202020204" pitchFamily="34" charset="0"/>
+                <a:cs typeface="Arial" panose="020B0604020202020204" pitchFamily="34" charset="0"/>
+                <a:sym typeface="Wingdings" pitchFamily="2" charset="2"/>
+              </a:rPr>
               <a:t>L_base</a:t>
             </a:r>
             <a:r>
-              <a:rPr lang="en-US" sz="1600" dirty="0">
+              <a:rPr lang="es-ES" sz="1600" noProof="0" dirty="0">
                 <a:solidFill>
                   <a:schemeClr val="tx1"/>
                 </a:solidFill>
@@ -7044,7 +8243,7 @@
           <a:p>
             <a:pPr algn="just"/>
             <a:r>
-              <a:rPr lang="en-US" sz="1600" dirty="0">
+              <a:rPr lang="es-ES" sz="1600" noProof="0" dirty="0" err="1">
                 <a:solidFill>
                   <a:schemeClr val="tx1"/>
                 </a:solidFill>
@@ -7052,13 +8251,24 @@
                 <a:cs typeface="Arial" panose="020B0604020202020204" pitchFamily="34" charset="0"/>
                 <a:sym typeface="Wingdings" pitchFamily="2" charset="2"/>
               </a:rPr>
-              <a:t>loss = 4 dB / cm</a:t>
+              <a:t>loss</a:t>
+            </a:r>
+            <a:r>
+              <a:rPr lang="es-ES" sz="1600" noProof="0" dirty="0">
+                <a:solidFill>
+                  <a:schemeClr val="tx1"/>
+                </a:solidFill>
+                <a:latin typeface="Arial" panose="020B0604020202020204" pitchFamily="34" charset="0"/>
+                <a:cs typeface="Arial" panose="020B0604020202020204" pitchFamily="34" charset="0"/>
+                <a:sym typeface="Wingdings" pitchFamily="2" charset="2"/>
+              </a:rPr>
+              <a:t> = 4 dB / cm</a:t>
             </a:r>
           </a:p>
           <a:p>
             <a:pPr algn="just"/>
             <a:r>
-              <a:rPr lang="en-US" sz="1600" b="1" dirty="0">
+              <a:rPr lang="es-ES" sz="1600" b="1" noProof="0" dirty="0">
                 <a:solidFill>
                   <a:schemeClr val="tx1"/>
                 </a:solidFill>
@@ -7069,7 +8279,7 @@
               <a:t>Case 1</a:t>
             </a:r>
             <a:r>
-              <a:rPr lang="en-US" sz="1600" dirty="0">
+              <a:rPr lang="es-ES" sz="1600" noProof="0" dirty="0">
                 <a:solidFill>
                   <a:schemeClr val="tx1"/>
                 </a:solidFill>
@@ -7077,10 +8287,10 @@
                 <a:cs typeface="Arial" panose="020B0604020202020204" pitchFamily="34" charset="0"/>
                 <a:sym typeface="Wingdings" pitchFamily="2" charset="2"/>
               </a:rPr>
-              <a:t>. Simulate for Ka = </a:t>
-            </a:r>
-            <a:r>
-              <a:rPr lang="en-US" sz="1600" dirty="0" err="1">
+              <a:t>. </a:t>
+            </a:r>
+            <a:r>
+              <a:rPr lang="es-ES" sz="1600" noProof="0" dirty="0" err="1">
                 <a:solidFill>
                   <a:schemeClr val="tx1"/>
                 </a:solidFill>
@@ -7088,10 +8298,10 @@
                 <a:cs typeface="Arial" panose="020B0604020202020204" pitchFamily="34" charset="0"/>
                 <a:sym typeface="Wingdings" pitchFamily="2" charset="2"/>
               </a:rPr>
-              <a:t>Kb</a:t>
-            </a:r>
-            <a:r>
-              <a:rPr lang="en-US" sz="1600" dirty="0">
+              <a:t>Simulate</a:t>
+            </a:r>
+            <a:r>
+              <a:rPr lang="es-ES" sz="1600" noProof="0" dirty="0">
                 <a:solidFill>
                   <a:schemeClr val="tx1"/>
                 </a:solidFill>
@@ -7099,10 +8309,10 @@
                 <a:cs typeface="Arial" panose="020B0604020202020204" pitchFamily="34" charset="0"/>
                 <a:sym typeface="Wingdings" pitchFamily="2" charset="2"/>
               </a:rPr>
-              <a:t> = 0.5 for all </a:t>
-            </a:r>
-            <a:r>
-              <a:rPr lang="en-US" sz="1600" dirty="0" err="1">
+              <a:t> </a:t>
+            </a:r>
+            <a:r>
+              <a:rPr lang="es-ES" sz="1600" noProof="0" dirty="0" err="1">
                 <a:solidFill>
                   <a:schemeClr val="tx1"/>
                 </a:solidFill>
@@ -7110,9 +8320,75 @@
                 <a:cs typeface="Arial" panose="020B0604020202020204" pitchFamily="34" charset="0"/>
                 <a:sym typeface="Wingdings" pitchFamily="2" charset="2"/>
               </a:rPr>
+              <a:t>for</a:t>
+            </a:r>
+            <a:r>
+              <a:rPr lang="es-ES" sz="1600" noProof="0" dirty="0">
+                <a:solidFill>
+                  <a:schemeClr val="tx1"/>
+                </a:solidFill>
+                <a:latin typeface="Arial" panose="020B0604020202020204" pitchFamily="34" charset="0"/>
+                <a:cs typeface="Arial" panose="020B0604020202020204" pitchFamily="34" charset="0"/>
+                <a:sym typeface="Wingdings" pitchFamily="2" charset="2"/>
+              </a:rPr>
+              <a:t> Ka = Kb = 0.5 </a:t>
+            </a:r>
+            <a:r>
+              <a:rPr lang="es-ES" sz="1600" noProof="0" dirty="0" err="1">
+                <a:solidFill>
+                  <a:schemeClr val="tx1"/>
+                </a:solidFill>
+                <a:latin typeface="Arial" panose="020B0604020202020204" pitchFamily="34" charset="0"/>
+                <a:cs typeface="Arial" panose="020B0604020202020204" pitchFamily="34" charset="0"/>
+                <a:sym typeface="Wingdings" pitchFamily="2" charset="2"/>
+              </a:rPr>
+              <a:t>for</a:t>
+            </a:r>
+            <a:r>
+              <a:rPr lang="es-ES" sz="1600" noProof="0" dirty="0">
+                <a:solidFill>
+                  <a:schemeClr val="tx1"/>
+                </a:solidFill>
+                <a:latin typeface="Arial" panose="020B0604020202020204" pitchFamily="34" charset="0"/>
+                <a:cs typeface="Arial" panose="020B0604020202020204" pitchFamily="34" charset="0"/>
+                <a:sym typeface="Wingdings" pitchFamily="2" charset="2"/>
+              </a:rPr>
+              <a:t> </a:t>
+            </a:r>
+            <a:r>
+              <a:rPr lang="es-ES" sz="1600" noProof="0" dirty="0" err="1">
+                <a:solidFill>
+                  <a:schemeClr val="tx1"/>
+                </a:solidFill>
+                <a:latin typeface="Arial" panose="020B0604020202020204" pitchFamily="34" charset="0"/>
+                <a:cs typeface="Arial" panose="020B0604020202020204" pitchFamily="34" charset="0"/>
+                <a:sym typeface="Wingdings" pitchFamily="2" charset="2"/>
+              </a:rPr>
+              <a:t>all</a:t>
+            </a:r>
+            <a:r>
+              <a:rPr lang="es-ES" sz="1600" noProof="0" dirty="0">
+                <a:solidFill>
+                  <a:schemeClr val="tx1"/>
+                </a:solidFill>
+                <a:latin typeface="Arial" panose="020B0604020202020204" pitchFamily="34" charset="0"/>
+                <a:cs typeface="Arial" panose="020B0604020202020204" pitchFamily="34" charset="0"/>
+                <a:sym typeface="Wingdings" pitchFamily="2" charset="2"/>
+              </a:rPr>
+              <a:t> </a:t>
+            </a:r>
+            <a:r>
+              <a:rPr lang="es-ES" sz="1600" noProof="0" dirty="0" err="1">
+                <a:solidFill>
+                  <a:schemeClr val="tx1"/>
+                </a:solidFill>
+                <a:latin typeface="Arial" panose="020B0604020202020204" pitchFamily="34" charset="0"/>
+                <a:cs typeface="Arial" panose="020B0604020202020204" pitchFamily="34" charset="0"/>
+                <a:sym typeface="Wingdings" pitchFamily="2" charset="2"/>
+              </a:rPr>
               <a:t>wvl</a:t>
             </a:r>
-            <a:endParaRPr lang="en-US" sz="1600" dirty="0">
+            <a:endParaRPr lang="es-ES" sz="1600" noProof="0" dirty="0">
               <a:solidFill>
                 <a:schemeClr val="tx1"/>
               </a:solidFill>
@@ -7124,7 +8400,7 @@
           <a:p>
             <a:pPr algn="just"/>
             <a:r>
-              <a:rPr lang="en-US" sz="1600" b="1" dirty="0">
+              <a:rPr lang="es-ES" sz="1600" b="1" noProof="0" dirty="0">
                 <a:solidFill>
                   <a:schemeClr val="tx1"/>
                 </a:solidFill>
@@ -7135,7 +8411,7 @@
               <a:t>Case 2</a:t>
             </a:r>
             <a:r>
-              <a:rPr lang="en-US" sz="1600" dirty="0">
+              <a:rPr lang="es-ES" sz="1600" noProof="0" dirty="0">
                 <a:solidFill>
                   <a:schemeClr val="tx1"/>
                 </a:solidFill>
@@ -7143,10 +8419,10 @@
                 <a:cs typeface="Arial" panose="020B0604020202020204" pitchFamily="34" charset="0"/>
                 <a:sym typeface="Wingdings" pitchFamily="2" charset="2"/>
               </a:rPr>
-              <a:t>. Simulate for Ka=0.1 for all </a:t>
-            </a:r>
-            <a:r>
-              <a:rPr lang="en-US" sz="1600" dirty="0" err="1">
+              <a:t>. </a:t>
+            </a:r>
+            <a:r>
+              <a:rPr lang="es-ES" sz="1600" noProof="0" dirty="0" err="1">
                 <a:solidFill>
                   <a:schemeClr val="tx1"/>
                 </a:solidFill>
@@ -7154,9 +8430,97 @@
                 <a:cs typeface="Arial" panose="020B0604020202020204" pitchFamily="34" charset="0"/>
                 <a:sym typeface="Wingdings" pitchFamily="2" charset="2"/>
               </a:rPr>
+              <a:t>Simulate</a:t>
+            </a:r>
+            <a:r>
+              <a:rPr lang="es-ES" sz="1600" noProof="0" dirty="0">
+                <a:solidFill>
+                  <a:schemeClr val="tx1"/>
+                </a:solidFill>
+                <a:latin typeface="Arial" panose="020B0604020202020204" pitchFamily="34" charset="0"/>
+                <a:cs typeface="Arial" panose="020B0604020202020204" pitchFamily="34" charset="0"/>
+                <a:sym typeface="Wingdings" pitchFamily="2" charset="2"/>
+              </a:rPr>
+              <a:t> </a:t>
+            </a:r>
+            <a:r>
+              <a:rPr lang="es-ES" sz="1600" noProof="0" dirty="0" err="1">
+                <a:solidFill>
+                  <a:schemeClr val="tx1"/>
+                </a:solidFill>
+                <a:latin typeface="Arial" panose="020B0604020202020204" pitchFamily="34" charset="0"/>
+                <a:cs typeface="Arial" panose="020B0604020202020204" pitchFamily="34" charset="0"/>
+                <a:sym typeface="Wingdings" pitchFamily="2" charset="2"/>
+              </a:rPr>
+              <a:t>for</a:t>
+            </a:r>
+            <a:r>
+              <a:rPr lang="es-ES" sz="1600" noProof="0" dirty="0">
+                <a:solidFill>
+                  <a:schemeClr val="tx1"/>
+                </a:solidFill>
+                <a:latin typeface="Arial" panose="020B0604020202020204" pitchFamily="34" charset="0"/>
+                <a:cs typeface="Arial" panose="020B0604020202020204" pitchFamily="34" charset="0"/>
+                <a:sym typeface="Wingdings" pitchFamily="2" charset="2"/>
+              </a:rPr>
+              <a:t> Ka=0.1 </a:t>
+            </a:r>
+            <a:r>
+              <a:rPr lang="es-ES" sz="1600" noProof="0" dirty="0" err="1">
+                <a:solidFill>
+                  <a:schemeClr val="tx1"/>
+                </a:solidFill>
+                <a:latin typeface="Arial" panose="020B0604020202020204" pitchFamily="34" charset="0"/>
+                <a:cs typeface="Arial" panose="020B0604020202020204" pitchFamily="34" charset="0"/>
+                <a:sym typeface="Wingdings" pitchFamily="2" charset="2"/>
+              </a:rPr>
+              <a:t>for</a:t>
+            </a:r>
+            <a:r>
+              <a:rPr lang="es-ES" sz="1600" noProof="0" dirty="0">
+                <a:solidFill>
+                  <a:schemeClr val="tx1"/>
+                </a:solidFill>
+                <a:latin typeface="Arial" panose="020B0604020202020204" pitchFamily="34" charset="0"/>
+                <a:cs typeface="Arial" panose="020B0604020202020204" pitchFamily="34" charset="0"/>
+                <a:sym typeface="Wingdings" pitchFamily="2" charset="2"/>
+              </a:rPr>
+              <a:t> </a:t>
+            </a:r>
+            <a:r>
+              <a:rPr lang="es-ES" sz="1600" noProof="0" dirty="0" err="1">
+                <a:solidFill>
+                  <a:schemeClr val="tx1"/>
+                </a:solidFill>
+                <a:latin typeface="Arial" panose="020B0604020202020204" pitchFamily="34" charset="0"/>
+                <a:cs typeface="Arial" panose="020B0604020202020204" pitchFamily="34" charset="0"/>
+                <a:sym typeface="Wingdings" pitchFamily="2" charset="2"/>
+              </a:rPr>
+              <a:t>all</a:t>
+            </a:r>
+            <a:r>
+              <a:rPr lang="es-ES" sz="1600" noProof="0" dirty="0">
+                <a:solidFill>
+                  <a:schemeClr val="tx1"/>
+                </a:solidFill>
+                <a:latin typeface="Arial" panose="020B0604020202020204" pitchFamily="34" charset="0"/>
+                <a:cs typeface="Arial" panose="020B0604020202020204" pitchFamily="34" charset="0"/>
+                <a:sym typeface="Wingdings" pitchFamily="2" charset="2"/>
+              </a:rPr>
+              <a:t> </a:t>
+            </a:r>
+            <a:r>
+              <a:rPr lang="es-ES" sz="1600" noProof="0" dirty="0" err="1">
+                <a:solidFill>
+                  <a:schemeClr val="tx1"/>
+                </a:solidFill>
+                <a:latin typeface="Arial" panose="020B0604020202020204" pitchFamily="34" charset="0"/>
+                <a:cs typeface="Arial" panose="020B0604020202020204" pitchFamily="34" charset="0"/>
+                <a:sym typeface="Wingdings" pitchFamily="2" charset="2"/>
+              </a:rPr>
               <a:t>wvl</a:t>
             </a:r>
-            <a:endParaRPr lang="en-US" sz="1600" dirty="0">
+            <a:endParaRPr lang="es-ES" sz="1600" noProof="0" dirty="0">
               <a:solidFill>
                 <a:schemeClr val="tx1"/>
               </a:solidFill>
@@ -7168,7 +8532,7 @@
           <a:p>
             <a:pPr algn="just"/>
             <a:r>
-              <a:rPr lang="en-US" sz="1600" dirty="0" err="1">
+              <a:rPr lang="es-ES" sz="1600" noProof="0" dirty="0">
                 <a:solidFill>
                   <a:schemeClr val="tx1"/>
                 </a:solidFill>
@@ -7176,10 +8540,10 @@
                 <a:cs typeface="Arial" panose="020B0604020202020204" pitchFamily="34" charset="0"/>
                 <a:sym typeface="Wingdings" pitchFamily="2" charset="2"/>
               </a:rPr>
-              <a:t>Kb</a:t>
-            </a:r>
-            <a:r>
-              <a:rPr lang="en-US" sz="1600" dirty="0">
+              <a:t>Kb=0.5 </a:t>
+            </a:r>
+            <a:r>
+              <a:rPr lang="es-ES" sz="1600" noProof="0" dirty="0" err="1">
                 <a:solidFill>
                   <a:schemeClr val="tx1"/>
                 </a:solidFill>
@@ -7187,10 +8551,10 @@
                 <a:cs typeface="Arial" panose="020B0604020202020204" pitchFamily="34" charset="0"/>
                 <a:sym typeface="Wingdings" pitchFamily="2" charset="2"/>
               </a:rPr>
-              <a:t>=0.5 for all </a:t>
-            </a:r>
-            <a:r>
-              <a:rPr lang="en-US" sz="1600" dirty="0" err="1">
+              <a:t>for</a:t>
+            </a:r>
+            <a:r>
+              <a:rPr lang="es-ES" sz="1600" noProof="0" dirty="0">
                 <a:solidFill>
                   <a:schemeClr val="tx1"/>
                 </a:solidFill>
@@ -7198,9 +8562,42 @@
                 <a:cs typeface="Arial" panose="020B0604020202020204" pitchFamily="34" charset="0"/>
                 <a:sym typeface="Wingdings" pitchFamily="2" charset="2"/>
               </a:rPr>
+              <a:t> </a:t>
+            </a:r>
+            <a:r>
+              <a:rPr lang="es-ES" sz="1600" noProof="0" dirty="0" err="1">
+                <a:solidFill>
+                  <a:schemeClr val="tx1"/>
+                </a:solidFill>
+                <a:latin typeface="Arial" panose="020B0604020202020204" pitchFamily="34" charset="0"/>
+                <a:cs typeface="Arial" panose="020B0604020202020204" pitchFamily="34" charset="0"/>
+                <a:sym typeface="Wingdings" pitchFamily="2" charset="2"/>
+              </a:rPr>
+              <a:t>all</a:t>
+            </a:r>
+            <a:r>
+              <a:rPr lang="es-ES" sz="1600" noProof="0" dirty="0">
+                <a:solidFill>
+                  <a:schemeClr val="tx1"/>
+                </a:solidFill>
+                <a:latin typeface="Arial" panose="020B0604020202020204" pitchFamily="34" charset="0"/>
+                <a:cs typeface="Arial" panose="020B0604020202020204" pitchFamily="34" charset="0"/>
+                <a:sym typeface="Wingdings" pitchFamily="2" charset="2"/>
+              </a:rPr>
+              <a:t> </a:t>
+            </a:r>
+            <a:r>
+              <a:rPr lang="es-ES" sz="1600" noProof="0" dirty="0" err="1">
+                <a:solidFill>
+                  <a:schemeClr val="tx1"/>
+                </a:solidFill>
+                <a:latin typeface="Arial" panose="020B0604020202020204" pitchFamily="34" charset="0"/>
+                <a:cs typeface="Arial" panose="020B0604020202020204" pitchFamily="34" charset="0"/>
+                <a:sym typeface="Wingdings" pitchFamily="2" charset="2"/>
+              </a:rPr>
               <a:t>wvl</a:t>
             </a:r>
-            <a:endParaRPr lang="en-US" sz="1600" dirty="0">
+            <a:endParaRPr lang="es-ES" sz="1600" noProof="0" dirty="0">
               <a:solidFill>
                 <a:schemeClr val="tx1"/>
               </a:solidFill>
@@ -7240,24 +8637,167 @@
           <a:p>
             <a:pPr algn="ctr"/>
             <a:r>
-              <a:rPr lang="es-ES" dirty="0"/>
+              <a:rPr lang="es-ES" noProof="0" dirty="0"/>
               <a:t>MZI transfer </a:t>
             </a:r>
             <a:r>
-              <a:rPr lang="es-ES" dirty="0" err="1"/>
+              <a:rPr lang="es-ES" noProof="0" dirty="0" err="1"/>
               <a:t>functions</a:t>
             </a:r>
-            <a:endParaRPr lang="en-US" dirty="0"/>
+            <a:endParaRPr lang="es-ES" noProof="0" dirty="0"/>
           </a:p>
           <a:p>
             <a:pPr algn="ctr"/>
-            <a:endParaRPr lang="en-US" dirty="0"/>
+            <a:endParaRPr lang="es-ES" noProof="0" dirty="0"/>
           </a:p>
           <a:p>
             <a:pPr algn="ctr"/>
             <a:r>
-              <a:rPr lang="en-US" dirty="0"/>
-              <a:t>Paste plot here</a:t>
+              <a:rPr lang="es-ES" noProof="0" dirty="0"/>
+              <a:t>Paste </a:t>
+            </a:r>
+            <a:r>
+              <a:rPr lang="es-ES" noProof="0" dirty="0" err="1"/>
+              <a:t>plot</a:t>
+            </a:r>
+            <a:r>
+              <a:rPr lang="es-ES" noProof="0" dirty="0"/>
+              <a:t> </a:t>
+            </a:r>
+            <a:r>
+              <a:rPr lang="es-ES" noProof="0" dirty="0" err="1"/>
+              <a:t>here</a:t>
+            </a:r>
+            <a:endParaRPr lang="es-ES" noProof="0" dirty="0"/>
+          </a:p>
+        </p:txBody>
+      </p:sp>
+      <p:pic>
+        <p:nvPicPr>
+          <p:cNvPr id="11" name="Picture 10">
+            <a:extLst>
+              <a:ext uri="{FF2B5EF4-FFF2-40B4-BE49-F238E27FC236}">
+                <a16:creationId xmlns:a16="http://schemas.microsoft.com/office/drawing/2014/main" id="{0EA9F17A-8D6F-A07F-927F-3F294FF450D7}"/>
+              </a:ext>
+            </a:extLst>
+          </p:cNvPr>
+          <p:cNvPicPr>
+            <a:picLocks noChangeAspect="1"/>
+          </p:cNvPicPr>
+          <p:nvPr/>
+        </p:nvPicPr>
+        <p:blipFill>
+          <a:blip r:embed="rId3"/>
+          <a:stretch>
+            <a:fillRect/>
+          </a:stretch>
+        </p:blipFill>
+        <p:spPr>
+          <a:xfrm>
+            <a:off x="232232" y="1766130"/>
+            <a:ext cx="3282181" cy="1748338"/>
+          </a:xfrm>
+          <a:prstGeom prst="rect">
+            <a:avLst/>
+          </a:prstGeom>
+        </p:spPr>
+      </p:pic>
+      <p:pic>
+        <p:nvPicPr>
+          <p:cNvPr id="14" name="Picture 13">
+            <a:extLst>
+              <a:ext uri="{FF2B5EF4-FFF2-40B4-BE49-F238E27FC236}">
+                <a16:creationId xmlns:a16="http://schemas.microsoft.com/office/drawing/2014/main" id="{FF0FDF9B-C645-E5D5-0066-C2B220B1FB25}"/>
+              </a:ext>
+            </a:extLst>
+          </p:cNvPr>
+          <p:cNvPicPr>
+            <a:picLocks noChangeAspect="1"/>
+          </p:cNvPicPr>
+          <p:nvPr/>
+        </p:nvPicPr>
+        <p:blipFill>
+          <a:blip r:embed="rId4"/>
+          <a:stretch>
+            <a:fillRect/>
+          </a:stretch>
+        </p:blipFill>
+        <p:spPr>
+          <a:xfrm>
+            <a:off x="3645537" y="1766130"/>
+            <a:ext cx="3282181" cy="1767957"/>
+          </a:xfrm>
+          <a:prstGeom prst="rect">
+            <a:avLst/>
+          </a:prstGeom>
+        </p:spPr>
+      </p:pic>
+      <p:sp>
+        <p:nvSpPr>
+          <p:cNvPr id="15" name="TextBox 14">
+            <a:extLst>
+              <a:ext uri="{FF2B5EF4-FFF2-40B4-BE49-F238E27FC236}">
+                <a16:creationId xmlns:a16="http://schemas.microsoft.com/office/drawing/2014/main" id="{F995FC68-8253-F411-D8E6-65D2D1FCC975}"/>
+              </a:ext>
+            </a:extLst>
+          </p:cNvPr>
+          <p:cNvSpPr txBox="1"/>
+          <p:nvPr/>
+        </p:nvSpPr>
+        <p:spPr>
+          <a:xfrm>
+            <a:off x="1143159" y="1503326"/>
+            <a:ext cx="1176284" cy="369332"/>
+          </a:xfrm>
+          <a:prstGeom prst="rect">
+            <a:avLst/>
+          </a:prstGeom>
+          <a:noFill/>
+        </p:spPr>
+        <p:txBody>
+          <a:bodyPr wrap="none" rtlCol="0">
+            <a:spAutoFit/>
+          </a:bodyPr>
+          <a:lstStyle/>
+          <a:p>
+            <a:r>
+              <a:rPr lang="es-ES" noProof="0" dirty="0"/>
+              <a:t>Ka=Kb=0.5</a:t>
+            </a:r>
+          </a:p>
+        </p:txBody>
+      </p:sp>
+      <p:sp>
+        <p:nvSpPr>
+          <p:cNvPr id="16" name="TextBox 15">
+            <a:extLst>
+              <a:ext uri="{FF2B5EF4-FFF2-40B4-BE49-F238E27FC236}">
+                <a16:creationId xmlns:a16="http://schemas.microsoft.com/office/drawing/2014/main" id="{3063AFB6-E924-1EC9-B8FC-CC2BCA9B8F63}"/>
+              </a:ext>
+            </a:extLst>
+          </p:cNvPr>
+          <p:cNvSpPr txBox="1"/>
+          <p:nvPr/>
+        </p:nvSpPr>
+        <p:spPr>
+          <a:xfrm>
+            <a:off x="4740902" y="1480194"/>
+            <a:ext cx="1578637" cy="369332"/>
+          </a:xfrm>
+          <a:prstGeom prst="rect">
+            <a:avLst/>
+          </a:prstGeom>
+          <a:noFill/>
+        </p:spPr>
+        <p:txBody>
+          <a:bodyPr wrap="none" rtlCol="0">
+            <a:spAutoFit/>
+          </a:bodyPr>
+          <a:lstStyle/>
+          <a:p>
+            <a:r>
+              <a:rPr lang="es-ES" noProof="0" dirty="0"/>
+              <a:t>Ka=0.1, Kb=0.5</a:t>
             </a:r>
           </a:p>
         </p:txBody>
@@ -7280,7 +8820,13 @@
   <p:cSld>
     <p:spTree>
       <p:nvGrpSpPr>
-        <p:cNvPr id="1" name=""/>
+        <p:cNvPr id="1" name="">
+          <a:extLst>
+            <a:ext uri="{FF2B5EF4-FFF2-40B4-BE49-F238E27FC236}">
+              <a16:creationId xmlns:a16="http://schemas.microsoft.com/office/drawing/2014/main" id="{56404ED6-4253-8C6D-FE21-1F0115A6489E}"/>
+            </a:ext>
+          </a:extLst>
+        </p:cNvPr>
         <p:cNvGrpSpPr/>
         <p:nvPr/>
       </p:nvGrpSpPr>
@@ -7297,7 +8843,7 @@
           <p:cNvPr id="5" name="Marcador de pie de página 4">
             <a:extLst>
               <a:ext uri="{FF2B5EF4-FFF2-40B4-BE49-F238E27FC236}">
-                <a16:creationId xmlns:a16="http://schemas.microsoft.com/office/drawing/2014/main" id="{F929251A-3DC4-36B2-3FB3-341378364BED}"/>
+                <a16:creationId xmlns:a16="http://schemas.microsoft.com/office/drawing/2014/main" id="{6B561950-C5FE-7FD3-AA94-609DE33759BF}"/>
               </a:ext>
             </a:extLst>
           </p:cNvPr>
@@ -7314,7 +8860,7 @@
           <a:lstStyle/>
           <a:p>
             <a:r>
-              <a:rPr lang="en-US"/>
+              <a:rPr lang="es-ES" noProof="0" dirty="0"/>
               <a:t>LAB 3.0. CIRCUITS &amp; COMPACT MODELS</a:t>
             </a:r>
           </a:p>
@@ -7325,7 +8871,7 @@
           <p:cNvPr id="6" name="Marcador de número de diapositiva 5">
             <a:extLst>
               <a:ext uri="{FF2B5EF4-FFF2-40B4-BE49-F238E27FC236}">
-                <a16:creationId xmlns:a16="http://schemas.microsoft.com/office/drawing/2014/main" id="{8E91A34C-DF76-97CF-3EFD-546BC64A2184}"/>
+                <a16:creationId xmlns:a16="http://schemas.microsoft.com/office/drawing/2014/main" id="{D70F1C6C-0652-E1BD-7C1A-032440508170}"/>
               </a:ext>
             </a:extLst>
           </p:cNvPr>
@@ -7342,20 +8888,173 @@
           <a:lstStyle/>
           <a:p>
             <a:fld id="{C2F52289-4012-4053-9770-FE82CEB9514F}" type="slidenum">
-              <a:rPr lang="en-US" smtClean="0"/>
+              <a:rPr lang="es-ES" noProof="0" smtClean="0"/>
               <a:pPr/>
               <a:t>7</a:t>
             </a:fld>
-            <a:endParaRPr lang="en-US" dirty="0"/>
-          </a:p>
-        </p:txBody>
-      </p:sp>
-      <p:sp>
-        <p:nvSpPr>
-          <p:cNvPr id="8" name="CuadroTexto 7">
+            <a:endParaRPr lang="es-ES" noProof="0" dirty="0"/>
+          </a:p>
+        </p:txBody>
+      </p:sp>
+      <p:pic>
+        <p:nvPicPr>
+          <p:cNvPr id="10" name="Gráfico 9">
             <a:extLst>
               <a:ext uri="{FF2B5EF4-FFF2-40B4-BE49-F238E27FC236}">
-                <a16:creationId xmlns:a16="http://schemas.microsoft.com/office/drawing/2014/main" id="{D9601617-351E-AE1A-1F4D-693F2EA59361}"/>
+                <a16:creationId xmlns:a16="http://schemas.microsoft.com/office/drawing/2014/main" id="{1C906B19-D036-FF99-2463-588D539EF9CD}"/>
+              </a:ext>
+            </a:extLst>
+          </p:cNvPr>
+          <p:cNvPicPr>
+            <a:picLocks noChangeAspect="1"/>
+          </p:cNvPicPr>
+          <p:nvPr/>
+        </p:nvPicPr>
+        <p:blipFill>
+          <a:blip>
+            <a:extLst>
+              <a:ext uri="{96DAC541-7B7A-43D3-8B79-37D633B846F1}">
+                <asvg:svgBlip xmlns:asvg="http://schemas.microsoft.com/office/drawing/2016/SVG/main" r:embed="rId2"/>
+              </a:ext>
+            </a:extLst>
+          </a:blip>
+          <a:stretch>
+            <a:fillRect/>
+          </a:stretch>
+        </p:blipFill>
+        <p:spPr>
+          <a:xfrm>
+            <a:off x="5045006" y="6356057"/>
+            <a:ext cx="6409575" cy="363174"/>
+          </a:xfrm>
+          <a:prstGeom prst="rect">
+            <a:avLst/>
+          </a:prstGeom>
+        </p:spPr>
+      </p:pic>
+      <p:sp>
+        <p:nvSpPr>
+          <p:cNvPr id="13" name="object 16">
+            <a:extLst>
+              <a:ext uri="{FF2B5EF4-FFF2-40B4-BE49-F238E27FC236}">
+                <a16:creationId xmlns:a16="http://schemas.microsoft.com/office/drawing/2014/main" id="{CB44F555-6186-B4E3-5F54-0E63D6824671}"/>
+              </a:ext>
+            </a:extLst>
+          </p:cNvPr>
+          <p:cNvSpPr txBox="1">
+            <a:spLocks/>
+          </p:cNvSpPr>
+          <p:nvPr/>
+        </p:nvSpPr>
+        <p:spPr>
+          <a:xfrm>
+            <a:off x="685800" y="408883"/>
+            <a:ext cx="10994410" cy="718145"/>
+          </a:xfrm>
+          <a:prstGeom prst="rect">
+            <a:avLst/>
+          </a:prstGeom>
+        </p:spPr>
+        <p:txBody>
+          <a:bodyPr vert="horz" wrap="square" lIns="0" tIns="12700" rIns="0" bIns="0" rtlCol="0">
+            <a:spAutoFit/>
+          </a:bodyPr>
+          <a:lstStyle>
+            <a:lvl1pPr>
+              <a:defRPr sz="2000" b="1" i="0">
+                <a:solidFill>
+                  <a:schemeClr val="tx1"/>
+                </a:solidFill>
+                <a:latin typeface="Calibri"/>
+                <a:ea typeface="+mj-ea"/>
+                <a:cs typeface="Calibri"/>
+              </a:defRPr>
+            </a:lvl1pPr>
+          </a:lstStyle>
+          <a:p>
+            <a:pPr marL="12700">
+              <a:spcBef>
+                <a:spcPts val="100"/>
+              </a:spcBef>
+            </a:pPr>
+            <a:r>
+              <a:rPr lang="es-ES" sz="2500" kern="0" noProof="0" dirty="0" err="1"/>
+              <a:t>Learning</a:t>
+            </a:r>
+            <a:r>
+              <a:rPr lang="es-ES" sz="2500" kern="0" noProof="0" dirty="0"/>
+              <a:t> </a:t>
+            </a:r>
+            <a:r>
+              <a:rPr lang="es-ES" sz="2500" kern="0" noProof="0" dirty="0" err="1"/>
+              <a:t>outcome</a:t>
+            </a:r>
+            <a:r>
+              <a:rPr lang="es-ES" sz="2500" kern="0" noProof="0" dirty="0"/>
+              <a:t> #3 – Delay </a:t>
+            </a:r>
+            <a:r>
+              <a:rPr lang="es-ES" sz="2500" kern="0" noProof="0" dirty="0" err="1"/>
+              <a:t>imbalance</a:t>
+            </a:r>
+            <a:r>
+              <a:rPr lang="es-ES" sz="2500" kern="0" noProof="0" dirty="0"/>
+              <a:t> </a:t>
+            </a:r>
+            <a:r>
+              <a:rPr lang="es-ES" sz="2500" kern="0" noProof="0" dirty="0" err="1"/>
+              <a:t>with</a:t>
+            </a:r>
+            <a:r>
+              <a:rPr lang="es-ES" sz="2500" kern="0" noProof="0" dirty="0"/>
+              <a:t> </a:t>
+            </a:r>
+            <a:r>
+              <a:rPr lang="es-ES" sz="2500" kern="0" noProof="0" dirty="0" err="1"/>
+              <a:t>loss</a:t>
+            </a:r>
+            <a:endParaRPr lang="es-ES" sz="2500" kern="0" noProof="0" dirty="0"/>
+          </a:p>
+          <a:p>
+            <a:pPr marL="12700">
+              <a:spcBef>
+                <a:spcPts val="100"/>
+              </a:spcBef>
+            </a:pPr>
+            <a:r>
+              <a:rPr lang="es-ES" b="0" kern="0" spc="-5" noProof="0" dirty="0" err="1">
+                <a:latin typeface="+mj-lt"/>
+                <a:cs typeface="Lucida Sans"/>
+              </a:rPr>
+              <a:t>Fringe</a:t>
+            </a:r>
+            <a:r>
+              <a:rPr lang="es-ES" b="0" kern="0" spc="-5" noProof="0" dirty="0">
+                <a:latin typeface="+mj-lt"/>
+                <a:cs typeface="Lucida Sans"/>
+              </a:rPr>
+              <a:t> </a:t>
+            </a:r>
+            <a:r>
+              <a:rPr lang="es-ES" b="0" kern="0" spc="-5" noProof="0" dirty="0" err="1">
+                <a:latin typeface="+mj-lt"/>
+                <a:cs typeface="Lucida Sans"/>
+              </a:rPr>
+              <a:t>visibility</a:t>
+            </a:r>
+            <a:endParaRPr lang="es-ES" b="0" kern="0" noProof="0" dirty="0">
+              <a:latin typeface="+mj-lt"/>
+              <a:cs typeface="Lucida Sans"/>
+            </a:endParaRPr>
+          </a:p>
+        </p:txBody>
+      </p:sp>
+      <p:sp>
+        <p:nvSpPr>
+          <p:cNvPr id="2" name="CuadroTexto 1">
+            <a:extLst>
+              <a:ext uri="{FF2B5EF4-FFF2-40B4-BE49-F238E27FC236}">
+                <a16:creationId xmlns:a16="http://schemas.microsoft.com/office/drawing/2014/main" id="{112BEF7C-DF02-BC43-D844-DCF36F9C49CF}"/>
               </a:ext>
             </a:extLst>
           </p:cNvPr>
@@ -7364,8 +9063,8 @@
         </p:nvSpPr>
         <p:spPr>
           <a:xfrm>
-            <a:off x="611029" y="4860335"/>
-            <a:ext cx="11199530" cy="1200329"/>
+            <a:off x="685800" y="1259494"/>
+            <a:ext cx="11199971" cy="2677656"/>
           </a:xfrm>
           <a:prstGeom prst="rect">
             <a:avLst/>
@@ -7389,23 +9088,23 @@
           <a:p>
             <a:pPr algn="just"/>
             <a:r>
-              <a:rPr lang="en-US" sz="1200" dirty="0">
-                <a:latin typeface="Arial" panose="020B0604020202020204" pitchFamily="34" charset="0"/>
-                <a:cs typeface="Arial" panose="020B0604020202020204" pitchFamily="34" charset="0"/>
-              </a:rPr>
-              <a:t>Comment results: describer the transfer functions. which is the FSR? How is it related to the ring perimeter? </a:t>
+              <a:rPr lang="es-ES" sz="1200" noProof="0" dirty="0">
+                <a:latin typeface="Arial" panose="020B0604020202020204" pitchFamily="34" charset="0"/>
+                <a:cs typeface="Arial" panose="020B0604020202020204" pitchFamily="34" charset="0"/>
+              </a:rPr>
+              <a:t>Para calcularlo, primero debemos de contrarrestar las pérdidas introducidas mediante la siguiente ecuación:</a:t>
             </a:r>
           </a:p>
           <a:p>
             <a:pPr algn="just"/>
-            <a:endParaRPr lang="en-US" sz="1200" dirty="0">
+            <a:endParaRPr lang="es-ES" sz="1200" dirty="0">
               <a:latin typeface="Arial" panose="020B0604020202020204" pitchFamily="34" charset="0"/>
               <a:cs typeface="Arial" panose="020B0604020202020204" pitchFamily="34" charset="0"/>
             </a:endParaRPr>
           </a:p>
           <a:p>
             <a:pPr algn="just"/>
-            <a:endParaRPr lang="en-US" sz="1200" dirty="0">
+            <a:endParaRPr lang="es-ES" sz="1200" noProof="0" dirty="0">
               <a:latin typeface="Arial" panose="020B0604020202020204" pitchFamily="34" charset="0"/>
               <a:cs typeface="Arial" panose="020B0604020202020204" pitchFamily="34" charset="0"/>
             </a:endParaRPr>
@@ -7413,23 +9112,297 @@
           <a:p>
             <a:pPr algn="just"/>
             <a:r>
-              <a:rPr lang="en-US" sz="1200" dirty="0">
-                <a:latin typeface="Arial" panose="020B0604020202020204" pitchFamily="34" charset="0"/>
-                <a:cs typeface="Arial" panose="020B0604020202020204" pitchFamily="34" charset="0"/>
-              </a:rPr>
-              <a:t>Show a numeric calculation of the FSR and length difference matching the results in the graph,</a:t>
+              <a:rPr lang="es-ES" sz="1200" dirty="0">
+                <a:latin typeface="Arial" panose="020B0604020202020204" pitchFamily="34" charset="0"/>
+                <a:cs typeface="Arial" panose="020B0604020202020204" pitchFamily="34" charset="0"/>
+              </a:rPr>
+              <a:t>También sabemos que el acoplador reparte la potencia de la siguiente manera: </a:t>
+            </a:r>
+            <a:r>
+              <a:rPr lang="es-ES" sz="1200" dirty="0" err="1">
+                <a:latin typeface="Arial" panose="020B0604020202020204" pitchFamily="34" charset="0"/>
+                <a:cs typeface="Arial" panose="020B0604020202020204" pitchFamily="34" charset="0"/>
+              </a:rPr>
+              <a:t>Pn</a:t>
+            </a:r>
+            <a:r>
+              <a:rPr lang="es-ES" sz="1200" dirty="0">
+                <a:latin typeface="Arial" panose="020B0604020202020204" pitchFamily="34" charset="0"/>
+                <a:cs typeface="Arial" panose="020B0604020202020204" pitchFamily="34" charset="0"/>
+              </a:rPr>
+              <a:t>=Ka y </a:t>
+            </a:r>
+            <a:r>
+              <a:rPr lang="es-ES" sz="1200" dirty="0" err="1">
+                <a:latin typeface="Arial" panose="020B0604020202020204" pitchFamily="34" charset="0"/>
+                <a:cs typeface="Arial" panose="020B0604020202020204" pitchFamily="34" charset="0"/>
+              </a:rPr>
+              <a:t>Ps</a:t>
+            </a:r>
+            <a:r>
+              <a:rPr lang="es-ES" sz="1200" dirty="0">
+                <a:latin typeface="Arial" panose="020B0604020202020204" pitchFamily="34" charset="0"/>
+                <a:cs typeface="Arial" panose="020B0604020202020204" pitchFamily="34" charset="0"/>
+              </a:rPr>
+              <a:t>=1-Ka, con esto obtenemos una Ka de 0.9943, por lo que podemos concluir que necesitamos un Ka=0.9943 para obtener un ER teóricamente infinito</a:t>
             </a:r>
           </a:p>
           <a:p>
             <a:pPr algn="just"/>
-            <a:endParaRPr lang="en-US" sz="1200" dirty="0">
+            <a:endParaRPr lang="es-ES" sz="1200" noProof="0" dirty="0">
               <a:latin typeface="Arial" panose="020B0604020202020204" pitchFamily="34" charset="0"/>
               <a:cs typeface="Arial" panose="020B0604020202020204" pitchFamily="34" charset="0"/>
             </a:endParaRPr>
           </a:p>
           <a:p>
             <a:pPr algn="just"/>
-            <a:endParaRPr lang="en-US" sz="1200" dirty="0">
+            <a:endParaRPr lang="es-ES" sz="1200" dirty="0">
+              <a:latin typeface="Arial" panose="020B0604020202020204" pitchFamily="34" charset="0"/>
+              <a:cs typeface="Arial" panose="020B0604020202020204" pitchFamily="34" charset="0"/>
+            </a:endParaRPr>
+          </a:p>
+          <a:p>
+            <a:pPr algn="just"/>
+            <a:endParaRPr lang="es-ES" sz="1200" noProof="0" dirty="0">
+              <a:latin typeface="Arial" panose="020B0604020202020204" pitchFamily="34" charset="0"/>
+              <a:cs typeface="Arial" panose="020B0604020202020204" pitchFamily="34" charset="0"/>
+            </a:endParaRPr>
+          </a:p>
+          <a:p>
+            <a:pPr algn="just"/>
+            <a:endParaRPr lang="es-ES" sz="1200" dirty="0">
+              <a:latin typeface="Arial" panose="020B0604020202020204" pitchFamily="34" charset="0"/>
+              <a:cs typeface="Arial" panose="020B0604020202020204" pitchFamily="34" charset="0"/>
+            </a:endParaRPr>
+          </a:p>
+          <a:p>
+            <a:pPr algn="just"/>
+            <a:endParaRPr lang="es-ES" sz="1200" noProof="0" dirty="0">
+              <a:latin typeface="Arial" panose="020B0604020202020204" pitchFamily="34" charset="0"/>
+              <a:cs typeface="Arial" panose="020B0604020202020204" pitchFamily="34" charset="0"/>
+            </a:endParaRPr>
+          </a:p>
+          <a:p>
+            <a:pPr algn="just"/>
+            <a:endParaRPr lang="es-ES" sz="1200" dirty="0">
+              <a:latin typeface="Arial" panose="020B0604020202020204" pitchFamily="34" charset="0"/>
+              <a:cs typeface="Arial" panose="020B0604020202020204" pitchFamily="34" charset="0"/>
+            </a:endParaRPr>
+          </a:p>
+          <a:p>
+            <a:pPr algn="just"/>
+            <a:endParaRPr lang="es-ES" sz="1200" noProof="0" dirty="0">
+              <a:latin typeface="Arial" panose="020B0604020202020204" pitchFamily="34" charset="0"/>
+              <a:cs typeface="Arial" panose="020B0604020202020204" pitchFamily="34" charset="0"/>
+            </a:endParaRPr>
+          </a:p>
+          <a:p>
+            <a:pPr algn="just"/>
+            <a:endParaRPr lang="es-ES" sz="1200" dirty="0">
+              <a:latin typeface="Arial" panose="020B0604020202020204" pitchFamily="34" charset="0"/>
+              <a:cs typeface="Arial" panose="020B0604020202020204" pitchFamily="34" charset="0"/>
+            </a:endParaRPr>
+          </a:p>
+          <a:p>
+            <a:pPr algn="just"/>
+            <a:endParaRPr lang="es-ES" sz="1200" noProof="0" dirty="0">
+              <a:latin typeface="Arial" panose="020B0604020202020204" pitchFamily="34" charset="0"/>
+              <a:cs typeface="Arial" panose="020B0604020202020204" pitchFamily="34" charset="0"/>
+            </a:endParaRPr>
+          </a:p>
+        </p:txBody>
+      </p:sp>
+      <p:pic>
+        <p:nvPicPr>
+          <p:cNvPr id="8" name="Picture 7">
+            <a:extLst>
+              <a:ext uri="{FF2B5EF4-FFF2-40B4-BE49-F238E27FC236}">
+                <a16:creationId xmlns:a16="http://schemas.microsoft.com/office/drawing/2014/main" id="{FC913D25-291D-BA8E-2B9C-77E95491FA74}"/>
+              </a:ext>
+            </a:extLst>
+          </p:cNvPr>
+          <p:cNvPicPr>
+            <a:picLocks noChangeAspect="1"/>
+          </p:cNvPicPr>
+          <p:nvPr/>
+        </p:nvPicPr>
+        <p:blipFill>
+          <a:blip r:embed="rId3"/>
+          <a:stretch>
+            <a:fillRect/>
+          </a:stretch>
+        </p:blipFill>
+        <p:spPr>
+          <a:xfrm>
+            <a:off x="8077200" y="1257885"/>
+            <a:ext cx="1609908" cy="542154"/>
+          </a:xfrm>
+          <a:prstGeom prst="rect">
+            <a:avLst/>
+          </a:prstGeom>
+        </p:spPr>
+      </p:pic>
+    </p:spTree>
+    <p:extLst>
+      <p:ext uri="{BB962C8B-B14F-4D97-AF65-F5344CB8AC3E}">
+        <p14:creationId xmlns:p14="http://schemas.microsoft.com/office/powerpoint/2010/main" val="1039324309"/>
+      </p:ext>
+    </p:extLst>
+  </p:cSld>
+  <p:clrMapOvr>
+    <a:masterClrMapping/>
+  </p:clrMapOvr>
+</p:sld>
+</file>
+
+<file path=ppt/slides/slide8.xml><?xml version="1.0" encoding="utf-8"?>
+<p:sld xmlns:a="http://schemas.openxmlformats.org/drawingml/2006/main" xmlns:r="http://schemas.openxmlformats.org/officeDocument/2006/relationships" xmlns:p="http://schemas.openxmlformats.org/presentationml/2006/main">
+  <p:cSld>
+    <p:spTree>
+      <p:nvGrpSpPr>
+        <p:cNvPr id="1" name=""/>
+        <p:cNvGrpSpPr/>
+        <p:nvPr/>
+      </p:nvGrpSpPr>
+      <p:grpSpPr>
+        <a:xfrm>
+          <a:off x="0" y="0"/>
+          <a:ext cx="0" cy="0"/>
+          <a:chOff x="0" y="0"/>
+          <a:chExt cx="0" cy="0"/>
+        </a:xfrm>
+      </p:grpSpPr>
+      <p:sp>
+        <p:nvSpPr>
+          <p:cNvPr id="5" name="Marcador de pie de página 4">
+            <a:extLst>
+              <a:ext uri="{FF2B5EF4-FFF2-40B4-BE49-F238E27FC236}">
+                <a16:creationId xmlns:a16="http://schemas.microsoft.com/office/drawing/2014/main" id="{F929251A-3DC4-36B2-3FB3-341378364BED}"/>
+              </a:ext>
+            </a:extLst>
+          </p:cNvPr>
+          <p:cNvSpPr>
+            <a:spLocks noGrp="1"/>
+          </p:cNvSpPr>
+          <p:nvPr>
+            <p:ph type="ftr" sz="quarter" idx="5"/>
+          </p:nvPr>
+        </p:nvSpPr>
+        <p:spPr/>
+        <p:txBody>
+          <a:bodyPr/>
+          <a:lstStyle/>
+          <a:p>
+            <a:r>
+              <a:rPr lang="es-ES" noProof="0" dirty="0"/>
+              <a:t>LAB 3.0. CIRCUITS &amp; COMPACT MODELS</a:t>
+            </a:r>
+          </a:p>
+        </p:txBody>
+      </p:sp>
+      <p:sp>
+        <p:nvSpPr>
+          <p:cNvPr id="6" name="Marcador de número de diapositiva 5">
+            <a:extLst>
+              <a:ext uri="{FF2B5EF4-FFF2-40B4-BE49-F238E27FC236}">
+                <a16:creationId xmlns:a16="http://schemas.microsoft.com/office/drawing/2014/main" id="{8E91A34C-DF76-97CF-3EFD-546BC64A2184}"/>
+              </a:ext>
+            </a:extLst>
+          </p:cNvPr>
+          <p:cNvSpPr>
+            <a:spLocks noGrp="1"/>
+          </p:cNvSpPr>
+          <p:nvPr>
+            <p:ph type="sldNum" sz="quarter" idx="7"/>
+          </p:nvPr>
+        </p:nvSpPr>
+        <p:spPr/>
+        <p:txBody>
+          <a:bodyPr/>
+          <a:lstStyle/>
+          <a:p>
+            <a:fld id="{C2F52289-4012-4053-9770-FE82CEB9514F}" type="slidenum">
+              <a:rPr lang="es-ES" noProof="0" smtClean="0"/>
+              <a:pPr/>
+              <a:t>8</a:t>
+            </a:fld>
+            <a:endParaRPr lang="es-ES" noProof="0" dirty="0"/>
+          </a:p>
+        </p:txBody>
+      </p:sp>
+      <p:sp>
+        <p:nvSpPr>
+          <p:cNvPr id="8" name="CuadroTexto 7">
+            <a:extLst>
+              <a:ext uri="{FF2B5EF4-FFF2-40B4-BE49-F238E27FC236}">
+                <a16:creationId xmlns:a16="http://schemas.microsoft.com/office/drawing/2014/main" id="{D9601617-351E-AE1A-1F4D-693F2EA59361}"/>
+              </a:ext>
+            </a:extLst>
+          </p:cNvPr>
+          <p:cNvSpPr txBox="1"/>
+          <p:nvPr/>
+        </p:nvSpPr>
+        <p:spPr>
+          <a:xfrm>
+            <a:off x="611029" y="4860335"/>
+            <a:ext cx="11199530" cy="1384995"/>
+          </a:xfrm>
+          <a:prstGeom prst="rect">
+            <a:avLst/>
+          </a:prstGeom>
+          <a:solidFill>
+            <a:schemeClr val="bg1">
+              <a:lumMod val="95000"/>
+            </a:schemeClr>
+          </a:solidFill>
+          <a:ln w="28575">
+            <a:solidFill>
+              <a:srgbClr val="E0700D"/>
+            </a:solidFill>
+          </a:ln>
+        </p:spPr>
+        <p:txBody>
+          <a:bodyPr wrap="square" rtlCol="0">
+            <a:spAutoFit/>
+          </a:bodyPr>
+          <a:lstStyle/>
+          <a:p>
+            <a:pPr algn="just"/>
+            <a:r>
+              <a:rPr lang="es-ES" sz="1200" noProof="0" dirty="0">
+                <a:latin typeface="Arial" panose="020B0604020202020204" pitchFamily="34" charset="0"/>
+                <a:cs typeface="Arial" panose="020B0604020202020204" pitchFamily="34" charset="0"/>
+              </a:rPr>
+              <a:t>La función de transferencia muestra una transmisión prácticamente total, excepto en las muescas que aparecen cada 23 nm. Estas aparecen por la colisión de las señales que encontramos en el anillo y en el brazo corto, que en estas ciertas longitudes de onda tienen interferencia destructiva. El FSR podemos observarlo de la gráfica, ya que es la distancia entre los mínimos, siendo este de unos 23 nm. Por la ecuación mostrada anteriormente para calcular el FSR, podemos deducir que cuanto más grande es el perímetro del anillo, más pequeño será el FSR, pasando justamente lo contrario al hacer el anillo más pequeño.</a:t>
+            </a:r>
+          </a:p>
+          <a:p>
+            <a:pPr algn="just"/>
+            <a:r>
+              <a:rPr lang="es-ES" sz="1200" dirty="0">
+                <a:latin typeface="Arial" panose="020B0604020202020204" pitchFamily="34" charset="0"/>
+                <a:cs typeface="Arial" panose="020B0604020202020204" pitchFamily="34" charset="0"/>
+              </a:rPr>
+              <a:t>Usando la misma ecuación utilizada en apartados anteriores:                                  Calculando para una lambda de 1546 nm y una L de 50 </a:t>
+            </a:r>
+            <a:r>
+              <a:rPr lang="es-ES" sz="1200" dirty="0" err="1">
+                <a:latin typeface="Arial" panose="020B0604020202020204" pitchFamily="34" charset="0"/>
+                <a:cs typeface="Arial" panose="020B0604020202020204" pitchFamily="34" charset="0"/>
+              </a:rPr>
+              <a:t>um</a:t>
+            </a:r>
+            <a:r>
+              <a:rPr lang="es-ES" sz="1200" dirty="0">
+                <a:latin typeface="Arial" panose="020B0604020202020204" pitchFamily="34" charset="0"/>
+                <a:cs typeface="Arial" panose="020B0604020202020204" pitchFamily="34" charset="0"/>
+              </a:rPr>
+              <a:t>, obtenemos una FSR para este caso de 23.9 nm</a:t>
+            </a:r>
+          </a:p>
+          <a:p>
+            <a:pPr algn="just"/>
+            <a:endParaRPr lang="es-ES" sz="1200" noProof="0" dirty="0">
               <a:latin typeface="Arial" panose="020B0604020202020204" pitchFamily="34" charset="0"/>
               <a:cs typeface="Arial" panose="020B0604020202020204" pitchFamily="34" charset="0"/>
             </a:endParaRPr>
@@ -7484,7 +9457,7 @@
           <a:lstStyle/>
           <a:p>
             <a:pPr algn="ctr"/>
-            <a:endParaRPr lang="en-US"/>
+            <a:endParaRPr lang="es-ES" noProof="0" dirty="0"/>
           </a:p>
         </p:txBody>
       </p:sp>
@@ -7518,41 +9491,41 @@
           <a:p>
             <a:pPr algn="ctr"/>
             <a:r>
-              <a:rPr lang="es-ES" sz="2000" dirty="0"/>
+              <a:rPr lang="es-ES" sz="2000" noProof="0" dirty="0"/>
               <a:t>Single ring</a:t>
             </a:r>
           </a:p>
           <a:p>
             <a:pPr algn="ctr"/>
             <a:r>
-              <a:rPr lang="es-ES" sz="2000" dirty="0"/>
+              <a:rPr lang="es-ES" sz="2000" noProof="0" dirty="0"/>
               <a:t>transfer </a:t>
             </a:r>
             <a:r>
-              <a:rPr lang="es-ES" sz="2000" dirty="0" err="1"/>
+              <a:rPr lang="es-ES" sz="2000" noProof="0" dirty="0" err="1"/>
               <a:t>functions</a:t>
             </a:r>
-            <a:endParaRPr lang="es-ES" sz="2000" dirty="0"/>
+            <a:endParaRPr lang="es-ES" sz="2000" noProof="0" dirty="0"/>
           </a:p>
           <a:p>
             <a:pPr algn="ctr"/>
-            <a:endParaRPr lang="es-ES" sz="2000" dirty="0"/>
+            <a:endParaRPr lang="es-ES" sz="2000" noProof="0" dirty="0"/>
           </a:p>
           <a:p>
             <a:pPr algn="ctr"/>
             <a:r>
-              <a:rPr lang="es-ES" sz="2000" dirty="0" err="1"/>
+              <a:rPr lang="es-ES" sz="2000" noProof="0" dirty="0" err="1"/>
               <a:t>Logaritmic</a:t>
             </a:r>
             <a:r>
-              <a:rPr lang="es-ES" sz="2000" dirty="0"/>
+              <a:rPr lang="es-ES" sz="2000" noProof="0" dirty="0"/>
               <a:t> </a:t>
             </a:r>
             <a:r>
-              <a:rPr lang="es-ES" sz="2000" dirty="0" err="1"/>
+              <a:rPr lang="es-ES" sz="2000" noProof="0" dirty="0" err="1"/>
               <a:t>units</a:t>
             </a:r>
-            <a:endParaRPr lang="en-US" sz="2000" dirty="0"/>
+            <a:endParaRPr lang="es-ES" sz="2000" noProof="0" dirty="0"/>
           </a:p>
         </p:txBody>
       </p:sp>
@@ -7609,19 +9582,29 @@
           <a:p>
             <a:pPr algn="just"/>
             <a:r>
-              <a:rPr lang="en-US" sz="1200" b="1" dirty="0">
+              <a:rPr lang="es-ES" sz="1200" b="1" noProof="0" dirty="0" err="1">
                 <a:solidFill>
                   <a:schemeClr val="tx1"/>
                 </a:solidFill>
                 <a:latin typeface="Arial" panose="020B0604020202020204" pitchFamily="34" charset="0"/>
                 <a:cs typeface="Arial" panose="020B0604020202020204" pitchFamily="34" charset="0"/>
               </a:rPr>
-              <a:t>Hints:</a:t>
+              <a:t>Hints</a:t>
+            </a:r>
+            <a:r>
+              <a:rPr lang="es-ES" sz="1200" b="1" noProof="0" dirty="0">
+                <a:solidFill>
+                  <a:schemeClr val="tx1"/>
+                </a:solidFill>
+                <a:latin typeface="Arial" panose="020B0604020202020204" pitchFamily="34" charset="0"/>
+                <a:cs typeface="Arial" panose="020B0604020202020204" pitchFamily="34" charset="0"/>
+              </a:rPr>
+              <a:t>:</a:t>
             </a:r>
           </a:p>
           <a:p>
             <a:pPr algn="just"/>
-            <a:endParaRPr lang="en-US" sz="1200" b="1" dirty="0">
+            <a:endParaRPr lang="es-ES" sz="1200" b="1" noProof="0" dirty="0">
               <a:solidFill>
                 <a:schemeClr val="tx1"/>
               </a:solidFill>
@@ -7632,47 +9615,37 @@
           <a:p>
             <a:pPr algn="just"/>
             <a:r>
-              <a:rPr lang="en-US" sz="1200" dirty="0">
+              <a:rPr lang="es-ES" sz="1200" noProof="0" dirty="0" err="1">
                 <a:solidFill>
                   <a:schemeClr val="tx1"/>
                 </a:solidFill>
                 <a:latin typeface="Arial" panose="020B0604020202020204" pitchFamily="34" charset="0"/>
                 <a:cs typeface="Arial" panose="020B0604020202020204" pitchFamily="34" charset="0"/>
               </a:rPr>
-              <a:t>None </a:t>
-            </a:r>
-            <a:r>
-              <a:rPr lang="en-US" sz="1200" dirty="0">
+              <a:t>None</a:t>
+            </a:r>
+            <a:r>
+              <a:rPr lang="es-ES" sz="1200" noProof="0" dirty="0">
                 <a:solidFill>
                   <a:schemeClr val="tx1"/>
                 </a:solidFill>
                 <a:latin typeface="Arial" panose="020B0604020202020204" pitchFamily="34" charset="0"/>
                 <a:cs typeface="Arial" panose="020B0604020202020204" pitchFamily="34" charset="0"/>
+              </a:rPr>
+              <a:t> </a:t>
+            </a:r>
+            <a:r>
+              <a:rPr lang="es-ES" sz="1200" noProof="0" dirty="0">
+                <a:solidFill>
+                  <a:schemeClr val="tx1"/>
+                </a:solidFill>
+                <a:latin typeface="Arial" panose="020B0604020202020204" pitchFamily="34" charset="0"/>
+                <a:cs typeface="Arial" panose="020B0604020202020204" pitchFamily="34" charset="0"/>
                 <a:sym typeface="Wingdings" pitchFamily="2" charset="2"/>
               </a:rPr>
               <a:t> </a:t>
             </a:r>
-            <a:endParaRPr lang="en-US" sz="1200" dirty="0">
-              <a:solidFill>
-                <a:schemeClr val="tx1"/>
-              </a:solidFill>
-              <a:latin typeface="Arial" panose="020B0604020202020204" pitchFamily="34" charset="0"/>
-              <a:cs typeface="Arial" panose="020B0604020202020204" pitchFamily="34" charset="0"/>
-            </a:endParaRPr>
-          </a:p>
-          <a:p>
-            <a:pPr algn="just"/>
-            <a:endParaRPr lang="en-US" sz="1200" dirty="0">
-              <a:solidFill>
-                <a:schemeClr val="tx1"/>
-              </a:solidFill>
-              <a:latin typeface="Arial" panose="020B0604020202020204" pitchFamily="34" charset="0"/>
-              <a:cs typeface="Arial" panose="020B0604020202020204" pitchFamily="34" charset="0"/>
-            </a:endParaRPr>
-          </a:p>
-          <a:p>
-            <a:pPr algn="just"/>
-            <a:endParaRPr lang="en-US" sz="1200" dirty="0">
+            <a:endParaRPr lang="es-ES" sz="1200" noProof="0" dirty="0">
               <a:solidFill>
                 <a:schemeClr val="tx1"/>
               </a:solidFill>
@@ -7730,7 +9703,7 @@
           <a:lstStyle/>
           <a:p>
             <a:pPr algn="ctr"/>
-            <a:endParaRPr lang="en-US"/>
+            <a:endParaRPr lang="es-ES" noProof="0" dirty="0"/>
           </a:p>
         </p:txBody>
       </p:sp>
@@ -7764,37 +9737,37 @@
           <a:p>
             <a:pPr algn="ctr"/>
             <a:r>
-              <a:rPr lang="es-ES" sz="2000" dirty="0"/>
+              <a:rPr lang="es-ES" sz="2000" noProof="0" dirty="0"/>
               <a:t>Single ring</a:t>
             </a:r>
           </a:p>
           <a:p>
             <a:pPr algn="ctr"/>
             <a:r>
-              <a:rPr lang="es-ES" sz="2000" dirty="0"/>
+              <a:rPr lang="es-ES" sz="2000" noProof="0" dirty="0"/>
               <a:t>transfer </a:t>
             </a:r>
             <a:r>
-              <a:rPr lang="es-ES" sz="2000" dirty="0" err="1"/>
+              <a:rPr lang="es-ES" sz="2000" noProof="0" dirty="0" err="1"/>
               <a:t>functions</a:t>
             </a:r>
-            <a:endParaRPr lang="es-ES" sz="2000" dirty="0"/>
+            <a:endParaRPr lang="es-ES" sz="2000" noProof="0" dirty="0"/>
           </a:p>
           <a:p>
             <a:pPr algn="ctr"/>
-            <a:endParaRPr lang="es-ES" sz="2000" dirty="0"/>
+            <a:endParaRPr lang="es-ES" sz="2000" noProof="0" dirty="0"/>
           </a:p>
           <a:p>
             <a:pPr algn="ctr"/>
             <a:r>
-              <a:rPr lang="es-ES" sz="2000" dirty="0"/>
+              <a:rPr lang="es-ES" sz="2000" noProof="0" dirty="0"/>
               <a:t>Linear </a:t>
             </a:r>
             <a:r>
-              <a:rPr lang="es-ES" sz="2000" dirty="0" err="1"/>
+              <a:rPr lang="es-ES" sz="2000" noProof="0" dirty="0" err="1"/>
               <a:t>units</a:t>
             </a:r>
-            <a:endParaRPr lang="en-US" sz="2000" dirty="0"/>
+            <a:endParaRPr lang="es-ES" sz="2000" noProof="0" dirty="0"/>
           </a:p>
         </p:txBody>
       </p:sp>
@@ -7880,9 +9853,26 @@
               </a:spcBef>
             </a:pPr>
             <a:r>
-              <a:rPr lang="en-US" sz="2500" kern="0" dirty="0"/>
-              <a:t>Learning outcome #4 – Ring Resonator</a:t>
-            </a:r>
+              <a:rPr lang="es-ES" sz="2500" kern="0" noProof="0" dirty="0" err="1"/>
+              <a:t>Learning</a:t>
+            </a:r>
+            <a:r>
+              <a:rPr lang="es-ES" sz="2500" kern="0" noProof="0" dirty="0"/>
+              <a:t> </a:t>
+            </a:r>
+            <a:r>
+              <a:rPr lang="es-ES" sz="2500" kern="0" noProof="0" dirty="0" err="1"/>
+              <a:t>outcome</a:t>
+            </a:r>
+            <a:r>
+              <a:rPr lang="es-ES" sz="2500" kern="0" noProof="0" dirty="0"/>
+              <a:t> #4 – Ring </a:t>
+            </a:r>
+            <a:r>
+              <a:rPr lang="es-ES" sz="2500" kern="0" noProof="0" dirty="0" err="1"/>
+              <a:t>Resonator</a:t>
+            </a:r>
+            <a:endParaRPr lang="es-ES" sz="2500" kern="0" noProof="0" dirty="0"/>
           </a:p>
           <a:p>
             <a:pPr marL="12700">
@@ -7891,15 +9881,175 @@
               </a:spcBef>
             </a:pPr>
             <a:r>
-              <a:rPr lang="en-US" b="0" kern="0" spc="-5" dirty="0">
+              <a:rPr lang="es-ES" b="0" kern="0" spc="-5" noProof="0" dirty="0">
                 <a:latin typeface="+mj-lt"/>
                 <a:cs typeface="Lucida Sans"/>
               </a:rPr>
-              <a:t>Single ring resonator – most simple case Constant coupler K (no wavelength variation)</a:t>
-            </a:r>
-          </a:p>
-        </p:txBody>
-      </p:sp>
+              <a:t>Single ring </a:t>
+            </a:r>
+            <a:r>
+              <a:rPr lang="es-ES" b="0" kern="0" spc="-5" noProof="0" dirty="0" err="1">
+                <a:latin typeface="+mj-lt"/>
+                <a:cs typeface="Lucida Sans"/>
+              </a:rPr>
+              <a:t>resonator</a:t>
+            </a:r>
+            <a:r>
+              <a:rPr lang="es-ES" b="0" kern="0" spc="-5" noProof="0" dirty="0">
+                <a:latin typeface="+mj-lt"/>
+                <a:cs typeface="Lucida Sans"/>
+              </a:rPr>
+              <a:t> – </a:t>
+            </a:r>
+            <a:r>
+              <a:rPr lang="es-ES" b="0" kern="0" spc="-5" noProof="0" dirty="0" err="1">
+                <a:latin typeface="+mj-lt"/>
+                <a:cs typeface="Lucida Sans"/>
+              </a:rPr>
+              <a:t>most</a:t>
+            </a:r>
+            <a:r>
+              <a:rPr lang="es-ES" b="0" kern="0" spc="-5" noProof="0" dirty="0">
+                <a:latin typeface="+mj-lt"/>
+                <a:cs typeface="Lucida Sans"/>
+              </a:rPr>
+              <a:t> simple case Constant </a:t>
+            </a:r>
+            <a:r>
+              <a:rPr lang="es-ES" b="0" kern="0" spc="-5" noProof="0" dirty="0" err="1">
+                <a:latin typeface="+mj-lt"/>
+                <a:cs typeface="Lucida Sans"/>
+              </a:rPr>
+              <a:t>coupler</a:t>
+            </a:r>
+            <a:r>
+              <a:rPr lang="es-ES" b="0" kern="0" spc="-5" noProof="0" dirty="0">
+                <a:latin typeface="+mj-lt"/>
+                <a:cs typeface="Lucida Sans"/>
+              </a:rPr>
+              <a:t> K (no </a:t>
+            </a:r>
+            <a:r>
+              <a:rPr lang="es-ES" b="0" kern="0" spc="-5" noProof="0" dirty="0" err="1">
+                <a:latin typeface="+mj-lt"/>
+                <a:cs typeface="Lucida Sans"/>
+              </a:rPr>
+              <a:t>wavelength</a:t>
+            </a:r>
+            <a:r>
+              <a:rPr lang="es-ES" b="0" kern="0" spc="-5" noProof="0" dirty="0">
+                <a:latin typeface="+mj-lt"/>
+                <a:cs typeface="Lucida Sans"/>
+              </a:rPr>
+              <a:t> </a:t>
+            </a:r>
+            <a:r>
+              <a:rPr lang="es-ES" b="0" kern="0" spc="-5" noProof="0" dirty="0" err="1">
+                <a:latin typeface="+mj-lt"/>
+                <a:cs typeface="Lucida Sans"/>
+              </a:rPr>
+              <a:t>variation</a:t>
+            </a:r>
+            <a:r>
+              <a:rPr lang="es-ES" b="0" kern="0" spc="-5" noProof="0" dirty="0">
+                <a:latin typeface="+mj-lt"/>
+                <a:cs typeface="Lucida Sans"/>
+              </a:rPr>
+              <a:t>)</a:t>
+            </a:r>
+          </a:p>
+        </p:txBody>
+      </p:sp>
+      <p:pic>
+        <p:nvPicPr>
+          <p:cNvPr id="4" name="Picture 3">
+            <a:extLst>
+              <a:ext uri="{FF2B5EF4-FFF2-40B4-BE49-F238E27FC236}">
+                <a16:creationId xmlns:a16="http://schemas.microsoft.com/office/drawing/2014/main" id="{0D75640B-CC7F-4E84-8139-E6C80E2E5692}"/>
+              </a:ext>
+            </a:extLst>
+          </p:cNvPr>
+          <p:cNvPicPr>
+            <a:picLocks noChangeAspect="1"/>
+          </p:cNvPicPr>
+          <p:nvPr/>
+        </p:nvPicPr>
+        <p:blipFill>
+          <a:blip r:embed="rId3"/>
+          <a:stretch>
+            <a:fillRect/>
+          </a:stretch>
+        </p:blipFill>
+        <p:spPr>
+          <a:xfrm>
+            <a:off x="676835" y="1981200"/>
+            <a:ext cx="3718983" cy="2133600"/>
+          </a:xfrm>
+          <a:prstGeom prst="rect">
+            <a:avLst/>
+          </a:prstGeom>
+        </p:spPr>
+      </p:pic>
+      <p:pic>
+        <p:nvPicPr>
+          <p:cNvPr id="13" name="Picture 12">
+            <a:extLst>
+              <a:ext uri="{FF2B5EF4-FFF2-40B4-BE49-F238E27FC236}">
+                <a16:creationId xmlns:a16="http://schemas.microsoft.com/office/drawing/2014/main" id="{D03F6282-240F-A758-720D-B57885D54EBC}"/>
+              </a:ext>
+            </a:extLst>
+          </p:cNvPr>
+          <p:cNvPicPr>
+            <a:picLocks noChangeAspect="1"/>
+          </p:cNvPicPr>
+          <p:nvPr/>
+        </p:nvPicPr>
+        <p:blipFill>
+          <a:blip r:embed="rId4"/>
+          <a:stretch>
+            <a:fillRect/>
+          </a:stretch>
+        </p:blipFill>
+        <p:spPr>
+          <a:xfrm>
+            <a:off x="4937579" y="1866083"/>
+            <a:ext cx="3231239" cy="2410607"/>
+          </a:xfrm>
+          <a:prstGeom prst="rect">
+            <a:avLst/>
+          </a:prstGeom>
+        </p:spPr>
+      </p:pic>
+      <p:pic>
+        <p:nvPicPr>
+          <p:cNvPr id="7" name="Picture 6">
+            <a:extLst>
+              <a:ext uri="{FF2B5EF4-FFF2-40B4-BE49-F238E27FC236}">
+                <a16:creationId xmlns:a16="http://schemas.microsoft.com/office/drawing/2014/main" id="{7F919223-2BB8-E9B9-B62A-2BEFB05ACB01}"/>
+              </a:ext>
+            </a:extLst>
+          </p:cNvPr>
+          <p:cNvPicPr>
+            <a:picLocks noChangeAspect="1"/>
+          </p:cNvPicPr>
+          <p:nvPr/>
+        </p:nvPicPr>
+        <p:blipFill>
+          <a:blip r:embed="rId5"/>
+          <a:stretch>
+            <a:fillRect/>
+          </a:stretch>
+        </p:blipFill>
+        <p:spPr>
+          <a:xfrm>
+            <a:off x="4937579" y="5642158"/>
+            <a:ext cx="1384960" cy="589725"/>
+          </a:xfrm>
+          <a:prstGeom prst="rect">
+            <a:avLst/>
+          </a:prstGeom>
+        </p:spPr>
+      </p:pic>
     </p:spTree>
     <p:extLst>
       <p:ext uri="{BB962C8B-B14F-4D97-AF65-F5344CB8AC3E}">
@@ -7913,7 +10063,7 @@
 </p:sld>
 </file>
 
-<file path=ppt/slides/slide8.xml><?xml version="1.0" encoding="utf-8"?>
+<file path=ppt/slides/slide9.xml><?xml version="1.0" encoding="utf-8"?>
 <p:sld xmlns:a="http://schemas.openxmlformats.org/drawingml/2006/main" xmlns:r="http://schemas.openxmlformats.org/officeDocument/2006/relationships" xmlns:p="http://schemas.openxmlformats.org/presentationml/2006/main">
   <p:cSld>
     <p:spTree>
@@ -7958,7 +10108,7 @@
           <a:lstStyle/>
           <a:p>
             <a:r>
-              <a:rPr lang="en-US"/>
+              <a:rPr lang="es-ES" noProof="0" dirty="0"/>
               <a:t>LAB 3.0. CIRCUITS &amp; COMPACT MODELS</a:t>
             </a:r>
           </a:p>
@@ -7986,11 +10136,11 @@
           <a:lstStyle/>
           <a:p>
             <a:fld id="{C2F52289-4012-4053-9770-FE82CEB9514F}" type="slidenum">
-              <a:rPr lang="en-US" smtClean="0"/>
+              <a:rPr lang="es-ES" noProof="0" smtClean="0"/>
               <a:pPr/>
-              <a:t>8</a:t>
+              <a:t>9</a:t>
             </a:fld>
-            <a:endParaRPr lang="en-US" dirty="0"/>
+            <a:endParaRPr lang="es-ES" noProof="0" dirty="0"/>
           </a:p>
         </p:txBody>
       </p:sp>
@@ -8008,8 +10158,8 @@
         </p:nvSpPr>
         <p:spPr>
           <a:xfrm>
-            <a:off x="611029" y="4860335"/>
-            <a:ext cx="11199530" cy="1200329"/>
+            <a:off x="611028" y="4670706"/>
+            <a:ext cx="11199530" cy="1569660"/>
           </a:xfrm>
           <a:prstGeom prst="rect">
             <a:avLst/>
@@ -8033,38 +10183,55 @@
           <a:p>
             <a:pPr algn="just"/>
             <a:r>
-              <a:rPr lang="en-US" sz="1200" dirty="0">
-                <a:latin typeface="Arial" panose="020B0604020202020204" pitchFamily="34" charset="0"/>
-                <a:cs typeface="Arial" panose="020B0604020202020204" pitchFamily="34" charset="0"/>
-              </a:rPr>
-              <a:t>Comment results: describer the transfer function. How’s the dependence on the coupler coefficient? Calculate the Extinction Ratio. How would you achieve critical coupling for the latter design? Justify your answers.</a:t>
+              <a:rPr lang="es-ES" sz="1200" noProof="0" dirty="0">
+                <a:latin typeface="Arial" panose="020B0604020202020204" pitchFamily="34" charset="0"/>
+                <a:cs typeface="Arial" panose="020B0604020202020204" pitchFamily="34" charset="0"/>
+              </a:rPr>
+              <a:t>En este caso se ha utilizado un anillo acoplado a dos guías de onda. En la función de transferencia podemos ver que sí aparecen las muescas, pero en este caso se invierten para la segunda </a:t>
+            </a:r>
+            <a:r>
+              <a:rPr lang="es-ES" sz="1200" dirty="0">
+                <a:latin typeface="Arial" panose="020B0604020202020204" pitchFamily="34" charset="0"/>
+                <a:cs typeface="Arial" panose="020B0604020202020204" pitchFamily="34" charset="0"/>
+              </a:rPr>
+              <a:t>g</a:t>
+            </a:r>
+            <a:r>
+              <a:rPr lang="es-ES" sz="1200" noProof="0" dirty="0" err="1">
+                <a:latin typeface="Arial" panose="020B0604020202020204" pitchFamily="34" charset="0"/>
+                <a:cs typeface="Arial" panose="020B0604020202020204" pitchFamily="34" charset="0"/>
+              </a:rPr>
+              <a:t>uía</a:t>
+            </a:r>
+            <a:r>
+              <a:rPr lang="es-ES" sz="1200" noProof="0" dirty="0">
+                <a:latin typeface="Arial" panose="020B0604020202020204" pitchFamily="34" charset="0"/>
+                <a:cs typeface="Arial" panose="020B0604020202020204" pitchFamily="34" charset="0"/>
+              </a:rPr>
+              <a:t> de onda. De esta forma en brazo corto tenemos un filtro elimina banda y en el brazo después del anillo tenemos un filtro paso banda. Al tener un coeficiente de acoplo bajo, la luz se queda más tiempo dentro del anillo y aumentamos el factor de calidad, esto implica que las muescas serán más estrechas. Si tenemos un coeficiente alto ocurre lo contrario, la luz se sale rápidamente del anillo y obtenemos un factor de calidad más bajo, teniendo un mayor ancho de banda en las bandas de paso.</a:t>
             </a:r>
           </a:p>
           <a:p>
             <a:pPr algn="just"/>
-            <a:endParaRPr lang="en-US" sz="1200" dirty="0">
-              <a:latin typeface="Arial" panose="020B0604020202020204" pitchFamily="34" charset="0"/>
-              <a:cs typeface="Arial" panose="020B0604020202020204" pitchFamily="34" charset="0"/>
-            </a:endParaRPr>
+            <a:r>
+              <a:rPr lang="es-ES" sz="1200" dirty="0">
+                <a:latin typeface="Arial" panose="020B0604020202020204" pitchFamily="34" charset="0"/>
+                <a:cs typeface="Arial" panose="020B0604020202020204" pitchFamily="34" charset="0"/>
+              </a:rPr>
+              <a:t>Si la transmisión máxima es 0 dB y la mínima es de -80 dB, tenemos una ER de 80 dB.</a:t>
+            </a:r>
           </a:p>
           <a:p>
             <a:pPr algn="just"/>
-            <a:endParaRPr lang="en-US" sz="1200" dirty="0">
-              <a:latin typeface="Arial" panose="020B0604020202020204" pitchFamily="34" charset="0"/>
-              <a:cs typeface="Arial" panose="020B0604020202020204" pitchFamily="34" charset="0"/>
-            </a:endParaRPr>
-          </a:p>
-          <a:p>
-            <a:pPr algn="just"/>
-            <a:endParaRPr lang="en-US" sz="1200" dirty="0">
-              <a:latin typeface="Arial" panose="020B0604020202020204" pitchFamily="34" charset="0"/>
-              <a:cs typeface="Arial" panose="020B0604020202020204" pitchFamily="34" charset="0"/>
-            </a:endParaRPr>
-          </a:p>
-          <a:p>
-            <a:pPr algn="just"/>
-            <a:r>
-              <a:rPr lang="en-US" sz="1200" dirty="0">
+            <a:r>
+              <a:rPr lang="es-ES" sz="1200" dirty="0">
+                <a:latin typeface="Arial" panose="020B0604020202020204" pitchFamily="34" charset="0"/>
+                <a:cs typeface="Arial" panose="020B0604020202020204" pitchFamily="34" charset="0"/>
+              </a:rPr>
+              <a:t>Para tener acoplamiento crítico debemos de perder la misma potencia en el anillo de la que transmitimos por este, al ver que llega a los -80 dB, podemos decir que ya está en el acoplamiento crítico, ya que es suficientemente bajo.</a:t>
+            </a:r>
+            <a:r>
+              <a:rPr lang="es-ES" sz="1200" noProof="0" dirty="0">
                 <a:latin typeface="Arial" panose="020B0604020202020204" pitchFamily="34" charset="0"/>
                 <a:cs typeface="Arial" panose="020B0604020202020204" pitchFamily="34" charset="0"/>
               </a:rPr>
@@ -8087,7 +10254,7 @@
         </p:nvSpPr>
         <p:spPr>
           <a:xfrm>
-            <a:off x="8610601" y="1418373"/>
+            <a:off x="8610600" y="1228744"/>
             <a:ext cx="3199959" cy="3306028"/>
           </a:xfrm>
           <a:prstGeom prst="rect">
@@ -8126,16 +10293,26 @@
           <a:p>
             <a:pPr algn="just"/>
             <a:r>
-              <a:rPr lang="en-US" sz="1200" b="1" dirty="0">
+              <a:rPr lang="es-ES" sz="1200" b="1" noProof="0" dirty="0" err="1">
                 <a:solidFill>
                   <a:schemeClr val="tx1"/>
                 </a:solidFill>
                 <a:latin typeface="Arial" panose="020B0604020202020204" pitchFamily="34" charset="0"/>
                 <a:cs typeface="Arial" panose="020B0604020202020204" pitchFamily="34" charset="0"/>
               </a:rPr>
-              <a:t>Hints:</a:t>
-            </a:r>
-            <a:endParaRPr lang="en-US" sz="1200" dirty="0">
+              <a:t>Hints</a:t>
+            </a:r>
+            <a:r>
+              <a:rPr lang="es-ES" sz="1200" b="1" noProof="0" dirty="0">
+                <a:solidFill>
+                  <a:schemeClr val="tx1"/>
+                </a:solidFill>
+                <a:latin typeface="Arial" panose="020B0604020202020204" pitchFamily="34" charset="0"/>
+                <a:cs typeface="Arial" panose="020B0604020202020204" pitchFamily="34" charset="0"/>
+              </a:rPr>
+              <a:t>:</a:t>
+            </a:r>
+            <a:endParaRPr lang="es-ES" sz="1200" noProof="0" dirty="0">
               <a:solidFill>
                 <a:schemeClr val="tx1"/>
               </a:solidFill>
@@ -8145,7 +10322,7 @@
           </a:p>
           <a:p>
             <a:pPr algn="just"/>
-            <a:endParaRPr lang="en-US" sz="1200" dirty="0">
+            <a:endParaRPr lang="es-ES" sz="1200" noProof="0" dirty="0">
               <a:solidFill>
                 <a:schemeClr val="tx1"/>
               </a:solidFill>
@@ -8156,19 +10333,89 @@
           <a:p>
             <a:pPr algn="just"/>
             <a:r>
-              <a:rPr lang="en-US" sz="1200" dirty="0">
+              <a:rPr lang="es-ES" sz="1200" noProof="0" dirty="0" err="1">
                 <a:solidFill>
                   <a:schemeClr val="tx1"/>
                 </a:solidFill>
                 <a:latin typeface="Arial" panose="020B0604020202020204" pitchFamily="34" charset="0"/>
                 <a:cs typeface="Arial" panose="020B0604020202020204" pitchFamily="34" charset="0"/>
               </a:rPr>
-              <a:t>Design the perimeter for a FSR = 15 nm. </a:t>
+              <a:t>Design</a:t>
+            </a:r>
+            <a:r>
+              <a:rPr lang="es-ES" sz="1200" noProof="0" dirty="0">
+                <a:solidFill>
+                  <a:schemeClr val="tx1"/>
+                </a:solidFill>
+                <a:latin typeface="Arial" panose="020B0604020202020204" pitchFamily="34" charset="0"/>
+                <a:cs typeface="Arial" panose="020B0604020202020204" pitchFamily="34" charset="0"/>
+              </a:rPr>
+              <a:t> </a:t>
+            </a:r>
+            <a:r>
+              <a:rPr lang="es-ES" sz="1200" noProof="0" dirty="0" err="1">
+                <a:solidFill>
+                  <a:schemeClr val="tx1"/>
+                </a:solidFill>
+                <a:latin typeface="Arial" panose="020B0604020202020204" pitchFamily="34" charset="0"/>
+                <a:cs typeface="Arial" panose="020B0604020202020204" pitchFamily="34" charset="0"/>
+              </a:rPr>
+              <a:t>the</a:t>
+            </a:r>
+            <a:r>
+              <a:rPr lang="es-ES" sz="1200" noProof="0" dirty="0">
+                <a:solidFill>
+                  <a:schemeClr val="tx1"/>
+                </a:solidFill>
+                <a:latin typeface="Arial" panose="020B0604020202020204" pitchFamily="34" charset="0"/>
+                <a:cs typeface="Arial" panose="020B0604020202020204" pitchFamily="34" charset="0"/>
+              </a:rPr>
+              <a:t> </a:t>
+            </a:r>
+            <a:r>
+              <a:rPr lang="es-ES" sz="1200" noProof="0" dirty="0" err="1">
+                <a:solidFill>
+                  <a:schemeClr val="tx1"/>
+                </a:solidFill>
+                <a:latin typeface="Arial" panose="020B0604020202020204" pitchFamily="34" charset="0"/>
+                <a:cs typeface="Arial" panose="020B0604020202020204" pitchFamily="34" charset="0"/>
+              </a:rPr>
+              <a:t>perimeter</a:t>
+            </a:r>
+            <a:r>
+              <a:rPr lang="es-ES" sz="1200" noProof="0" dirty="0">
+                <a:solidFill>
+                  <a:schemeClr val="tx1"/>
+                </a:solidFill>
+                <a:latin typeface="Arial" panose="020B0604020202020204" pitchFamily="34" charset="0"/>
+                <a:cs typeface="Arial" panose="020B0604020202020204" pitchFamily="34" charset="0"/>
+              </a:rPr>
+              <a:t> </a:t>
+            </a:r>
+            <a:r>
+              <a:rPr lang="es-ES" sz="1200" noProof="0" dirty="0" err="1">
+                <a:solidFill>
+                  <a:schemeClr val="tx1"/>
+                </a:solidFill>
+                <a:latin typeface="Arial" panose="020B0604020202020204" pitchFamily="34" charset="0"/>
+                <a:cs typeface="Arial" panose="020B0604020202020204" pitchFamily="34" charset="0"/>
+              </a:rPr>
+              <a:t>for</a:t>
+            </a:r>
+            <a:r>
+              <a:rPr lang="es-ES" sz="1200" noProof="0" dirty="0">
+                <a:solidFill>
+                  <a:schemeClr val="tx1"/>
+                </a:solidFill>
+                <a:latin typeface="Arial" panose="020B0604020202020204" pitchFamily="34" charset="0"/>
+                <a:cs typeface="Arial" panose="020B0604020202020204" pitchFamily="34" charset="0"/>
+              </a:rPr>
+              <a:t> a FSR = 15 nm. </a:t>
             </a:r>
           </a:p>
           <a:p>
             <a:pPr algn="just"/>
-            <a:endParaRPr lang="en-US" sz="1200" dirty="0">
+            <a:endParaRPr lang="es-ES" sz="1200" noProof="0" dirty="0">
               <a:solidFill>
                 <a:schemeClr val="tx1"/>
               </a:solidFill>
@@ -8179,19 +10426,119 @@
           <a:p>
             <a:pPr algn="just"/>
             <a:r>
-              <a:rPr lang="en-US" sz="1200" dirty="0">
+              <a:rPr lang="es-ES" sz="1200" noProof="0" dirty="0">
                 <a:solidFill>
                   <a:schemeClr val="tx1"/>
                 </a:solidFill>
                 <a:latin typeface="Arial" panose="020B0604020202020204" pitchFamily="34" charset="0"/>
                 <a:cs typeface="Arial" panose="020B0604020202020204" pitchFamily="34" charset="0"/>
               </a:rPr>
-              <a:t>Use equations given in class that relate FSR and perimeter.</a:t>
+              <a:t>Use </a:t>
+            </a:r>
+            <a:r>
+              <a:rPr lang="es-ES" sz="1200" noProof="0" dirty="0" err="1">
+                <a:solidFill>
+                  <a:schemeClr val="tx1"/>
+                </a:solidFill>
+                <a:latin typeface="Arial" panose="020B0604020202020204" pitchFamily="34" charset="0"/>
+                <a:cs typeface="Arial" panose="020B0604020202020204" pitchFamily="34" charset="0"/>
+              </a:rPr>
+              <a:t>equations</a:t>
+            </a:r>
+            <a:r>
+              <a:rPr lang="es-ES" sz="1200" noProof="0" dirty="0">
+                <a:solidFill>
+                  <a:schemeClr val="tx1"/>
+                </a:solidFill>
+                <a:latin typeface="Arial" panose="020B0604020202020204" pitchFamily="34" charset="0"/>
+                <a:cs typeface="Arial" panose="020B0604020202020204" pitchFamily="34" charset="0"/>
+              </a:rPr>
+              <a:t> </a:t>
+            </a:r>
+            <a:r>
+              <a:rPr lang="es-ES" sz="1200" noProof="0" dirty="0" err="1">
+                <a:solidFill>
+                  <a:schemeClr val="tx1"/>
+                </a:solidFill>
+                <a:latin typeface="Arial" panose="020B0604020202020204" pitchFamily="34" charset="0"/>
+                <a:cs typeface="Arial" panose="020B0604020202020204" pitchFamily="34" charset="0"/>
+              </a:rPr>
+              <a:t>given</a:t>
+            </a:r>
+            <a:r>
+              <a:rPr lang="es-ES" sz="1200" noProof="0" dirty="0">
+                <a:solidFill>
+                  <a:schemeClr val="tx1"/>
+                </a:solidFill>
+                <a:latin typeface="Arial" panose="020B0604020202020204" pitchFamily="34" charset="0"/>
+                <a:cs typeface="Arial" panose="020B0604020202020204" pitchFamily="34" charset="0"/>
+              </a:rPr>
+              <a:t> in </a:t>
+            </a:r>
+            <a:r>
+              <a:rPr lang="es-ES" sz="1200" noProof="0" dirty="0" err="1">
+                <a:solidFill>
+                  <a:schemeClr val="tx1"/>
+                </a:solidFill>
+                <a:latin typeface="Arial" panose="020B0604020202020204" pitchFamily="34" charset="0"/>
+                <a:cs typeface="Arial" panose="020B0604020202020204" pitchFamily="34" charset="0"/>
+              </a:rPr>
+              <a:t>class</a:t>
+            </a:r>
+            <a:r>
+              <a:rPr lang="es-ES" sz="1200" noProof="0" dirty="0">
+                <a:solidFill>
+                  <a:schemeClr val="tx1"/>
+                </a:solidFill>
+                <a:latin typeface="Arial" panose="020B0604020202020204" pitchFamily="34" charset="0"/>
+                <a:cs typeface="Arial" panose="020B0604020202020204" pitchFamily="34" charset="0"/>
+              </a:rPr>
+              <a:t> </a:t>
+            </a:r>
+            <a:r>
+              <a:rPr lang="es-ES" sz="1200" noProof="0" dirty="0" err="1">
+                <a:solidFill>
+                  <a:schemeClr val="tx1"/>
+                </a:solidFill>
+                <a:latin typeface="Arial" panose="020B0604020202020204" pitchFamily="34" charset="0"/>
+                <a:cs typeface="Arial" panose="020B0604020202020204" pitchFamily="34" charset="0"/>
+              </a:rPr>
+              <a:t>that</a:t>
+            </a:r>
+            <a:r>
+              <a:rPr lang="es-ES" sz="1200" noProof="0" dirty="0">
+                <a:solidFill>
+                  <a:schemeClr val="tx1"/>
+                </a:solidFill>
+                <a:latin typeface="Arial" panose="020B0604020202020204" pitchFamily="34" charset="0"/>
+                <a:cs typeface="Arial" panose="020B0604020202020204" pitchFamily="34" charset="0"/>
+              </a:rPr>
+              <a:t> relate FSR and </a:t>
+            </a:r>
+            <a:r>
+              <a:rPr lang="es-ES" sz="1200" noProof="0" dirty="0" err="1">
+                <a:solidFill>
+                  <a:schemeClr val="tx1"/>
+                </a:solidFill>
+                <a:latin typeface="Arial" panose="020B0604020202020204" pitchFamily="34" charset="0"/>
+                <a:cs typeface="Arial" panose="020B0604020202020204" pitchFamily="34" charset="0"/>
+              </a:rPr>
+              <a:t>perimeter</a:t>
+            </a:r>
+            <a:r>
+              <a:rPr lang="es-ES" sz="1200" noProof="0" dirty="0">
+                <a:solidFill>
+                  <a:schemeClr val="tx1"/>
+                </a:solidFill>
+                <a:latin typeface="Arial" panose="020B0604020202020204" pitchFamily="34" charset="0"/>
+                <a:cs typeface="Arial" panose="020B0604020202020204" pitchFamily="34" charset="0"/>
+              </a:rPr>
+              <a:t>.</a:t>
             </a:r>
           </a:p>
           <a:p>
             <a:pPr algn="just"/>
-            <a:endParaRPr lang="en-US" sz="1200" dirty="0">
+            <a:endParaRPr lang="es-ES" sz="1200" noProof="0" dirty="0">
               <a:solidFill>
                 <a:schemeClr val="tx1"/>
               </a:solidFill>
@@ -8201,7 +10548,7 @@
           </a:p>
           <a:p>
             <a:pPr algn="just"/>
-            <a:endParaRPr lang="en-US" sz="1200" dirty="0">
+            <a:endParaRPr lang="es-ES" sz="1200" noProof="0" dirty="0">
               <a:solidFill>
                 <a:schemeClr val="tx1"/>
               </a:solidFill>
@@ -8211,7 +10558,7 @@
           </a:p>
           <a:p>
             <a:pPr algn="just"/>
-            <a:endParaRPr lang="en-US" sz="1200" dirty="0">
+            <a:endParaRPr lang="es-ES" sz="1200" noProof="0" dirty="0">
               <a:solidFill>
                 <a:schemeClr val="tx1"/>
               </a:solidFill>
@@ -8223,62 +10570,78 @@
       </p:sp>
       <p:sp>
         <p:nvSpPr>
-          <p:cNvPr id="10" name="Rectángulo 9">
+          <p:cNvPr id="12" name="CuadroTexto 11">
             <a:extLst>
               <a:ext uri="{FF2B5EF4-FFF2-40B4-BE49-F238E27FC236}">
-                <a16:creationId xmlns:a16="http://schemas.microsoft.com/office/drawing/2014/main" id="{82011495-88D4-8787-6CB7-704897D84CF9}"/>
+                <a16:creationId xmlns:a16="http://schemas.microsoft.com/office/drawing/2014/main" id="{3BD35A6E-6540-9761-4128-0E43122290D4}"/>
               </a:ext>
             </a:extLst>
           </p:cNvPr>
-          <p:cNvSpPr/>
+          <p:cNvSpPr txBox="1"/>
           <p:nvPr/>
         </p:nvSpPr>
         <p:spPr>
           <a:xfrm>
-            <a:off x="611030" y="1418373"/>
-            <a:ext cx="3810000" cy="3306028"/>
+            <a:off x="5536543" y="2494307"/>
+            <a:ext cx="2033313" cy="1323439"/>
           </a:xfrm>
           <a:prstGeom prst="rect">
             <a:avLst/>
           </a:prstGeom>
           <a:noFill/>
-          <a:ln w="28575">
-            <a:solidFill>
-              <a:srgbClr val="E0700D"/>
-            </a:solidFill>
-          </a:ln>
-        </p:spPr>
-        <p:style>
-          <a:lnRef idx="2">
-            <a:schemeClr val="accent1">
-              <a:shade val="15000"/>
-            </a:schemeClr>
-          </a:lnRef>
-          <a:fillRef idx="1">
-            <a:schemeClr val="accent1"/>
-          </a:fillRef>
-          <a:effectRef idx="0">
-            <a:schemeClr val="accent1"/>
-          </a:effectRef>
-          <a:fontRef idx="minor">
-            <a:schemeClr val="lt1"/>
-          </a:fontRef>
-        </p:style>
-        <p:txBody>
-          <a:bodyPr rtlCol="0" anchor="ctr"/>
+        </p:spPr>
+        <p:txBody>
+          <a:bodyPr wrap="none" rtlCol="0">
+            <a:spAutoFit/>
+          </a:bodyPr>
           <a:lstStyle/>
           <a:p>
             <a:pPr algn="ctr"/>
-            <a:endParaRPr lang="en-US"/>
-          </a:p>
-        </p:txBody>
-      </p:sp>
-      <p:sp>
-        <p:nvSpPr>
-          <p:cNvPr id="12" name="CuadroTexto 11">
+            <a:r>
+              <a:rPr lang="es-ES" sz="2000" noProof="0" dirty="0"/>
+              <a:t>Single ring</a:t>
+            </a:r>
+          </a:p>
+          <a:p>
+            <a:pPr algn="ctr"/>
+            <a:r>
+              <a:rPr lang="es-ES" sz="2000" noProof="0" dirty="0"/>
+              <a:t>transfer </a:t>
+            </a:r>
+            <a:r>
+              <a:rPr lang="es-ES" sz="2000" noProof="0" dirty="0" err="1"/>
+              <a:t>functions</a:t>
+            </a:r>
+            <a:endParaRPr lang="es-ES" sz="2000" noProof="0" dirty="0"/>
+          </a:p>
+          <a:p>
+            <a:pPr algn="ctr"/>
+            <a:endParaRPr lang="es-ES" sz="2000" noProof="0" dirty="0"/>
+          </a:p>
+          <a:p>
+            <a:pPr algn="ctr"/>
+            <a:r>
+              <a:rPr lang="es-ES" sz="2000" noProof="0" dirty="0" err="1"/>
+              <a:t>Logaritmic</a:t>
+            </a:r>
+            <a:r>
+              <a:rPr lang="es-ES" sz="2000" noProof="0" dirty="0"/>
+              <a:t> </a:t>
+            </a:r>
+            <a:r>
+              <a:rPr lang="es-ES" sz="2000" noProof="0" dirty="0" err="1"/>
+              <a:t>units</a:t>
+            </a:r>
+            <a:endParaRPr lang="es-ES" sz="2000" noProof="0" dirty="0"/>
+          </a:p>
+        </p:txBody>
+      </p:sp>
+      <p:sp>
+        <p:nvSpPr>
+          <p:cNvPr id="16" name="CuadroTexto 15">
             <a:extLst>
               <a:ext uri="{FF2B5EF4-FFF2-40B4-BE49-F238E27FC236}">
-                <a16:creationId xmlns:a16="http://schemas.microsoft.com/office/drawing/2014/main" id="{3BD35A6E-6540-9761-4128-0E43122290D4}"/>
+                <a16:creationId xmlns:a16="http://schemas.microsoft.com/office/drawing/2014/main" id="{B49B3613-E785-3FCB-DA8D-2B43EB104C5D}"/>
               </a:ext>
             </a:extLst>
           </p:cNvPr>
@@ -8287,7 +10650,7 @@
         </p:nvSpPr>
         <p:spPr>
           <a:xfrm>
-            <a:off x="5536543" y="2494307"/>
+            <a:off x="1499379" y="2478160"/>
             <a:ext cx="2033313" cy="1323439"/>
           </a:xfrm>
           <a:prstGeom prst="rect">
@@ -8303,157 +10666,37 @@
           <a:p>
             <a:pPr algn="ctr"/>
             <a:r>
-              <a:rPr lang="es-ES" sz="2000" dirty="0"/>
+              <a:rPr lang="es-ES" sz="2000" noProof="0" dirty="0"/>
               <a:t>Single ring</a:t>
             </a:r>
           </a:p>
           <a:p>
             <a:pPr algn="ctr"/>
             <a:r>
-              <a:rPr lang="es-ES" sz="2000" dirty="0"/>
+              <a:rPr lang="es-ES" sz="2000" noProof="0" dirty="0"/>
               <a:t>transfer </a:t>
             </a:r>
             <a:r>
-              <a:rPr lang="es-ES" sz="2000" dirty="0" err="1"/>
+              <a:rPr lang="es-ES" sz="2000" noProof="0" dirty="0" err="1"/>
               <a:t>functions</a:t>
             </a:r>
-            <a:endParaRPr lang="es-ES" sz="2000" dirty="0"/>
+            <a:endParaRPr lang="es-ES" sz="2000" noProof="0" dirty="0"/>
           </a:p>
           <a:p>
             <a:pPr algn="ctr"/>
-            <a:endParaRPr lang="es-ES" sz="2000" dirty="0"/>
+            <a:endParaRPr lang="es-ES" sz="2000" noProof="0" dirty="0"/>
           </a:p>
           <a:p>
             <a:pPr algn="ctr"/>
             <a:r>
-              <a:rPr lang="es-ES" sz="2000" dirty="0" err="1"/>
-              <a:t>Logaritmic</a:t>
-            </a:r>
-            <a:r>
-              <a:rPr lang="es-ES" sz="2000" dirty="0"/>
-              <a:t> </a:t>
-            </a:r>
-            <a:r>
-              <a:rPr lang="es-ES" sz="2000" dirty="0" err="1"/>
+              <a:rPr lang="es-ES" sz="2000" noProof="0" dirty="0"/>
+              <a:t>Linear </a:t>
+            </a:r>
+            <a:r>
+              <a:rPr lang="es-ES" sz="2000" noProof="0" dirty="0" err="1"/>
               <a:t>units</a:t>
             </a:r>
-            <a:endParaRPr lang="en-US" sz="2000" dirty="0"/>
-          </a:p>
-        </p:txBody>
-      </p:sp>
-      <p:sp>
-        <p:nvSpPr>
-          <p:cNvPr id="13" name="Rectángulo 12">
-            <a:extLst>
-              <a:ext uri="{FF2B5EF4-FFF2-40B4-BE49-F238E27FC236}">
-                <a16:creationId xmlns:a16="http://schemas.microsoft.com/office/drawing/2014/main" id="{03798D61-1E16-8473-BDCE-1D97F95EF7BE}"/>
-              </a:ext>
-            </a:extLst>
-          </p:cNvPr>
-          <p:cNvSpPr/>
-          <p:nvPr/>
-        </p:nvSpPr>
-        <p:spPr>
-          <a:xfrm>
-            <a:off x="4648200" y="1418373"/>
-            <a:ext cx="3810000" cy="3306028"/>
-          </a:xfrm>
-          <a:prstGeom prst="rect">
-            <a:avLst/>
-          </a:prstGeom>
-          <a:noFill/>
-          <a:ln w="28575">
-            <a:solidFill>
-              <a:srgbClr val="E0700D"/>
-            </a:solidFill>
-          </a:ln>
-        </p:spPr>
-        <p:style>
-          <a:lnRef idx="2">
-            <a:schemeClr val="accent1">
-              <a:shade val="15000"/>
-            </a:schemeClr>
-          </a:lnRef>
-          <a:fillRef idx="1">
-            <a:schemeClr val="accent1"/>
-          </a:fillRef>
-          <a:effectRef idx="0">
-            <a:schemeClr val="accent1"/>
-          </a:effectRef>
-          <a:fontRef idx="minor">
-            <a:schemeClr val="lt1"/>
-          </a:fontRef>
-        </p:style>
-        <p:txBody>
-          <a:bodyPr rtlCol="0" anchor="ctr"/>
-          <a:lstStyle/>
-          <a:p>
-            <a:pPr algn="ctr"/>
-            <a:endParaRPr lang="en-US"/>
-          </a:p>
-        </p:txBody>
-      </p:sp>
-      <p:sp>
-        <p:nvSpPr>
-          <p:cNvPr id="16" name="CuadroTexto 15">
-            <a:extLst>
-              <a:ext uri="{FF2B5EF4-FFF2-40B4-BE49-F238E27FC236}">
-                <a16:creationId xmlns:a16="http://schemas.microsoft.com/office/drawing/2014/main" id="{B49B3613-E785-3FCB-DA8D-2B43EB104C5D}"/>
-              </a:ext>
-            </a:extLst>
-          </p:cNvPr>
-          <p:cNvSpPr txBox="1"/>
-          <p:nvPr/>
-        </p:nvSpPr>
-        <p:spPr>
-          <a:xfrm>
-            <a:off x="1499379" y="2478160"/>
-            <a:ext cx="2033313" cy="1323439"/>
-          </a:xfrm>
-          <a:prstGeom prst="rect">
-            <a:avLst/>
-          </a:prstGeom>
-          <a:noFill/>
-        </p:spPr>
-        <p:txBody>
-          <a:bodyPr wrap="none" rtlCol="0">
-            <a:spAutoFit/>
-          </a:bodyPr>
-          <a:lstStyle/>
-          <a:p>
-            <a:pPr algn="ctr"/>
-            <a:r>
-              <a:rPr lang="es-ES" sz="2000" dirty="0"/>
-              <a:t>Single ring</a:t>
-            </a:r>
-          </a:p>
-          <a:p>
-            <a:pPr algn="ctr"/>
-            <a:r>
-              <a:rPr lang="es-ES" sz="2000" dirty="0"/>
-              <a:t>transfer </a:t>
-            </a:r>
-            <a:r>
-              <a:rPr lang="es-ES" sz="2000" dirty="0" err="1"/>
-              <a:t>functions</a:t>
-            </a:r>
-            <a:endParaRPr lang="es-ES" sz="2000" dirty="0"/>
-          </a:p>
-          <a:p>
-            <a:pPr algn="ctr"/>
-            <a:endParaRPr lang="es-ES" sz="2000" dirty="0"/>
-          </a:p>
-          <a:p>
-            <a:pPr algn="ctr"/>
-            <a:r>
-              <a:rPr lang="es-ES" sz="2000" dirty="0"/>
-              <a:t>Linear </a:t>
-            </a:r>
-            <a:r>
-              <a:rPr lang="es-ES" sz="2000" dirty="0" err="1"/>
-              <a:t>units</a:t>
-            </a:r>
-            <a:endParaRPr lang="en-US" sz="2000" dirty="0"/>
+            <a:endParaRPr lang="es-ES" sz="2000" noProof="0" dirty="0"/>
           </a:p>
         </p:txBody>
       </p:sp>
@@ -8539,9 +10782,34 @@
               </a:spcBef>
             </a:pPr>
             <a:r>
-              <a:rPr lang="en-US" sz="2500" kern="0" dirty="0"/>
-              <a:t>Learning outcome #5 – Ring resonator design</a:t>
-            </a:r>
+              <a:rPr lang="es-ES" sz="2500" kern="0" noProof="0" dirty="0" err="1"/>
+              <a:t>Learning</a:t>
+            </a:r>
+            <a:r>
+              <a:rPr lang="es-ES" sz="2500" kern="0" noProof="0" dirty="0"/>
+              <a:t> </a:t>
+            </a:r>
+            <a:r>
+              <a:rPr lang="es-ES" sz="2500" kern="0" noProof="0" dirty="0" err="1"/>
+              <a:t>outcome</a:t>
+            </a:r>
+            <a:r>
+              <a:rPr lang="es-ES" sz="2500" kern="0" noProof="0" dirty="0"/>
+              <a:t> #5 – Ring </a:t>
+            </a:r>
+            <a:r>
+              <a:rPr lang="es-ES" sz="2500" kern="0" noProof="0" dirty="0" err="1"/>
+              <a:t>resonator</a:t>
+            </a:r>
+            <a:r>
+              <a:rPr lang="es-ES" sz="2500" kern="0" noProof="0" dirty="0"/>
+              <a:t> </a:t>
+            </a:r>
+            <a:r>
+              <a:rPr lang="es-ES" sz="2500" kern="0" noProof="0" dirty="0" err="1"/>
+              <a:t>design</a:t>
+            </a:r>
+            <a:endParaRPr lang="es-ES" sz="2500" kern="0" noProof="0" dirty="0"/>
           </a:p>
           <a:p>
             <a:pPr marL="12700">
@@ -8550,592 +10818,70 @@
               </a:spcBef>
             </a:pPr>
             <a:r>
-              <a:rPr lang="en-US" b="0" kern="0" spc="-5" dirty="0">
+              <a:rPr lang="es-ES" b="0" kern="0" spc="-5" noProof="0" dirty="0" err="1">
                 <a:latin typeface="+mj-lt"/>
                 <a:cs typeface="Lucida Sans"/>
               </a:rPr>
-              <a:t>Design the perimeter for a FSR = 15 nm. </a:t>
-            </a:r>
-          </a:p>
-        </p:txBody>
-      </p:sp>
-    </p:spTree>
-    <p:extLst>
-      <p:ext uri="{BB962C8B-B14F-4D97-AF65-F5344CB8AC3E}">
-        <p14:creationId xmlns:p14="http://schemas.microsoft.com/office/powerpoint/2010/main" val="2915989261"/>
-      </p:ext>
-    </p:extLst>
-  </p:cSld>
-  <p:clrMapOvr>
-    <a:masterClrMapping/>
-  </p:clrMapOvr>
-</p:sld>
-</file>
-
-<file path=ppt/slides/slide9.xml><?xml version="1.0" encoding="utf-8"?>
-<p:sld xmlns:a="http://schemas.openxmlformats.org/drawingml/2006/main" xmlns:r="http://schemas.openxmlformats.org/officeDocument/2006/relationships" xmlns:p="http://schemas.openxmlformats.org/presentationml/2006/main">
-  <p:cSld>
-    <p:spTree>
-      <p:nvGrpSpPr>
-        <p:cNvPr id="1" name=""/>
-        <p:cNvGrpSpPr/>
-        <p:nvPr/>
-      </p:nvGrpSpPr>
-      <p:grpSpPr>
-        <a:xfrm>
-          <a:off x="0" y="0"/>
-          <a:ext cx="0" cy="0"/>
-          <a:chOff x="0" y="0"/>
-          <a:chExt cx="0" cy="0"/>
-        </a:xfrm>
-      </p:grpSpPr>
-      <p:sp>
-        <p:nvSpPr>
-          <p:cNvPr id="5" name="Marcador de pie de página 4">
-            <a:extLst>
-              <a:ext uri="{FF2B5EF4-FFF2-40B4-BE49-F238E27FC236}">
-                <a16:creationId xmlns:a16="http://schemas.microsoft.com/office/drawing/2014/main" id="{F929251A-3DC4-36B2-3FB3-341378364BED}"/>
-              </a:ext>
-            </a:extLst>
-          </p:cNvPr>
-          <p:cNvSpPr>
-            <a:spLocks noGrp="1"/>
-          </p:cNvSpPr>
-          <p:nvPr>
-            <p:ph type="ftr" sz="quarter" idx="5"/>
-          </p:nvPr>
-        </p:nvSpPr>
-        <p:spPr/>
-        <p:txBody>
-          <a:bodyPr/>
-          <a:lstStyle/>
-          <a:p>
-            <a:r>
-              <a:rPr lang="en-US"/>
-              <a:t>LAB 3.0. CIRCUITS &amp; COMPACT MODELS</a:t>
-            </a:r>
-          </a:p>
-        </p:txBody>
-      </p:sp>
-      <p:sp>
-        <p:nvSpPr>
-          <p:cNvPr id="6" name="Marcador de número de diapositiva 5">
-            <a:extLst>
-              <a:ext uri="{FF2B5EF4-FFF2-40B4-BE49-F238E27FC236}">
-                <a16:creationId xmlns:a16="http://schemas.microsoft.com/office/drawing/2014/main" id="{8E91A34C-DF76-97CF-3EFD-546BC64A2184}"/>
-              </a:ext>
-            </a:extLst>
-          </p:cNvPr>
-          <p:cNvSpPr>
-            <a:spLocks noGrp="1"/>
-          </p:cNvSpPr>
-          <p:nvPr>
-            <p:ph type="sldNum" sz="quarter" idx="7"/>
-          </p:nvPr>
-        </p:nvSpPr>
-        <p:spPr/>
-        <p:txBody>
-          <a:bodyPr/>
-          <a:lstStyle/>
-          <a:p>
-            <a:fld id="{C2F52289-4012-4053-9770-FE82CEB9514F}" type="slidenum">
-              <a:rPr lang="en-US" smtClean="0"/>
-              <a:pPr/>
-              <a:t>9</a:t>
-            </a:fld>
-            <a:endParaRPr lang="en-US" dirty="0"/>
-          </a:p>
-        </p:txBody>
-      </p:sp>
-      <p:sp>
-        <p:nvSpPr>
-          <p:cNvPr id="8" name="CuadroTexto 7">
-            <a:extLst>
-              <a:ext uri="{FF2B5EF4-FFF2-40B4-BE49-F238E27FC236}">
-                <a16:creationId xmlns:a16="http://schemas.microsoft.com/office/drawing/2014/main" id="{D9601617-351E-AE1A-1F4D-693F2EA59361}"/>
-              </a:ext>
-            </a:extLst>
-          </p:cNvPr>
-          <p:cNvSpPr txBox="1"/>
-          <p:nvPr/>
-        </p:nvSpPr>
-        <p:spPr>
-          <a:xfrm>
-            <a:off x="611029" y="4860335"/>
-            <a:ext cx="11199530" cy="646331"/>
-          </a:xfrm>
-          <a:prstGeom prst="rect">
-            <a:avLst/>
-          </a:prstGeom>
-          <a:solidFill>
-            <a:schemeClr val="bg1">
-              <a:lumMod val="95000"/>
-            </a:schemeClr>
-          </a:solidFill>
-          <a:ln w="28575">
-            <a:solidFill>
-              <a:srgbClr val="E0700D"/>
-            </a:solidFill>
-          </a:ln>
-        </p:spPr>
-        <p:txBody>
-          <a:bodyPr wrap="square" rtlCol="0">
-            <a:spAutoFit/>
-          </a:bodyPr>
-          <a:lstStyle/>
-          <a:p>
-            <a:pPr algn="just"/>
-            <a:r>
-              <a:rPr lang="en-US" sz="1200" dirty="0">
-                <a:latin typeface="Arial" panose="020B0604020202020204" pitchFamily="34" charset="0"/>
-                <a:cs typeface="Arial" panose="020B0604020202020204" pitchFamily="34" charset="0"/>
-              </a:rPr>
-              <a:t>Comment results: Try to classify the resonances, in which case are you close to critical coupling? Why?</a:t>
-            </a:r>
-          </a:p>
-          <a:p>
-            <a:pPr algn="just"/>
-            <a:endParaRPr lang="en-US" sz="1200" dirty="0">
-              <a:latin typeface="Arial" panose="020B0604020202020204" pitchFamily="34" charset="0"/>
-              <a:cs typeface="Arial" panose="020B0604020202020204" pitchFamily="34" charset="0"/>
-            </a:endParaRPr>
-          </a:p>
-          <a:p>
-            <a:pPr algn="just"/>
-            <a:endParaRPr lang="en-US" sz="1200" dirty="0">
-              <a:latin typeface="Arial" panose="020B0604020202020204" pitchFamily="34" charset="0"/>
-              <a:cs typeface="Arial" panose="020B0604020202020204" pitchFamily="34" charset="0"/>
-            </a:endParaRPr>
-          </a:p>
-        </p:txBody>
-      </p:sp>
-      <p:sp>
-        <p:nvSpPr>
-          <p:cNvPr id="11" name="Rectángulo 10">
-            <a:extLst>
-              <a:ext uri="{FF2B5EF4-FFF2-40B4-BE49-F238E27FC236}">
-                <a16:creationId xmlns:a16="http://schemas.microsoft.com/office/drawing/2014/main" id="{B811A5F9-C0B5-716C-70FB-9472E1BC2CD3}"/>
-              </a:ext>
-            </a:extLst>
-          </p:cNvPr>
-          <p:cNvSpPr/>
-          <p:nvPr/>
-        </p:nvSpPr>
-        <p:spPr>
-          <a:xfrm>
-            <a:off x="611030" y="1418373"/>
-            <a:ext cx="2538552" cy="3306028"/>
-          </a:xfrm>
-          <a:prstGeom prst="rect">
-            <a:avLst/>
-          </a:prstGeom>
-          <a:noFill/>
-          <a:ln w="28575">
-            <a:solidFill>
-              <a:srgbClr val="E0700D"/>
-            </a:solidFill>
-          </a:ln>
-        </p:spPr>
-        <p:style>
-          <a:lnRef idx="2">
-            <a:schemeClr val="accent1">
-              <a:shade val="15000"/>
-            </a:schemeClr>
-          </a:lnRef>
-          <a:fillRef idx="1">
-            <a:schemeClr val="accent1"/>
-          </a:fillRef>
-          <a:effectRef idx="0">
-            <a:schemeClr val="accent1"/>
-          </a:effectRef>
-          <a:fontRef idx="minor">
-            <a:schemeClr val="lt1"/>
-          </a:fontRef>
-        </p:style>
-        <p:txBody>
-          <a:bodyPr rtlCol="0" anchor="ctr"/>
-          <a:lstStyle/>
-          <a:p>
-            <a:pPr algn="ctr"/>
-            <a:endParaRPr lang="en-US"/>
-          </a:p>
-        </p:txBody>
-      </p:sp>
-      <p:sp>
-        <p:nvSpPr>
-          <p:cNvPr id="14" name="Rectángulo 13">
-            <a:extLst>
-              <a:ext uri="{FF2B5EF4-FFF2-40B4-BE49-F238E27FC236}">
-                <a16:creationId xmlns:a16="http://schemas.microsoft.com/office/drawing/2014/main" id="{6AA857E7-5C39-DCE1-10B5-40300FCF4B26}"/>
-              </a:ext>
-            </a:extLst>
-          </p:cNvPr>
-          <p:cNvSpPr/>
-          <p:nvPr/>
-        </p:nvSpPr>
-        <p:spPr>
-          <a:xfrm>
-            <a:off x="3277315" y="1419036"/>
-            <a:ext cx="2538552" cy="3306028"/>
-          </a:xfrm>
-          <a:prstGeom prst="rect">
-            <a:avLst/>
-          </a:prstGeom>
-          <a:noFill/>
-          <a:ln w="28575">
-            <a:solidFill>
-              <a:srgbClr val="E0700D"/>
-            </a:solidFill>
-          </a:ln>
-        </p:spPr>
-        <p:style>
-          <a:lnRef idx="2">
-            <a:schemeClr val="accent1">
-              <a:shade val="15000"/>
-            </a:schemeClr>
-          </a:lnRef>
-          <a:fillRef idx="1">
-            <a:schemeClr val="accent1"/>
-          </a:fillRef>
-          <a:effectRef idx="0">
-            <a:schemeClr val="accent1"/>
-          </a:effectRef>
-          <a:fontRef idx="minor">
-            <a:schemeClr val="lt1"/>
-          </a:fontRef>
-        </p:style>
-        <p:txBody>
-          <a:bodyPr rtlCol="0" anchor="ctr"/>
-          <a:lstStyle/>
-          <a:p>
-            <a:pPr algn="ctr"/>
-            <a:endParaRPr lang="en-US"/>
-          </a:p>
-        </p:txBody>
-      </p:sp>
-      <p:sp>
-        <p:nvSpPr>
-          <p:cNvPr id="15" name="CuadroTexto 14">
-            <a:extLst>
-              <a:ext uri="{FF2B5EF4-FFF2-40B4-BE49-F238E27FC236}">
-                <a16:creationId xmlns:a16="http://schemas.microsoft.com/office/drawing/2014/main" id="{54CF28B4-1346-F41D-2CD8-EA104ABBFB98}"/>
-              </a:ext>
-            </a:extLst>
-          </p:cNvPr>
-          <p:cNvSpPr txBox="1"/>
-          <p:nvPr/>
-        </p:nvSpPr>
-        <p:spPr>
-          <a:xfrm>
-            <a:off x="863650" y="2101891"/>
-            <a:ext cx="2033313" cy="1938992"/>
-          </a:xfrm>
-          <a:prstGeom prst="rect">
-            <a:avLst/>
-          </a:prstGeom>
-          <a:noFill/>
-        </p:spPr>
-        <p:txBody>
-          <a:bodyPr wrap="none" rtlCol="0">
-            <a:spAutoFit/>
-          </a:bodyPr>
-          <a:lstStyle/>
-          <a:p>
-            <a:pPr algn="ctr"/>
-            <a:r>
-              <a:rPr lang="es-ES" sz="2000" dirty="0"/>
-              <a:t>Single ring</a:t>
-            </a:r>
-          </a:p>
-          <a:p>
-            <a:pPr algn="ctr"/>
-            <a:r>
-              <a:rPr lang="es-ES" sz="2000" dirty="0"/>
-              <a:t>transfer </a:t>
-            </a:r>
-            <a:r>
-              <a:rPr lang="es-ES" sz="2000" dirty="0" err="1"/>
-              <a:t>functions</a:t>
-            </a:r>
-            <a:endParaRPr lang="es-ES" sz="2000" dirty="0"/>
-          </a:p>
-          <a:p>
-            <a:pPr algn="ctr"/>
-            <a:endParaRPr lang="es-ES" sz="2000" dirty="0"/>
-          </a:p>
-          <a:p>
-            <a:pPr algn="ctr"/>
-            <a:r>
-              <a:rPr lang="es-ES" sz="2000" dirty="0"/>
-              <a:t>Linear </a:t>
-            </a:r>
-            <a:r>
-              <a:rPr lang="es-ES" sz="2000" dirty="0" err="1"/>
-              <a:t>units</a:t>
-            </a:r>
-            <a:endParaRPr lang="es-ES" sz="2000" dirty="0"/>
-          </a:p>
-          <a:p>
-            <a:pPr algn="ctr"/>
-            <a:endParaRPr lang="es-ES" sz="2000" dirty="0"/>
-          </a:p>
-          <a:p>
-            <a:pPr algn="ctr"/>
-            <a:r>
-              <a:rPr lang="es-ES" sz="2000" dirty="0"/>
-              <a:t>K=</a:t>
-            </a:r>
-            <a:endParaRPr lang="en-US" sz="2000" dirty="0"/>
-          </a:p>
-        </p:txBody>
-      </p:sp>
-      <p:sp>
-        <p:nvSpPr>
-          <p:cNvPr id="9" name="Rectángulo 8">
-            <a:extLst>
-              <a:ext uri="{FF2B5EF4-FFF2-40B4-BE49-F238E27FC236}">
-                <a16:creationId xmlns:a16="http://schemas.microsoft.com/office/drawing/2014/main" id="{11F0F5FC-B571-59FC-7890-3105A6A843BB}"/>
-              </a:ext>
-            </a:extLst>
-          </p:cNvPr>
-          <p:cNvSpPr/>
-          <p:nvPr/>
-        </p:nvSpPr>
-        <p:spPr>
-          <a:xfrm>
-            <a:off x="5943600" y="1418373"/>
-            <a:ext cx="2538552" cy="3306028"/>
-          </a:xfrm>
-          <a:prstGeom prst="rect">
-            <a:avLst/>
-          </a:prstGeom>
-          <a:noFill/>
-          <a:ln w="28575">
-            <a:solidFill>
-              <a:srgbClr val="E0700D"/>
-            </a:solidFill>
-          </a:ln>
-        </p:spPr>
-        <p:style>
-          <a:lnRef idx="2">
-            <a:schemeClr val="accent1">
-              <a:shade val="15000"/>
-            </a:schemeClr>
-          </a:lnRef>
-          <a:fillRef idx="1">
-            <a:schemeClr val="accent1"/>
-          </a:fillRef>
-          <a:effectRef idx="0">
-            <a:schemeClr val="accent1"/>
-          </a:effectRef>
-          <a:fontRef idx="minor">
-            <a:schemeClr val="lt1"/>
-          </a:fontRef>
-        </p:style>
-        <p:txBody>
-          <a:bodyPr rtlCol="0" anchor="ctr"/>
-          <a:lstStyle/>
-          <a:p>
-            <a:pPr algn="ctr"/>
-            <a:endParaRPr lang="en-US"/>
-          </a:p>
-        </p:txBody>
-      </p:sp>
-      <p:sp>
-        <p:nvSpPr>
-          <p:cNvPr id="10" name="CuadroTexto 9">
-            <a:extLst>
-              <a:ext uri="{FF2B5EF4-FFF2-40B4-BE49-F238E27FC236}">
-                <a16:creationId xmlns:a16="http://schemas.microsoft.com/office/drawing/2014/main" id="{3146642F-220B-8F6A-59A8-2D128DDF3BEB}"/>
-              </a:ext>
-            </a:extLst>
-          </p:cNvPr>
-          <p:cNvSpPr txBox="1"/>
-          <p:nvPr/>
-        </p:nvSpPr>
-        <p:spPr>
-          <a:xfrm>
-            <a:off x="3529935" y="2104638"/>
-            <a:ext cx="2033313" cy="1938992"/>
-          </a:xfrm>
-          <a:prstGeom prst="rect">
-            <a:avLst/>
-          </a:prstGeom>
-          <a:noFill/>
-        </p:spPr>
-        <p:txBody>
-          <a:bodyPr wrap="none" rtlCol="0">
-            <a:spAutoFit/>
-          </a:bodyPr>
-          <a:lstStyle/>
-          <a:p>
-            <a:pPr algn="ctr"/>
-            <a:r>
-              <a:rPr lang="es-ES" sz="2000" dirty="0"/>
-              <a:t>Single ring</a:t>
-            </a:r>
-          </a:p>
-          <a:p>
-            <a:pPr algn="ctr"/>
-            <a:r>
-              <a:rPr lang="es-ES" sz="2000" dirty="0"/>
-              <a:t>transfer </a:t>
-            </a:r>
-            <a:r>
-              <a:rPr lang="es-ES" sz="2000" dirty="0" err="1"/>
-              <a:t>functions</a:t>
-            </a:r>
-            <a:endParaRPr lang="es-ES" sz="2000" dirty="0"/>
-          </a:p>
-          <a:p>
-            <a:pPr algn="ctr"/>
-            <a:endParaRPr lang="es-ES" sz="2000" dirty="0"/>
-          </a:p>
-          <a:p>
-            <a:pPr algn="ctr"/>
-            <a:r>
-              <a:rPr lang="es-ES" sz="2000" dirty="0"/>
-              <a:t>Linear </a:t>
-            </a:r>
-            <a:r>
-              <a:rPr lang="es-ES" sz="2000" dirty="0" err="1"/>
-              <a:t>units</a:t>
-            </a:r>
-            <a:endParaRPr lang="es-ES" sz="2000" dirty="0"/>
-          </a:p>
-          <a:p>
-            <a:pPr algn="ctr"/>
-            <a:endParaRPr lang="es-ES" sz="2000" dirty="0"/>
-          </a:p>
-          <a:p>
-            <a:pPr algn="ctr"/>
-            <a:r>
-              <a:rPr lang="es-ES" sz="2000" dirty="0"/>
-              <a:t>K=</a:t>
-            </a:r>
-            <a:endParaRPr lang="en-US" sz="2000" dirty="0"/>
-          </a:p>
-        </p:txBody>
-      </p:sp>
-      <p:sp>
-        <p:nvSpPr>
-          <p:cNvPr id="13" name="CuadroTexto 12">
-            <a:extLst>
-              <a:ext uri="{FF2B5EF4-FFF2-40B4-BE49-F238E27FC236}">
-                <a16:creationId xmlns:a16="http://schemas.microsoft.com/office/drawing/2014/main" id="{057C499E-829F-FB11-9128-843C937CB822}"/>
-              </a:ext>
-            </a:extLst>
-          </p:cNvPr>
-          <p:cNvSpPr txBox="1"/>
-          <p:nvPr/>
-        </p:nvSpPr>
-        <p:spPr>
-          <a:xfrm>
-            <a:off x="6195187" y="2101891"/>
-            <a:ext cx="2033313" cy="1938992"/>
-          </a:xfrm>
-          <a:prstGeom prst="rect">
-            <a:avLst/>
-          </a:prstGeom>
-          <a:noFill/>
-        </p:spPr>
-        <p:txBody>
-          <a:bodyPr wrap="none" rtlCol="0">
-            <a:spAutoFit/>
-          </a:bodyPr>
-          <a:lstStyle/>
-          <a:p>
-            <a:pPr algn="ctr"/>
-            <a:r>
-              <a:rPr lang="es-ES" sz="2000" dirty="0"/>
-              <a:t>Single ring</a:t>
-            </a:r>
-          </a:p>
-          <a:p>
-            <a:pPr algn="ctr"/>
-            <a:r>
-              <a:rPr lang="es-ES" sz="2000" dirty="0"/>
-              <a:t>transfer </a:t>
-            </a:r>
-            <a:r>
-              <a:rPr lang="es-ES" sz="2000" dirty="0" err="1"/>
-              <a:t>functions</a:t>
-            </a:r>
-            <a:endParaRPr lang="es-ES" sz="2000" dirty="0"/>
-          </a:p>
-          <a:p>
-            <a:pPr algn="ctr"/>
-            <a:endParaRPr lang="es-ES" sz="2000" dirty="0"/>
-          </a:p>
-          <a:p>
-            <a:pPr algn="ctr"/>
-            <a:r>
-              <a:rPr lang="es-ES" sz="2000" dirty="0"/>
-              <a:t>Linear </a:t>
-            </a:r>
-            <a:r>
-              <a:rPr lang="es-ES" sz="2000" dirty="0" err="1"/>
-              <a:t>units</a:t>
-            </a:r>
-            <a:endParaRPr lang="es-ES" sz="2000" dirty="0"/>
-          </a:p>
-          <a:p>
-            <a:pPr algn="ctr"/>
-            <a:endParaRPr lang="es-ES" sz="2000" dirty="0"/>
-          </a:p>
-          <a:p>
-            <a:pPr algn="ctr"/>
-            <a:r>
-              <a:rPr lang="es-ES" sz="2000" dirty="0"/>
-              <a:t>K=</a:t>
-            </a:r>
-            <a:endParaRPr lang="en-US" sz="2000" dirty="0"/>
-          </a:p>
-        </p:txBody>
-      </p:sp>
-      <p:sp>
-        <p:nvSpPr>
-          <p:cNvPr id="12" name="CuadroTexto 11">
-            <a:extLst>
-              <a:ext uri="{FF2B5EF4-FFF2-40B4-BE49-F238E27FC236}">
-                <a16:creationId xmlns:a16="http://schemas.microsoft.com/office/drawing/2014/main" id="{4E78CC89-1377-28A4-024D-1B017D551FC5}"/>
-              </a:ext>
-            </a:extLst>
-          </p:cNvPr>
-          <p:cNvSpPr txBox="1"/>
-          <p:nvPr/>
-        </p:nvSpPr>
-        <p:spPr>
-          <a:xfrm>
-            <a:off x="9869875" y="2871332"/>
-            <a:ext cx="360996" cy="400110"/>
-          </a:xfrm>
-          <a:prstGeom prst="rect">
-            <a:avLst/>
-          </a:prstGeom>
-          <a:noFill/>
-        </p:spPr>
-        <p:txBody>
-          <a:bodyPr wrap="none" rtlCol="0">
-            <a:spAutoFit/>
-          </a:bodyPr>
-          <a:lstStyle/>
-          <a:p>
-            <a:pPr algn="ctr"/>
-            <a:r>
-              <a:rPr lang="es-ES" sz="2000" dirty="0"/>
-              <a:t>…</a:t>
-            </a:r>
-            <a:endParaRPr lang="en-US" sz="2000" dirty="0"/>
+              <a:t>Design</a:t>
+            </a:r>
+            <a:r>
+              <a:rPr lang="es-ES" b="0" kern="0" spc="-5" noProof="0" dirty="0">
+                <a:latin typeface="+mj-lt"/>
+                <a:cs typeface="Lucida Sans"/>
+              </a:rPr>
+              <a:t> </a:t>
+            </a:r>
+            <a:r>
+              <a:rPr lang="es-ES" b="0" kern="0" spc="-5" noProof="0" dirty="0" err="1">
+                <a:latin typeface="+mj-lt"/>
+                <a:cs typeface="Lucida Sans"/>
+              </a:rPr>
+              <a:t>the</a:t>
+            </a:r>
+            <a:r>
+              <a:rPr lang="es-ES" b="0" kern="0" spc="-5" noProof="0" dirty="0">
+                <a:latin typeface="+mj-lt"/>
+                <a:cs typeface="Lucida Sans"/>
+              </a:rPr>
+              <a:t> </a:t>
+            </a:r>
+            <a:r>
+              <a:rPr lang="es-ES" b="0" kern="0" spc="-5" noProof="0" dirty="0" err="1">
+                <a:latin typeface="+mj-lt"/>
+                <a:cs typeface="Lucida Sans"/>
+              </a:rPr>
+              <a:t>perimeter</a:t>
+            </a:r>
+            <a:r>
+              <a:rPr lang="es-ES" b="0" kern="0" spc="-5" noProof="0" dirty="0">
+                <a:latin typeface="+mj-lt"/>
+                <a:cs typeface="Lucida Sans"/>
+              </a:rPr>
+              <a:t> </a:t>
+            </a:r>
+            <a:r>
+              <a:rPr lang="es-ES" b="0" kern="0" spc="-5" noProof="0" dirty="0" err="1">
+                <a:latin typeface="+mj-lt"/>
+                <a:cs typeface="Lucida Sans"/>
+              </a:rPr>
+              <a:t>for</a:t>
+            </a:r>
+            <a:r>
+              <a:rPr lang="es-ES" b="0" kern="0" spc="-5" noProof="0" dirty="0">
+                <a:latin typeface="+mj-lt"/>
+                <a:cs typeface="Lucida Sans"/>
+              </a:rPr>
+              <a:t> a FSR = 15 nm. </a:t>
+            </a:r>
           </a:p>
         </p:txBody>
       </p:sp>
       <p:pic>
         <p:nvPicPr>
-          <p:cNvPr id="3" name="Gráfico 2">
+          <p:cNvPr id="4" name="Picture 3">
             <a:extLst>
               <a:ext uri="{FF2B5EF4-FFF2-40B4-BE49-F238E27FC236}">
-                <a16:creationId xmlns:a16="http://schemas.microsoft.com/office/drawing/2014/main" id="{0B245A9E-6C9A-F3A8-E4B7-661580126414}"/>
+                <a16:creationId xmlns:a16="http://schemas.microsoft.com/office/drawing/2014/main" id="{C33E9875-85FC-66A4-4EB6-C20D311C431D}"/>
               </a:ext>
             </a:extLst>
           </p:cNvPr>
@@ -9145,97 +10891,55 @@
           <p:nvPr/>
         </p:nvPicPr>
         <p:blipFill>
-          <a:blip>
-            <a:extLst>
-              <a:ext uri="{96DAC541-7B7A-43D3-8B79-37D633B846F1}">
-                <asvg:svgBlip xmlns:asvg="http://schemas.microsoft.com/office/drawing/2016/SVG/main" r:embed="rId2"/>
-              </a:ext>
-            </a:extLst>
-          </a:blip>
+          <a:blip r:embed="rId3"/>
           <a:stretch>
             <a:fillRect/>
           </a:stretch>
         </p:blipFill>
         <p:spPr>
           <a:xfrm>
-            <a:off x="5045006" y="6356057"/>
-            <a:ext cx="6409575" cy="363174"/>
+            <a:off x="415923" y="1823397"/>
+            <a:ext cx="4079875" cy="2286000"/>
           </a:xfrm>
           <a:prstGeom prst="rect">
             <a:avLst/>
           </a:prstGeom>
         </p:spPr>
       </p:pic>
-      <p:sp>
-        <p:nvSpPr>
-          <p:cNvPr id="16" name="object 16">
+      <p:pic>
+        <p:nvPicPr>
+          <p:cNvPr id="9" name="Picture 8">
             <a:extLst>
               <a:ext uri="{FF2B5EF4-FFF2-40B4-BE49-F238E27FC236}">
-                <a16:creationId xmlns:a16="http://schemas.microsoft.com/office/drawing/2014/main" id="{8266F13B-05F1-81DE-B638-66D10EEB9FA2}"/>
+                <a16:creationId xmlns:a16="http://schemas.microsoft.com/office/drawing/2014/main" id="{197BE28C-0347-8676-3CD7-89E2AC5DB986}"/>
               </a:ext>
             </a:extLst>
           </p:cNvPr>
-          <p:cNvSpPr txBox="1">
-            <a:spLocks/>
-          </p:cNvSpPr>
+          <p:cNvPicPr>
+            <a:picLocks noChangeAspect="1"/>
+          </p:cNvPicPr>
           <p:nvPr/>
-        </p:nvSpPr>
-        <p:spPr>
-          <a:xfrm>
-            <a:off x="685800" y="408883"/>
-            <a:ext cx="10994410" cy="718145"/>
+        </p:nvPicPr>
+        <p:blipFill>
+          <a:blip r:embed="rId4"/>
+          <a:stretch>
+            <a:fillRect/>
+          </a:stretch>
+        </p:blipFill>
+        <p:spPr>
+          <a:xfrm>
+            <a:off x="4632146" y="1928587"/>
+            <a:ext cx="3810000" cy="2130850"/>
           </a:xfrm>
           <a:prstGeom prst="rect">
             <a:avLst/>
           </a:prstGeom>
         </p:spPr>
-        <p:txBody>
-          <a:bodyPr vert="horz" wrap="square" lIns="0" tIns="12700" rIns="0" bIns="0" rtlCol="0">
-            <a:spAutoFit/>
-          </a:bodyPr>
-          <a:lstStyle>
-            <a:lvl1pPr>
-              <a:defRPr sz="2000" b="1" i="0">
-                <a:solidFill>
-                  <a:schemeClr val="tx1"/>
-                </a:solidFill>
-                <a:latin typeface="Calibri"/>
-                <a:ea typeface="+mj-ea"/>
-                <a:cs typeface="Calibri"/>
-              </a:defRPr>
-            </a:lvl1pPr>
-          </a:lstStyle>
-          <a:p>
-            <a:pPr marL="12700">
-              <a:spcBef>
-                <a:spcPts val="100"/>
-              </a:spcBef>
-            </a:pPr>
-            <a:r>
-              <a:rPr lang="en-US" sz="2500" kern="0" dirty="0"/>
-              <a:t>Learning outcome #6a – Effect of K </a:t>
-            </a:r>
-          </a:p>
-          <a:p>
-            <a:pPr marL="12700">
-              <a:spcBef>
-                <a:spcPts val="100"/>
-              </a:spcBef>
-            </a:pPr>
-            <a:r>
-              <a:rPr lang="en-US" b="0" kern="0" spc="-5" dirty="0">
-                <a:latin typeface="+mj-lt"/>
-                <a:cs typeface="Lucida Sans"/>
-              </a:rPr>
-              <a:t>Change K value between 0.1 and 0.9 in steps of 0.1</a:t>
-            </a:r>
-          </a:p>
-        </p:txBody>
-      </p:sp>
+      </p:pic>
     </p:spTree>
     <p:extLst>
       <p:ext uri="{BB962C8B-B14F-4D97-AF65-F5344CB8AC3E}">
-        <p14:creationId xmlns:p14="http://schemas.microsoft.com/office/powerpoint/2010/main" val="1931625216"/>
+        <p14:creationId xmlns:p14="http://schemas.microsoft.com/office/powerpoint/2010/main" val="2915989261"/>
       </p:ext>
     </p:extLst>
   </p:cSld>
